--- a/Shodan IF-6000 Exposición.pptx
+++ b/Shodan IF-6000 Exposición.pptx
@@ -5,38 +5,35 @@
     <p:sldMasterId id="2147483648" r:id="rId1"/>
   </p:sldMasterIdLst>
   <p:notesMasterIdLst>
-    <p:notesMasterId r:id="rId18"/>
+    <p:notesMasterId r:id="rId15"/>
   </p:notesMasterIdLst>
   <p:sldIdLst>
     <p:sldId id="256" r:id="rId2"/>
-    <p:sldId id="257" r:id="rId3"/>
-    <p:sldId id="258" r:id="rId4"/>
-    <p:sldId id="259" r:id="rId5"/>
-    <p:sldId id="260" r:id="rId6"/>
-    <p:sldId id="261" r:id="rId7"/>
-    <p:sldId id="262" r:id="rId8"/>
-    <p:sldId id="263" r:id="rId9"/>
-    <p:sldId id="264" r:id="rId10"/>
-    <p:sldId id="265" r:id="rId11"/>
-    <p:sldId id="266" r:id="rId12"/>
-    <p:sldId id="267" r:id="rId13"/>
-    <p:sldId id="268" r:id="rId14"/>
-    <p:sldId id="269" r:id="rId15"/>
-    <p:sldId id="270" r:id="rId16"/>
-    <p:sldId id="271" r:id="rId17"/>
+    <p:sldId id="258" r:id="rId3"/>
+    <p:sldId id="259" r:id="rId4"/>
+    <p:sldId id="260" r:id="rId5"/>
+    <p:sldId id="261" r:id="rId6"/>
+    <p:sldId id="263" r:id="rId7"/>
+    <p:sldId id="264" r:id="rId8"/>
+    <p:sldId id="265" r:id="rId9"/>
+    <p:sldId id="266" r:id="rId10"/>
+    <p:sldId id="267" r:id="rId11"/>
+    <p:sldId id="268" r:id="rId12"/>
+    <p:sldId id="269" r:id="rId13"/>
+    <p:sldId id="271" r:id="rId14"/>
   </p:sldIdLst>
   <p:sldSz cx="12192000" cy="6858000"/>
   <p:notesSz cx="6858000" cy="12192000"/>
   <p:embeddedFontLst>
     <p:embeddedFont>
       <p:font typeface="IBM Plex Sans" panose="020B0503050203000203" pitchFamily="34" charset="0"/>
-      <p:regular r:id="rId19"/>
-      <p:bold r:id="rId20"/>
+      <p:regular r:id="rId16"/>
+      <p:bold r:id="rId17"/>
     </p:embeddedFont>
     <p:embeddedFont>
       <p:font typeface="JetBrains Mono" panose="02000009000000000000" pitchFamily="49" charset="0"/>
-      <p:regular r:id="rId21"/>
-      <p:bold r:id="rId22"/>
+      <p:regular r:id="rId18"/>
+      <p:bold r:id="rId19"/>
     </p:embeddedFont>
   </p:embeddedFontLst>
   <p:defaultTextStyle>
@@ -397,7 +394,7 @@
           <a:p>
             <a:r>
               <a:rPr lang="en-US" dirty="0"/>
-              <a:t>[MARIANGEL, 2:00] DEMO EN VIVO en shodan.io con la sesión iniciada. 1) Buscar country:CR y señalar los paneles laterales: ciudades, puertos, organizaciones. 2) Agregar port:22 (3,602 resultados). 3) Probar product:nginx (6,128). 4) Probar ssl.cert.expired:true (2,399). REGLA: no hacer clic en ningún resultado ni en ningún enlace de un dispositivo; solo mirar totales y paneles. Si la pantalla muestra IPs, no leerlas ni acercarlas. PLAN B: estas capturas, que ya tienen los datos de terceros difuminados.</a:t>
+              <a:t>[ALEJANDRO, 1:30] Lo que salió de los datos. Casi uno de cada cuatro servicios está en el puerto 7547; los productos con TR-069 en el nombre sugieren equipos de acceso a Internet de hogares gestionados por el proveedor, pero eso es una hipótesis, no lo probamos. San José concentra el 61.9 %, aunque la ubicación por IP es una estimación. HTTP aparece 3.8 veces más que HTTPS. Y ojo: indexado no significa vulnerable. Son conteos de servicios, no de equipos, y no los comprobamos contra ningún dispositivo.</a:t>
             </a:r>
           </a:p>
         </p:txBody>
@@ -484,7 +481,7 @@
           <a:p>
             <a:r>
               <a:rPr lang="en-US" dirty="0"/>
-              <a:t>[ALEJANDRO, 2:30] DEMO EN VIVO: correr python shodan_cr.py en la carpeta scripts, esperar unos 15 segundos (hay una pausa de 1 s entre consultas por el límite de la API) y abrir salida/00_dashboard.png. Explicar: el script lee la clave de la configuración de la CLI, nunca del código; hace count con facets y ocho conteos por servicio; guarda un JSON y dibuja los gráficos. Mostrar que los créditos quedan igual. SI FALLA LA RED: python shodan_cr.py --offline regenera todos los gráficos desde datos_cr.json en un segundo.</a:t>
+              <a:t>[MARIANGEL, 1:30] Shodan, Censys, ZoomEye y FOFA responden qué está expuesto. Censys, según sus autores en 2015, se apoya en ZMap y ZGrab y permite consultar campos estructurados. De ZoomEye y FOFA solo verificamos lo que dicen sus propios sitios y no los probamos. GreyNoise responde otra pregunta: si una IP anda escaneando Internet. La probamos con dos consultas: 8.8.8.8 y una IP propia, ambas NOT OBSERVED. Combinarlas da una imagen más completa. Las afirmaciones sobre Censys vienen de un artículo de 2015 y pueden haber cambiado.</a:t>
             </a:r>
           </a:p>
         </p:txBody>
@@ -571,7 +568,7 @@
           <a:p>
             <a:r>
               <a:rPr lang="en-US" dirty="0"/>
-              <a:t>[ALEJANDRO, 1:30] Lo que salió de los datos. Casi uno de cada cuatro servicios está en el puerto 7547; los productos con TR-069 en el nombre sugieren equipos de acceso a Internet de hogares gestionados por el proveedor, pero eso es una hipótesis, no lo probamos. San José concentra el 61.9 %, aunque la ubicación por IP es una estimación. HTTP aparece 3.8 veces más que HTTPS. Y ojo: indexado no significa vulnerable. Son conteos de servicios, no de equipos, y no los comprobamos contra ningún dispositivo.</a:t>
+              <a:t>[MARIANGEL, 1:15] Consultar el índice es pasivo; conectarse a un equipo que aparece ahí, probar contraseñas o interactuar con él es otra cosa y puede ser delito. La Ley 9048 reformó el Código Penal; según la transcripción que consultamos, incluye violación de correspondencia o comunicaciones (art. 196), violación de datos personales (196 bis) y espionaje informático (231). La Ley 8968 define datos personales como datos de una persona física identificada o identificable (art. 3 inciso b) y obliga a informar de previo a los titulares cuando se piden sus datos (art. 5). No somos abogados, no analizamos el alcance de los artículos y el texto debe verificarse en el SCIJ. Por prudencia difuminamos IPs, dominios y organizaciones de terceros. Wu y colaboradores también señalan problemas éticos de los propios motores: poca transparencia y sin forma de optar por no ser escaneado.</a:t>
             </a:r>
           </a:p>
         </p:txBody>
@@ -658,7 +655,7 @@
           <a:p>
             <a:r>
               <a:rPr lang="en-US" dirty="0"/>
-              <a:t>[MARIANGEL, 1:30] Shodan, Censys, ZoomEye y FOFA responden qué está expuesto. Censys, según sus autores en 2015, se apoya en ZMap y ZGrab y permite consultar campos estructurados. De ZoomEye y FOFA solo verificamos lo que dicen sus propios sitios y no los probamos. GreyNoise responde otra pregunta: si una IP anda escaneando Internet. La probamos con dos consultas: 8.8.8.8 y una IP propia, ambas NOT OBSERVED. Combinarlas da una imagen más completa. Las afirmaciones sobre Censys vienen de un artículo de 2015 y pueden haber cambiado.</a:t>
+              <a:t>[ALEJANDRO, 1:15] Cinco ideas, todas atadas a algo que mostramos. Uno: Shodan indexa respuestas de servicios. Dos: con una cuenta gratuita sacamos 292,152 servicios sin gastar créditos. Tres: Costa Rica está concentrada, con el puerto 7547 y San José a la cabeza, aunque la lectura sobre proveedores es una hipótesis. Cuatro: indexado no es vulnerable y el índice es una foto incompleta. Cinco: ningún buscador basta solo y trabajar de forma pasiva fue lo que nos permitió obtener todo esto sin conectarnos a nada. Útil para defender si se mira la propia red, delicada si se usa sin criterio sobre la ajena.</a:t>
             </a:r>
           </a:p>
         </p:txBody>
@@ -681,267 +678,6 @@
             <a:fld id="{F7021451-1387-4CA6-816F-3879F97B5CBC}" type="slidenum">
               <a:rPr lang="en-US"/>
               <a:t>13</a:t>
-            </a:fld>
-            <a:endParaRPr lang="en-US"/>
-          </a:p>
-        </p:txBody>
-      </p:sp>
-    </p:spTree>
-    <p:extLst>
-      <p:ext uri="{BB962C8B-B14F-4D97-AF65-F5344CB8AC3E}">
-        <p14:creationId xmlns:p14="http://schemas.microsoft.com/office/powerpoint/2010/main" val="1024086991"/>
-      </p:ext>
-    </p:extLst>
-  </p:cSld>
-  <p:clrMapOvr>
-    <a:masterClrMapping/>
-  </p:clrMapOvr>
-</p:notes>
-</file>
-
-<file path=ppt/notesSlides/notesSlide14.xml><?xml version="1.0" encoding="utf-8"?>
-<p:notes xmlns:a="http://schemas.openxmlformats.org/drawingml/2006/main" xmlns:r="http://schemas.openxmlformats.org/officeDocument/2006/relationships" xmlns:p="http://schemas.openxmlformats.org/presentationml/2006/main">
-  <p:cSld>
-    <p:spTree>
-      <p:nvGrpSpPr>
-        <p:cNvPr id="1" name=""/>
-        <p:cNvGrpSpPr/>
-        <p:nvPr/>
-      </p:nvGrpSpPr>
-      <p:grpSpPr>
-        <a:xfrm>
-          <a:off x="0" y="0"/>
-          <a:ext cx="0" cy="0"/>
-          <a:chOff x="0" y="0"/>
-          <a:chExt cx="0" cy="0"/>
-        </a:xfrm>
-      </p:grpSpPr>
-      <p:sp>
-        <p:nvSpPr>
-          <p:cNvPr id="2" name="Slide Image Placeholder 1"/>
-          <p:cNvSpPr>
-            <a:spLocks noGrp="1" noRot="1" noChangeAspect="1"/>
-          </p:cNvSpPr>
-          <p:nvPr>
-            <p:ph type="sldImg"/>
-          </p:nvPr>
-        </p:nvSpPr>
-        <p:spPr/>
-      </p:sp>
-      <p:sp>
-        <p:nvSpPr>
-          <p:cNvPr id="3" name="Notes Placeholder 2"/>
-          <p:cNvSpPr>
-            <a:spLocks noGrp="1"/>
-          </p:cNvSpPr>
-          <p:nvPr>
-            <p:ph type="body" idx="1"/>
-          </p:nvPr>
-        </p:nvSpPr>
-        <p:spPr/>
-        <p:txBody>
-          <a:bodyPr/>
-          <a:lstStyle/>
-          <a:p>
-            <a:r>
-              <a:rPr lang="en-US" dirty="0"/>
-              <a:t>[MARIANGEL, 1:15] Consultar el índice es pasivo; conectarse a un equipo que aparece ahí, probar contraseñas o interactuar con él es otra cosa y puede ser delito. La Ley 9048 reformó el Código Penal; según la transcripción que consultamos, incluye violación de correspondencia o comunicaciones (art. 196), violación de datos personales (196 bis) y espionaje informático (231). La Ley 8968 define datos personales como datos de una persona física identificada o identificable (art. 3 inciso b) y obliga a informar de previo a los titulares cuando se piden sus datos (art. 5). No somos abogados, no analizamos el alcance de los artículos y el texto debe verificarse en el SCIJ. Por prudencia difuminamos IPs, dominios y organizaciones de terceros. Wu y colaboradores también señalan problemas éticos de los propios motores: poca transparencia y sin forma de optar por no ser escaneado.</a:t>
-            </a:r>
-          </a:p>
-        </p:txBody>
-      </p:sp>
-      <p:sp>
-        <p:nvSpPr>
-          <p:cNvPr id="4" name="Slide Number Placeholder 3"/>
-          <p:cNvSpPr>
-            <a:spLocks noGrp="1"/>
-          </p:cNvSpPr>
-          <p:nvPr>
-            <p:ph type="sldNum" sz="quarter" idx="10"/>
-          </p:nvPr>
-        </p:nvSpPr>
-        <p:spPr/>
-        <p:txBody>
-          <a:bodyPr/>
-          <a:lstStyle/>
-          <a:p>
-            <a:fld id="{F7021451-1387-4CA6-816F-3879F97B5CBC}" type="slidenum">
-              <a:rPr lang="en-US"/>
-              <a:t>14</a:t>
-            </a:fld>
-            <a:endParaRPr lang="en-US"/>
-          </a:p>
-        </p:txBody>
-      </p:sp>
-    </p:spTree>
-    <p:extLst>
-      <p:ext uri="{BB962C8B-B14F-4D97-AF65-F5344CB8AC3E}">
-        <p14:creationId xmlns:p14="http://schemas.microsoft.com/office/powerpoint/2010/main" val="1024086991"/>
-      </p:ext>
-    </p:extLst>
-  </p:cSld>
-  <p:clrMapOvr>
-    <a:masterClrMapping/>
-  </p:clrMapOvr>
-</p:notes>
-</file>
-
-<file path=ppt/notesSlides/notesSlide15.xml><?xml version="1.0" encoding="utf-8"?>
-<p:notes xmlns:a="http://schemas.openxmlformats.org/drawingml/2006/main" xmlns:r="http://schemas.openxmlformats.org/officeDocument/2006/relationships" xmlns:p="http://schemas.openxmlformats.org/presentationml/2006/main">
-  <p:cSld>
-    <p:spTree>
-      <p:nvGrpSpPr>
-        <p:cNvPr id="1" name=""/>
-        <p:cNvGrpSpPr/>
-        <p:nvPr/>
-      </p:nvGrpSpPr>
-      <p:grpSpPr>
-        <a:xfrm>
-          <a:off x="0" y="0"/>
-          <a:ext cx="0" cy="0"/>
-          <a:chOff x="0" y="0"/>
-          <a:chExt cx="0" cy="0"/>
-        </a:xfrm>
-      </p:grpSpPr>
-      <p:sp>
-        <p:nvSpPr>
-          <p:cNvPr id="2" name="Slide Image Placeholder 1"/>
-          <p:cNvSpPr>
-            <a:spLocks noGrp="1" noRot="1" noChangeAspect="1"/>
-          </p:cNvSpPr>
-          <p:nvPr>
-            <p:ph type="sldImg"/>
-          </p:nvPr>
-        </p:nvSpPr>
-        <p:spPr/>
-      </p:sp>
-      <p:sp>
-        <p:nvSpPr>
-          <p:cNvPr id="3" name="Notes Placeholder 2"/>
-          <p:cNvSpPr>
-            <a:spLocks noGrp="1"/>
-          </p:cNvSpPr>
-          <p:nvPr>
-            <p:ph type="body" idx="1"/>
-          </p:nvPr>
-        </p:nvSpPr>
-        <p:spPr/>
-        <p:txBody>
-          <a:bodyPr/>
-          <a:lstStyle/>
-          <a:p>
-            <a:r>
-              <a:rPr lang="en-US" dirty="0"/>
-              <a:t>[ALEJANDRO, 1:00] Antes de las conclusiones, cómo leer los números. Son una foto del 27 de octubre: el mismo día salieron 292,118 con la CLI, 292,152 con el script y 293,085 en la web. No todo lo expuesto está indexado: una IP propia dio sin información. La lectura sobre el puerto 7547 y los proveedores es una hipótesis. Y son servicios indexados, no equipos únicos ni vulnerables, sin contrastar con otra fuente.</a:t>
-            </a:r>
-          </a:p>
-        </p:txBody>
-      </p:sp>
-      <p:sp>
-        <p:nvSpPr>
-          <p:cNvPr id="4" name="Slide Number Placeholder 3"/>
-          <p:cNvSpPr>
-            <a:spLocks noGrp="1"/>
-          </p:cNvSpPr>
-          <p:nvPr>
-            <p:ph type="sldNum" sz="quarter" idx="10"/>
-          </p:nvPr>
-        </p:nvSpPr>
-        <p:spPr/>
-        <p:txBody>
-          <a:bodyPr/>
-          <a:lstStyle/>
-          <a:p>
-            <a:fld id="{F7021451-1387-4CA6-816F-3879F97B5CBC}" type="slidenum">
-              <a:rPr lang="en-US"/>
-              <a:t>15</a:t>
-            </a:fld>
-            <a:endParaRPr lang="en-US"/>
-          </a:p>
-        </p:txBody>
-      </p:sp>
-    </p:spTree>
-    <p:extLst>
-      <p:ext uri="{BB962C8B-B14F-4D97-AF65-F5344CB8AC3E}">
-        <p14:creationId xmlns:p14="http://schemas.microsoft.com/office/powerpoint/2010/main" val="1024086991"/>
-      </p:ext>
-    </p:extLst>
-  </p:cSld>
-  <p:clrMapOvr>
-    <a:masterClrMapping/>
-  </p:clrMapOvr>
-</p:notes>
-</file>
-
-<file path=ppt/notesSlides/notesSlide16.xml><?xml version="1.0" encoding="utf-8"?>
-<p:notes xmlns:a="http://schemas.openxmlformats.org/drawingml/2006/main" xmlns:r="http://schemas.openxmlformats.org/officeDocument/2006/relationships" xmlns:p="http://schemas.openxmlformats.org/presentationml/2006/main">
-  <p:cSld>
-    <p:spTree>
-      <p:nvGrpSpPr>
-        <p:cNvPr id="1" name=""/>
-        <p:cNvGrpSpPr/>
-        <p:nvPr/>
-      </p:nvGrpSpPr>
-      <p:grpSpPr>
-        <a:xfrm>
-          <a:off x="0" y="0"/>
-          <a:ext cx="0" cy="0"/>
-          <a:chOff x="0" y="0"/>
-          <a:chExt cx="0" cy="0"/>
-        </a:xfrm>
-      </p:grpSpPr>
-      <p:sp>
-        <p:nvSpPr>
-          <p:cNvPr id="2" name="Slide Image Placeholder 1"/>
-          <p:cNvSpPr>
-            <a:spLocks noGrp="1" noRot="1" noChangeAspect="1"/>
-          </p:cNvSpPr>
-          <p:nvPr>
-            <p:ph type="sldImg"/>
-          </p:nvPr>
-        </p:nvSpPr>
-        <p:spPr/>
-      </p:sp>
-      <p:sp>
-        <p:nvSpPr>
-          <p:cNvPr id="3" name="Notes Placeholder 2"/>
-          <p:cNvSpPr>
-            <a:spLocks noGrp="1"/>
-          </p:cNvSpPr>
-          <p:nvPr>
-            <p:ph type="body" idx="1"/>
-          </p:nvPr>
-        </p:nvSpPr>
-        <p:spPr/>
-        <p:txBody>
-          <a:bodyPr/>
-          <a:lstStyle/>
-          <a:p>
-            <a:r>
-              <a:rPr lang="en-US" dirty="0"/>
-              <a:t>[ALEJANDRO, 1:15] Cinco ideas, todas atadas a algo que mostramos. Uno: Shodan indexa respuestas de servicios. Dos: con una cuenta gratuita sacamos 292,152 servicios sin gastar créditos. Tres: Costa Rica está concentrada, con el puerto 7547 y San José a la cabeza, aunque la lectura sobre proveedores es una hipótesis. Cuatro: indexado no es vulnerable y el índice es una foto incompleta. Cinco: ningún buscador basta solo y trabajar de forma pasiva fue lo que nos permitió obtener todo esto sin conectarnos a nada. Útil para defender si se mira la propia red, delicada si se usa sin criterio sobre la ajena.</a:t>
-            </a:r>
-          </a:p>
-        </p:txBody>
-      </p:sp>
-      <p:sp>
-        <p:nvSpPr>
-          <p:cNvPr id="4" name="Slide Number Placeholder 3"/>
-          <p:cNvSpPr>
-            <a:spLocks noGrp="1"/>
-          </p:cNvSpPr>
-          <p:nvPr>
-            <p:ph type="sldNum" sz="quarter" idx="10"/>
-          </p:nvPr>
-        </p:nvSpPr>
-        <p:spPr/>
-        <p:txBody>
-          <a:bodyPr/>
-          <a:lstStyle/>
-          <a:p>
-            <a:fld id="{F7021451-1387-4CA6-816F-3879F97B5CBC}" type="slidenum">
-              <a:rPr lang="en-US"/>
-              <a:t>16</a:t>
             </a:fld>
             <a:endParaRPr lang="en-US"/>
           </a:p>
@@ -1006,7 +742,7 @@
           <a:p>
             <a:r>
               <a:rPr lang="en-US" dirty="0"/>
-              <a:t>[MARIANGEL, 1:00] Seguimos el temario del profesor en este orden. La parte pesada es el punto 5: tres demos en vivo. Y una regla que atraviesa todo: solo consultamos el índice de Shodan, nunca tocamos un dispositivo.</a:t>
+              <a:t>[MARIANGEL, 1:30] Un buscador normal guarda páginas. Shodan guarda la información pública que expone un servicio. A eso se le llama banner: metadatos del software que corre en el dispositivo, como el servidor, su versión o un mensaje de bienvenida. La documentación lo resume así: Shodan rastrea Internet, Google rastrea la World Wide Web. Por eso buscar country:CR port:22 devuelve servicios SSH en Costa Rica, no artículos sobre SSH. El banner de la pantalla es solo un ejemplo ilustrativo.</a:t>
             </a:r>
           </a:p>
         </p:txBody>
@@ -1093,7 +829,7 @@
           <a:p>
             <a:r>
               <a:rPr lang="en-US" dirty="0"/>
-              <a:t>[MARIANGEL, 1:30] Un buscador normal guarda páginas. Shodan guarda la información pública que expone un servicio. A eso se le llama banner: metadatos del software que corre en el dispositivo, como el servidor, su versión o un mensaje de bienvenida. La documentación lo resume así: Shodan rastrea Internet, Google rastrea la World Wide Web. Por eso buscar country:CR port:22 devuelve servicios SSH en Costa Rica, no artículos sobre SSH. El banner de la pantalla es solo un ejemplo ilustrativo.</a:t>
+              <a:t>[MARIANGEL, 1:30] Shodan sirve para verse desde afuera, que es lo que debería hacer cualquier equipo de TI. Pero también es reconocimiento para un atacante. Un estudio con honeypots industriales no encontró ataques masivos por estar indexados, aunque eso depende del diseño del experimento. Y en Costa Rica el número es concreto: 292,152 servicios indexados el 27 de octubre.</a:t>
             </a:r>
           </a:p>
         </p:txBody>
@@ -1180,7 +916,7 @@
           <a:p>
             <a:r>
               <a:rPr lang="en-US" dirty="0"/>
-              <a:t>[MARIANGEL, 1:30] Shodan sirve para verse desde afuera, que es lo que debería hacer cualquier equipo de TI. Pero también es reconocimiento para un atacante. Un estudio con honeypots industriales no encontró ataques masivos por estar indexados, aunque eso depende del diseño del experimento. Y en Costa Rica el número es concreto: 292,152 servicios indexados el 27 de octubre.</a:t>
+              <a:t>[MARIANGEL, 1:30] Cuatro cosas. Filtros: se escriben nombre:valor. Facets: rankings agregados, que es justo lo que usamos para Costa Rica. Tres formas de acceso: web, línea de comandos y API. Y créditos: un crédito descarga 100 resultados y se gasta al usar filtros o pedir la página 2. El endpoint count no gasta créditos, y eso lo comprobamos: el panel marcaba 100 antes y 100 después. El plan académico, con correo @ucr.ac.cr, da 100 créditos de consulta, 100 de escaneo y 16 IPs a monitorear; los planes pueden cambiar, hay que verificarlos en la documentación.</a:t>
             </a:r>
           </a:p>
         </p:txBody>
@@ -1267,7 +1003,7 @@
           <a:p>
             <a:r>
               <a:rPr lang="en-US" dirty="0"/>
-              <a:t>[MARIANGEL, 1:30] Cuatro cosas. Filtros: se escriben nombre:valor. Facets: rankings agregados, que es justo lo que usamos para Costa Rica. Tres formas de acceso: web, línea de comandos y API. Y créditos: un crédito descarga 100 resultados y se gasta al usar filtros o pedir la página 2. El endpoint count no gasta créditos, y eso lo comprobamos: el panel marcaba 100 antes y 100 después. El plan académico, con correo @ucr.ac.cr, da 100 créditos de consulta, 100 de escaneo y 16 IPs a monitorear; los planes pueden cambiar, hay que verificarlos en la documentación.</a:t>
+              <a:t>[MARIANGEL, 1:30] Shodan recorre Internet, guarda la información pública de cada servicio como banner, la ordena en un índice con metadatos y nosotros consultamos ese índice. Tres consecuencias que vimos: el dato tiene fecha, por eso los totales cambian incluso el mismo día; no todo servicio expuesto está indexado, la consulta de una IP propia dio cero información; y según Wu y colaboradores, cambiar el puerto o bloquear IPs de escáneres no evita ser escaneado.</a:t>
             </a:r>
           </a:p>
         </p:txBody>
@@ -1354,7 +1090,7 @@
           <a:p>
             <a:r>
               <a:rPr lang="en-US" dirty="0"/>
-              <a:t>[MARIANGEL, 1:30] Shodan recorre Internet, guarda la información pública de cada servicio como banner, la ordena en un índice con metadatos y nosotros consultamos ese índice. Tres consecuencias que vimos: el dato tiene fecha, por eso los totales cambian incluso el mismo día; no todo servicio expuesto está indexado, la consulta de una IP propia dio cero información; y según Wu y colaboradores, cambiar el puerto o bloquear IPs de escáneres no evita ser escaneado.</a:t>
+              <a:t>[MARIANGEL, 1:15] DEMO EN VIVO: abrir el panel de desarrollador en Shodan. Mostrar el nivel Academic membership, los 100 créditos de consulta y los 100 de escaneo. Mensaje: con una cuenta gratuita se puede hacer todo esto, siempre que se planifique el consumo. No mostrar la clave de API en pantalla. PLAN B: esta captura.</a:t>
             </a:r>
           </a:p>
         </p:txBody>
@@ -1441,7 +1177,7 @@
           <a:p>
             <a:r>
               <a:rPr lang="en-US" dirty="0"/>
-              <a:t>[ALEJANDRO, 0:45] Pasamos a lo práctico. Para ser claros desde el principio: esto es lo que practicamos y esto lo que solo investigamos en fuentes. Las demos que siguen se hacen en vivo; si falla la red o se agotan los créditos, tenemos capturas, un video y el modo offline del script.</a:t>
+              <a:t>[ALEJANDRO, 2:00] DEMO EN VIVO en terminal. Orden: 1) shodan info (créditos). 2) shodan count country:CR. 3) shodan stats --facets port country:CR. 4) shodan stats --facets product country:CR port:22. Qué decir: count y stats con facets no gastan créditos y no bajan IPs, es exactamente lo que necesitamos para un análisis agregado. En Windows el comando es python -m shodan. PLAN B: estas capturas o el video corto.</a:t>
             </a:r>
           </a:p>
         </p:txBody>
@@ -1528,7 +1264,7 @@
           <a:p>
             <a:r>
               <a:rPr lang="en-US" dirty="0"/>
-              <a:t>[MARIANGEL, 1:15] DEMO EN VIVO: abrir el panel de desarrollador en Shodan. Mostrar el nivel Academic membership, los 100 créditos de consulta y los 100 de escaneo. Mensaje: con una cuenta gratuita se puede hacer todo esto, siempre que se planifique el consumo. No mostrar la clave de API en pantalla. PLAN B: esta captura.</a:t>
+              <a:t>[MARIANGEL, 2:00] DEMO EN VIVO en shodan.io con la sesión iniciada. 1) Buscar country:CR y señalar los paneles laterales: ciudades, puertos, organizaciones. 2) Agregar port:22 (3,602 resultados). 3) Probar product:nginx (6,128). 4) Probar ssl.cert.expired:true (2,399). REGLA: no hacer clic en ningún resultado ni en ningún enlace de un dispositivo; solo mirar totales y paneles. Si la pantalla muestra IPs, no leerlas ni acercarlas. PLAN B: estas capturas, que ya tienen los datos de terceros difuminados.</a:t>
             </a:r>
           </a:p>
         </p:txBody>
@@ -1615,7 +1351,7 @@
           <a:p>
             <a:r>
               <a:rPr lang="en-US" dirty="0"/>
-              <a:t>[ALEJANDRO, 2:00] DEMO EN VIVO en terminal. Orden: 1) shodan info (créditos). 2) shodan count country:CR. 3) shodan stats --facets port country:CR. 4) shodan stats --facets product country:CR port:22. Qué decir: count y stats con facets no gastan créditos y no bajan IPs, es exactamente lo que necesitamos para un análisis agregado. En Windows el comando es python -m shodan. PLAN B: estas capturas o el video corto.</a:t>
+              <a:t>[ALEJANDRO, 2:30] DEMO EN VIVO: correr python shodan_cr.py en la carpeta scripts, esperar unos 15 segundos (hay una pausa de 1 s entre consultas por el límite de la API) y abrir salida/00_dashboard.png. Explicar: el script lee la clave de la configuración de la CLI, nunca del código; hace count con facets y ocho conteos por servicio; guarda un JSON y dibuja los gráficos. Mostrar que los créditos quedan igual. SI FALLA LA RED: python shodan_cr.py --offline regenera todos los gráficos desde datos_cr.json en un segundo.</a:t>
             </a:r>
           </a:p>
         </p:txBody>
@@ -2528,1208 +2264,6 @@
 
 <file path=ppt/slides/slide10.xml><?xml version="1.0" encoding="utf-8"?>
 <p:sld xmlns:a="http://schemas.openxmlformats.org/drawingml/2006/main" xmlns:r="http://schemas.openxmlformats.org/officeDocument/2006/relationships" xmlns:p="http://schemas.openxmlformats.org/presentationml/2006/main">
-  <p:cSld name="Slide 10">
-    <p:bg>
-      <p:bgPr>
-        <a:solidFill>
-          <a:srgbClr val="F4F1EA"/>
-        </a:solidFill>
-        <a:effectLst/>
-      </p:bgPr>
-    </p:bg>
-    <p:spTree>
-      <p:nvGrpSpPr>
-        <p:cNvPr id="1" name=""/>
-        <p:cNvGrpSpPr/>
-        <p:nvPr/>
-      </p:nvGrpSpPr>
-      <p:grpSpPr>
-        <a:xfrm>
-          <a:off x="0" y="0"/>
-          <a:ext cx="0" cy="0"/>
-          <a:chOff x="0" y="0"/>
-          <a:chExt cx="0" cy="0"/>
-        </a:xfrm>
-      </p:grpSpPr>
-      <p:sp>
-        <p:nvSpPr>
-          <p:cNvPr id="2" name="Text 0"/>
-          <p:cNvSpPr/>
-          <p:nvPr/>
-        </p:nvSpPr>
-        <p:spPr>
-          <a:xfrm>
-            <a:off x="812800" y="812800"/>
-            <a:ext cx="10883392" cy="238720"/>
-          </a:xfrm>
-          <a:prstGeom prst="rect">
-            <a:avLst/>
-          </a:prstGeom>
-          <a:noFill/>
-          <a:ln/>
-        </p:spPr>
-        <p:txBody>
-          <a:bodyPr wrap="square" lIns="0" tIns="0" rIns="0" bIns="0" rtlCol="0" anchor="t">
-            <a:normAutofit/>
-          </a:bodyPr>
-          <a:lstStyle/>
-          <a:p>
-            <a:pPr marL="0" indent="0" algn="l">
-              <a:lnSpc>
-                <a:spcPts val="1680"/>
-              </a:lnSpc>
-              <a:buNone/>
-            </a:pPr>
-            <a:r>
-              <a:rPr lang="en-US" sz="1200" dirty="0">
-                <a:solidFill>
-                  <a:srgbClr val="C8432E"/>
-                </a:solidFill>
-                <a:latin typeface="JetBrains Mono" pitchFamily="49" charset="0"/>
-                <a:ea typeface="JetBrains Mono" pitchFamily="49" charset="-122"/>
-                <a:cs typeface="JetBrains Mono" pitchFamily="49" charset="-120"/>
-              </a:rPr>
-              <a:t>PRÁCTICA 3 · INTERFAZ WEB Y FILTROS</a:t>
-            </a:r>
-            <a:endParaRPr lang="en-US" sz="1200" dirty="0"/>
-          </a:p>
-        </p:txBody>
-      </p:sp>
-      <p:sp>
-        <p:nvSpPr>
-          <p:cNvPr id="3" name="Text 1"/>
-          <p:cNvSpPr>
-            <a:spLocks noGrp="1"/>
-          </p:cNvSpPr>
-          <p:nvPr>
-            <p:ph type="title"/>
-          </p:nvPr>
-        </p:nvSpPr>
-        <p:spPr>
-          <a:xfrm>
-            <a:off x="812800" y="1254720"/>
-            <a:ext cx="10883392" cy="472430"/>
-          </a:xfrm>
-          <a:prstGeom prst="rect">
-            <a:avLst/>
-          </a:prstGeom>
-          <a:noFill/>
-          <a:ln/>
-        </p:spPr>
-        <p:txBody>
-          <a:bodyPr wrap="square" lIns="0" tIns="0" rIns="0" bIns="0" rtlCol="0" anchor="t">
-            <a:normAutofit/>
-          </a:bodyPr>
-          <a:lstStyle/>
-          <a:p>
-            <a:pPr marL="0" indent="0" algn="l">
-              <a:lnSpc>
-                <a:spcPts val="3520"/>
-              </a:lnSpc>
-              <a:buNone/>
-            </a:pPr>
-            <a:r>
-              <a:rPr lang="en-US" sz="3200" b="1" i="0" dirty="0">
-                <a:solidFill>
-                  <a:srgbClr val="16202F"/>
-                </a:solidFill>
-                <a:latin typeface="IBM Plex Sans" pitchFamily="34" charset="0"/>
-                <a:ea typeface="IBM Plex Sans" pitchFamily="34" charset="-122"/>
-                <a:cs typeface="IBM Plex Sans" pitchFamily="34" charset="-120"/>
-              </a:rPr>
-              <a:t>Combinar filtros convierte una duda en un conteo</a:t>
-            </a:r>
-            <a:endParaRPr lang="en-US" sz="3200" dirty="0"/>
-          </a:p>
-        </p:txBody>
-      </p:sp>
-      <p:sp>
-        <p:nvSpPr>
-          <p:cNvPr id="4" name="Shape 2"/>
-          <p:cNvSpPr/>
-          <p:nvPr/>
-        </p:nvSpPr>
-        <p:spPr>
-          <a:xfrm>
-            <a:off x="812800" y="1930350"/>
-            <a:ext cx="5181600" cy="2457450"/>
-          </a:xfrm>
-          <a:prstGeom prst="roundRect">
-            <a:avLst>
-              <a:gd name="adj" fmla="val 2067"/>
-            </a:avLst>
-          </a:prstGeom>
-          <a:solidFill>
-            <a:srgbClr val="FFFFFF"/>
-          </a:solidFill>
-          <a:ln/>
-        </p:spPr>
-        <p:txBody>
-          <a:bodyPr/>
-          <a:lstStyle/>
-          <a:p>
-            <a:endParaRPr lang="es-ES_tradnl"/>
-          </a:p>
-        </p:txBody>
-      </p:sp>
-      <p:pic>
-        <p:nvPicPr>
-          <p:cNvPr id="5" name="Image 0" descr="Búsqueda country:CR en la interfaz web de Shodan, con datos de terceros difuminados"/>
-          <p:cNvPicPr>
-            <a:picLocks noChangeAspect="1"/>
-          </p:cNvPicPr>
-          <p:nvPr/>
-        </p:nvPicPr>
-        <p:blipFill>
-          <a:blip r:embed="rId3"/>
-          <a:srcRect l="-75" r="-75"/>
-          <a:stretch/>
-        </p:blipFill>
-        <p:spPr>
-          <a:xfrm>
-            <a:off x="819150" y="1936700"/>
-            <a:ext cx="5168900" cy="2444750"/>
-          </a:xfrm>
-          <a:prstGeom prst="roundRect">
-            <a:avLst>
-              <a:gd name="adj" fmla="val 1818"/>
-            </a:avLst>
-          </a:prstGeom>
-        </p:spPr>
-      </p:pic>
-      <p:sp>
-        <p:nvSpPr>
-          <p:cNvPr id="6" name="Shape 3"/>
-          <p:cNvSpPr/>
-          <p:nvPr/>
-        </p:nvSpPr>
-        <p:spPr>
-          <a:xfrm>
-            <a:off x="815975" y="1933525"/>
-            <a:ext cx="5175250" cy="2451100"/>
-          </a:xfrm>
-          <a:prstGeom prst="roundRect">
-            <a:avLst>
-              <a:gd name="adj" fmla="val 1943"/>
-            </a:avLst>
-          </a:prstGeom>
-          <a:noFill/>
-          <a:ln w="6350">
-            <a:solidFill>
-              <a:srgbClr val="DDD8CC"/>
-            </a:solidFill>
-            <a:prstDash val="solid"/>
-          </a:ln>
-        </p:spPr>
-        <p:txBody>
-          <a:bodyPr/>
-          <a:lstStyle/>
-          <a:p>
-            <a:endParaRPr lang="es-ES_tradnl"/>
-          </a:p>
-        </p:txBody>
-      </p:sp>
-      <p:sp>
-        <p:nvSpPr>
-          <p:cNvPr id="7" name="Text 4"/>
-          <p:cNvSpPr/>
-          <p:nvPr/>
-        </p:nvSpPr>
-        <p:spPr>
-          <a:xfrm>
-            <a:off x="812800" y="4489400"/>
-            <a:ext cx="5337048" cy="274290"/>
-          </a:xfrm>
-          <a:prstGeom prst="rect">
-            <a:avLst/>
-          </a:prstGeom>
-          <a:noFill/>
-          <a:ln/>
-        </p:spPr>
-        <p:txBody>
-          <a:bodyPr wrap="square" lIns="0" tIns="0" rIns="0" bIns="0" rtlCol="0" anchor="t">
-            <a:normAutofit/>
-          </a:bodyPr>
-          <a:lstStyle/>
-          <a:p>
-            <a:pPr marL="0" indent="0" algn="l">
-              <a:lnSpc>
-                <a:spcPts val="1960"/>
-              </a:lnSpc>
-              <a:buNone/>
-            </a:pPr>
-            <a:r>
-              <a:rPr lang="en-US" sz="1400" b="1" dirty="0">
-                <a:solidFill>
-                  <a:srgbClr val="16202F"/>
-                </a:solidFill>
-                <a:latin typeface="JetBrains Mono" pitchFamily="49" charset="0"/>
-                <a:ea typeface="JetBrains Mono" pitchFamily="49" charset="-122"/>
-                <a:cs typeface="JetBrains Mono" pitchFamily="49" charset="-120"/>
-              </a:rPr>
-              <a:t>country:CR</a:t>
-            </a:r>
-            <a:endParaRPr lang="en-US" sz="1400" dirty="0"/>
-          </a:p>
-        </p:txBody>
-      </p:sp>
-      <p:sp>
-        <p:nvSpPr>
-          <p:cNvPr id="8" name="Text 5"/>
-          <p:cNvSpPr/>
-          <p:nvPr/>
-        </p:nvSpPr>
-        <p:spPr>
-          <a:xfrm>
-            <a:off x="812800" y="4839891"/>
-            <a:ext cx="5337048" cy="309860"/>
-          </a:xfrm>
-          <a:prstGeom prst="rect">
-            <a:avLst/>
-          </a:prstGeom>
-          <a:noFill/>
-          <a:ln/>
-        </p:spPr>
-        <p:txBody>
-          <a:bodyPr wrap="square" lIns="0" tIns="0" rIns="0" bIns="0" rtlCol="0" anchor="t">
-            <a:normAutofit/>
-          </a:bodyPr>
-          <a:lstStyle/>
-          <a:p>
-            <a:pPr marL="0" indent="0" algn="l">
-              <a:lnSpc>
-                <a:spcPts val="2240"/>
-              </a:lnSpc>
-              <a:buNone/>
-            </a:pPr>
-            <a:r>
-              <a:rPr lang="en-US" sz="1600" dirty="0">
-                <a:solidFill>
-                  <a:srgbClr val="16202F"/>
-                </a:solidFill>
-                <a:latin typeface="IBM Plex Sans" pitchFamily="34" charset="0"/>
-                <a:ea typeface="IBM Plex Sans" pitchFamily="34" charset="-122"/>
-                <a:cs typeface="IBM Plex Sans" pitchFamily="34" charset="-120"/>
-              </a:rPr>
-              <a:t>293,085 resultados</a:t>
-            </a:r>
-            <a:endParaRPr lang="en-US" sz="1600" dirty="0"/>
-          </a:p>
-        </p:txBody>
-      </p:sp>
-      <p:sp>
-        <p:nvSpPr>
-          <p:cNvPr id="9" name="Shape 6"/>
-          <p:cNvSpPr/>
-          <p:nvPr/>
-        </p:nvSpPr>
-        <p:spPr>
-          <a:xfrm>
-            <a:off x="6197600" y="1930350"/>
-            <a:ext cx="5181600" cy="2419350"/>
-          </a:xfrm>
-          <a:prstGeom prst="roundRect">
-            <a:avLst>
-              <a:gd name="adj" fmla="val 2100"/>
-            </a:avLst>
-          </a:prstGeom>
-          <a:solidFill>
-            <a:srgbClr val="FFFFFF"/>
-          </a:solidFill>
-          <a:ln/>
-        </p:spPr>
-        <p:txBody>
-          <a:bodyPr/>
-          <a:lstStyle/>
-          <a:p>
-            <a:endParaRPr lang="es-ES_tradnl"/>
-          </a:p>
-        </p:txBody>
-      </p:sp>
-      <p:pic>
-        <p:nvPicPr>
-          <p:cNvPr id="10" name="Image 1" descr="Búsqueda de certificados vencidos en Costa Rica, con datos de terceros difuminados"/>
-          <p:cNvPicPr>
-            <a:picLocks noChangeAspect="1"/>
-          </p:cNvPicPr>
-          <p:nvPr/>
-        </p:nvPicPr>
-        <p:blipFill>
-          <a:blip r:embed="rId4"/>
-          <a:srcRect l="-175" r="-175"/>
-          <a:stretch/>
-        </p:blipFill>
-        <p:spPr>
-          <a:xfrm>
-            <a:off x="6203950" y="1936700"/>
-            <a:ext cx="5168900" cy="2406650"/>
-          </a:xfrm>
-          <a:prstGeom prst="roundRect">
-            <a:avLst>
-              <a:gd name="adj" fmla="val 1847"/>
-            </a:avLst>
-          </a:prstGeom>
-        </p:spPr>
-      </p:pic>
-      <p:sp>
-        <p:nvSpPr>
-          <p:cNvPr id="11" name="Shape 7"/>
-          <p:cNvSpPr/>
-          <p:nvPr/>
-        </p:nvSpPr>
-        <p:spPr>
-          <a:xfrm>
-            <a:off x="6200775" y="1933525"/>
-            <a:ext cx="5175250" cy="2413000"/>
-          </a:xfrm>
-          <a:prstGeom prst="roundRect">
-            <a:avLst>
-              <a:gd name="adj" fmla="val 1974"/>
-            </a:avLst>
-          </a:prstGeom>
-          <a:noFill/>
-          <a:ln w="6350">
-            <a:solidFill>
-              <a:srgbClr val="DDD8CC"/>
-            </a:solidFill>
-            <a:prstDash val="solid"/>
-          </a:ln>
-        </p:spPr>
-        <p:txBody>
-          <a:bodyPr/>
-          <a:lstStyle/>
-          <a:p>
-            <a:endParaRPr lang="es-ES_tradnl"/>
-          </a:p>
-        </p:txBody>
-      </p:sp>
-      <p:sp>
-        <p:nvSpPr>
-          <p:cNvPr id="12" name="Text 8"/>
-          <p:cNvSpPr/>
-          <p:nvPr/>
-        </p:nvSpPr>
-        <p:spPr>
-          <a:xfrm>
-            <a:off x="6197600" y="4451300"/>
-            <a:ext cx="5337048" cy="274290"/>
-          </a:xfrm>
-          <a:prstGeom prst="rect">
-            <a:avLst/>
-          </a:prstGeom>
-          <a:noFill/>
-          <a:ln/>
-        </p:spPr>
-        <p:txBody>
-          <a:bodyPr wrap="square" lIns="0" tIns="0" rIns="0" bIns="0" rtlCol="0" anchor="t">
-            <a:normAutofit/>
-          </a:bodyPr>
-          <a:lstStyle/>
-          <a:p>
-            <a:pPr marL="0" indent="0" algn="l">
-              <a:lnSpc>
-                <a:spcPts val="1960"/>
-              </a:lnSpc>
-              <a:buNone/>
-            </a:pPr>
-            <a:r>
-              <a:rPr lang="en-US" sz="1400" b="1" dirty="0">
-                <a:solidFill>
-                  <a:srgbClr val="16202F"/>
-                </a:solidFill>
-                <a:latin typeface="JetBrains Mono" pitchFamily="49" charset="0"/>
-                <a:ea typeface="JetBrains Mono" pitchFamily="49" charset="-122"/>
-                <a:cs typeface="JetBrains Mono" pitchFamily="49" charset="-120"/>
-              </a:rPr>
-              <a:t>country:CR ssl.cert.expired:true</a:t>
-            </a:r>
-            <a:endParaRPr lang="en-US" sz="1400" dirty="0"/>
-          </a:p>
-        </p:txBody>
-      </p:sp>
-      <p:sp>
-        <p:nvSpPr>
-          <p:cNvPr id="13" name="Text 9"/>
-          <p:cNvSpPr/>
-          <p:nvPr/>
-        </p:nvSpPr>
-        <p:spPr>
-          <a:xfrm>
-            <a:off x="6197600" y="4801791"/>
-            <a:ext cx="5337048" cy="309860"/>
-          </a:xfrm>
-          <a:prstGeom prst="rect">
-            <a:avLst/>
-          </a:prstGeom>
-          <a:noFill/>
-          <a:ln/>
-        </p:spPr>
-        <p:txBody>
-          <a:bodyPr wrap="square" lIns="0" tIns="0" rIns="0" bIns="0" rtlCol="0" anchor="t">
-            <a:normAutofit/>
-          </a:bodyPr>
-          <a:lstStyle/>
-          <a:p>
-            <a:pPr marL="0" indent="0" algn="l">
-              <a:lnSpc>
-                <a:spcPts val="2240"/>
-              </a:lnSpc>
-              <a:buNone/>
-            </a:pPr>
-            <a:r>
-              <a:rPr lang="en-US" sz="1600" dirty="0">
-                <a:solidFill>
-                  <a:srgbClr val="16202F"/>
-                </a:solidFill>
-                <a:latin typeface="IBM Plex Sans" pitchFamily="34" charset="0"/>
-                <a:ea typeface="IBM Plex Sans" pitchFamily="34" charset="-122"/>
-                <a:cs typeface="IBM Plex Sans" pitchFamily="34" charset="-120"/>
-              </a:rPr>
-              <a:t>2,399 servicios con certificado vencido</a:t>
-            </a:r>
-            <a:endParaRPr lang="en-US" sz="1600" dirty="0"/>
-          </a:p>
-        </p:txBody>
-      </p:sp>
-      <p:sp>
-        <p:nvSpPr>
-          <p:cNvPr id="14" name="Text 10"/>
-          <p:cNvSpPr/>
-          <p:nvPr/>
-        </p:nvSpPr>
-        <p:spPr>
-          <a:xfrm>
-            <a:off x="812800" y="6238280"/>
-            <a:ext cx="7680900" cy="238720"/>
-          </a:xfrm>
-          <a:prstGeom prst="rect">
-            <a:avLst/>
-          </a:prstGeom>
-          <a:noFill/>
-          <a:ln/>
-        </p:spPr>
-        <p:txBody>
-          <a:bodyPr wrap="square" lIns="0" tIns="0" rIns="0" bIns="0" rtlCol="0" anchor="t">
-            <a:normAutofit/>
-          </a:bodyPr>
-          <a:lstStyle/>
-          <a:p>
-            <a:pPr marL="0" indent="0" algn="l">
-              <a:lnSpc>
-                <a:spcPts val="1680"/>
-              </a:lnSpc>
-              <a:buNone/>
-            </a:pPr>
-            <a:r>
-              <a:rPr lang="en-US" sz="1200" dirty="0">
-                <a:solidFill>
-                  <a:srgbClr val="566274"/>
-                </a:solidFill>
-                <a:latin typeface="JetBrains Mono" pitchFamily="49" charset="0"/>
-                <a:ea typeface="JetBrains Mono" pitchFamily="49" charset="-122"/>
-                <a:cs typeface="JetBrains Mono" pitchFamily="49" charset="-120"/>
-              </a:rPr>
-              <a:t>Capturas propias, 27 oct 2026 · IPs y dominios de terceros difuminados</a:t>
-            </a:r>
-            <a:endParaRPr lang="en-US" sz="1200" dirty="0"/>
-          </a:p>
-        </p:txBody>
-      </p:sp>
-    </p:spTree>
-  </p:cSld>
-  <p:clrMapOvr>
-    <a:masterClrMapping/>
-  </p:clrMapOvr>
-</p:sld>
-</file>
-
-<file path=ppt/slides/slide11.xml><?xml version="1.0" encoding="utf-8"?>
-<p:sld xmlns:a="http://schemas.openxmlformats.org/drawingml/2006/main" xmlns:r="http://schemas.openxmlformats.org/officeDocument/2006/relationships" xmlns:p="http://schemas.openxmlformats.org/presentationml/2006/main">
-  <p:cSld name="Slide 11">
-    <p:bg>
-      <p:bgPr>
-        <a:solidFill>
-          <a:srgbClr val="0E1726"/>
-        </a:solidFill>
-        <a:effectLst/>
-      </p:bgPr>
-    </p:bg>
-    <p:spTree>
-      <p:nvGrpSpPr>
-        <p:cNvPr id="1" name=""/>
-        <p:cNvGrpSpPr/>
-        <p:nvPr/>
-      </p:nvGrpSpPr>
-      <p:grpSpPr>
-        <a:xfrm>
-          <a:off x="0" y="0"/>
-          <a:ext cx="0" cy="0"/>
-          <a:chOff x="0" y="0"/>
-          <a:chExt cx="0" cy="0"/>
-        </a:xfrm>
-      </p:grpSpPr>
-      <p:sp>
-        <p:nvSpPr>
-          <p:cNvPr id="2" name="Text 0"/>
-          <p:cNvSpPr/>
-          <p:nvPr/>
-        </p:nvSpPr>
-        <p:spPr>
-          <a:xfrm>
-            <a:off x="812800" y="812800"/>
-            <a:ext cx="10883392" cy="221059"/>
-          </a:xfrm>
-          <a:prstGeom prst="rect">
-            <a:avLst/>
-          </a:prstGeom>
-          <a:noFill/>
-          <a:ln/>
-        </p:spPr>
-        <p:txBody>
-          <a:bodyPr wrap="square" lIns="0" tIns="0" rIns="0" bIns="0" rtlCol="0" anchor="t">
-            <a:normAutofit/>
-          </a:bodyPr>
-          <a:lstStyle/>
-          <a:p>
-            <a:pPr marL="0" indent="0" algn="l">
-              <a:lnSpc>
-                <a:spcPts val="1570"/>
-              </a:lnSpc>
-              <a:buNone/>
-            </a:pPr>
-            <a:r>
-              <a:rPr lang="en-US" sz="1121" dirty="0">
-                <a:solidFill>
-                  <a:srgbClr val="F0654D"/>
-                </a:solidFill>
-                <a:latin typeface="JetBrains Mono" pitchFamily="49" charset="0"/>
-                <a:ea typeface="JetBrains Mono" pitchFamily="49" charset="-122"/>
-                <a:cs typeface="JetBrains Mono" pitchFamily="49" charset="-120"/>
-              </a:rPr>
-              <a:t>PRÁCTICA 4 · SCRIPT EN PYTHON CON LA API</a:t>
-            </a:r>
-            <a:endParaRPr lang="en-US" sz="1121" dirty="0"/>
-          </a:p>
-        </p:txBody>
-      </p:sp>
-      <p:sp>
-        <p:nvSpPr>
-          <p:cNvPr id="3" name="Text 1"/>
-          <p:cNvSpPr>
-            <a:spLocks noGrp="1"/>
-          </p:cNvSpPr>
-          <p:nvPr>
-            <p:ph type="title"/>
-          </p:nvPr>
-        </p:nvSpPr>
-        <p:spPr>
-          <a:xfrm>
-            <a:off x="812800" y="1237059"/>
-            <a:ext cx="10883392" cy="435372"/>
-          </a:xfrm>
-          <a:prstGeom prst="rect">
-            <a:avLst/>
-          </a:prstGeom>
-          <a:noFill/>
-          <a:ln/>
-        </p:spPr>
-        <p:txBody>
-          <a:bodyPr wrap="square" lIns="0" tIns="0" rIns="0" bIns="0" rtlCol="0" anchor="t">
-            <a:normAutofit/>
-          </a:bodyPr>
-          <a:lstStyle/>
-          <a:p>
-            <a:pPr marL="0" indent="0" algn="l">
-              <a:lnSpc>
-                <a:spcPts val="3267"/>
-              </a:lnSpc>
-              <a:buNone/>
-            </a:pPr>
-            <a:r>
-              <a:rPr lang="en-US" sz="2970" b="1" i="0" dirty="0">
-                <a:solidFill>
-                  <a:srgbClr val="E8EDF4"/>
-                </a:solidFill>
-                <a:latin typeface="IBM Plex Sans" pitchFamily="34" charset="0"/>
-                <a:ea typeface="IBM Plex Sans" pitchFamily="34" charset="-122"/>
-                <a:cs typeface="IBM Plex Sans" pitchFamily="34" charset="-120"/>
-              </a:rPr>
-              <a:t>Panorama de Costa Rica sin gastar un crédito</a:t>
-            </a:r>
-            <a:endParaRPr lang="en-US" sz="2970" dirty="0"/>
-          </a:p>
-        </p:txBody>
-      </p:sp>
-      <p:sp>
-        <p:nvSpPr>
-          <p:cNvPr id="4" name="Shape 2"/>
-          <p:cNvSpPr/>
-          <p:nvPr/>
-        </p:nvSpPr>
-        <p:spPr>
-          <a:xfrm>
-            <a:off x="815975" y="1878806"/>
-            <a:ext cx="3549650" cy="808930"/>
-          </a:xfrm>
-          <a:prstGeom prst="roundRect">
-            <a:avLst>
-              <a:gd name="adj" fmla="val 9027"/>
-            </a:avLst>
-          </a:prstGeom>
-          <a:solidFill>
-            <a:srgbClr val="16233A"/>
-          </a:solidFill>
-          <a:ln w="6350">
-            <a:solidFill>
-              <a:srgbClr val="26385A"/>
-            </a:solidFill>
-            <a:prstDash val="solid"/>
-          </a:ln>
-        </p:spPr>
-        <p:txBody>
-          <a:bodyPr/>
-          <a:lstStyle/>
-          <a:p>
-            <a:endParaRPr lang="es-ES_tradnl"/>
-          </a:p>
-        </p:txBody>
-      </p:sp>
-      <p:sp>
-        <p:nvSpPr>
-          <p:cNvPr id="5" name="Text 3"/>
-          <p:cNvSpPr/>
-          <p:nvPr/>
-        </p:nvSpPr>
-        <p:spPr>
-          <a:xfrm>
-            <a:off x="996950" y="2034381"/>
-            <a:ext cx="3283331" cy="309860"/>
-          </a:xfrm>
-          <a:prstGeom prst="rect">
-            <a:avLst/>
-          </a:prstGeom>
-          <a:noFill/>
-          <a:ln/>
-        </p:spPr>
-        <p:txBody>
-          <a:bodyPr wrap="square" lIns="0" tIns="0" rIns="0" bIns="0" rtlCol="0" anchor="t">
-            <a:normAutofit/>
-          </a:bodyPr>
-          <a:lstStyle/>
-          <a:p>
-            <a:pPr marL="0" indent="0" algn="l">
-              <a:lnSpc>
-                <a:spcPts val="2240"/>
-              </a:lnSpc>
-              <a:buNone/>
-            </a:pPr>
-            <a:r>
-              <a:rPr lang="en-US" sz="1600" b="1" dirty="0">
-                <a:solidFill>
-                  <a:srgbClr val="E8EDF4"/>
-                </a:solidFill>
-                <a:latin typeface="IBM Plex Sans" pitchFamily="34" charset="0"/>
-                <a:ea typeface="IBM Plex Sans" pitchFamily="34" charset="-122"/>
-                <a:cs typeface="IBM Plex Sans" pitchFamily="34" charset="-120"/>
-              </a:rPr>
-              <a:t>Solo api.count()</a:t>
-            </a:r>
-            <a:endParaRPr lang="en-US" sz="1600" dirty="0"/>
-          </a:p>
-        </p:txBody>
-      </p:sp>
-      <p:sp>
-        <p:nvSpPr>
-          <p:cNvPr id="6" name="Text 4"/>
-          <p:cNvSpPr/>
-          <p:nvPr/>
-        </p:nvSpPr>
-        <p:spPr>
-          <a:xfrm>
-            <a:off x="996950" y="2318841"/>
-            <a:ext cx="3283331" cy="238720"/>
-          </a:xfrm>
-          <a:prstGeom prst="rect">
-            <a:avLst/>
-          </a:prstGeom>
-          <a:noFill/>
-          <a:ln/>
-        </p:spPr>
-        <p:txBody>
-          <a:bodyPr wrap="square" lIns="0" tIns="0" rIns="0" bIns="0" rtlCol="0" anchor="t">
-            <a:normAutofit/>
-          </a:bodyPr>
-          <a:lstStyle/>
-          <a:p>
-            <a:pPr marL="0" indent="0" algn="l">
-              <a:lnSpc>
-                <a:spcPts val="1680"/>
-              </a:lnSpc>
-              <a:buNone/>
-            </a:pPr>
-            <a:r>
-              <a:rPr lang="en-US" sz="1200" dirty="0">
-                <a:solidFill>
-                  <a:srgbClr val="9FB0C6"/>
-                </a:solidFill>
-                <a:latin typeface="IBM Plex Sans" pitchFamily="34" charset="0"/>
-                <a:ea typeface="IBM Plex Sans" pitchFamily="34" charset="-122"/>
-                <a:cs typeface="IBM Plex Sans" pitchFamily="34" charset="-120"/>
-              </a:rPr>
-              <a:t>Totales y facets, nunca IPs ni banners</a:t>
-            </a:r>
-            <a:endParaRPr lang="en-US" sz="1200" dirty="0"/>
-          </a:p>
-        </p:txBody>
-      </p:sp>
-      <p:sp>
-        <p:nvSpPr>
-          <p:cNvPr id="7" name="Shape 5"/>
-          <p:cNvSpPr/>
-          <p:nvPr/>
-        </p:nvSpPr>
-        <p:spPr>
-          <a:xfrm>
-            <a:off x="815975" y="2821087"/>
-            <a:ext cx="3549650" cy="808930"/>
-          </a:xfrm>
-          <a:prstGeom prst="roundRect">
-            <a:avLst>
-              <a:gd name="adj" fmla="val 9027"/>
-            </a:avLst>
-          </a:prstGeom>
-          <a:solidFill>
-            <a:srgbClr val="16233A"/>
-          </a:solidFill>
-          <a:ln w="6350">
-            <a:solidFill>
-              <a:srgbClr val="26385A"/>
-            </a:solidFill>
-            <a:prstDash val="solid"/>
-          </a:ln>
-        </p:spPr>
-        <p:txBody>
-          <a:bodyPr/>
-          <a:lstStyle/>
-          <a:p>
-            <a:endParaRPr lang="es-ES_tradnl"/>
-          </a:p>
-        </p:txBody>
-      </p:sp>
-      <p:sp>
-        <p:nvSpPr>
-          <p:cNvPr id="8" name="Text 6"/>
-          <p:cNvSpPr/>
-          <p:nvPr/>
-        </p:nvSpPr>
-        <p:spPr>
-          <a:xfrm>
-            <a:off x="996950" y="2976662"/>
-            <a:ext cx="3365500" cy="309860"/>
-          </a:xfrm>
-          <a:prstGeom prst="rect">
-            <a:avLst/>
-          </a:prstGeom>
-          <a:noFill/>
-          <a:ln/>
-        </p:spPr>
-        <p:txBody>
-          <a:bodyPr wrap="square" lIns="0" tIns="0" rIns="0" bIns="0" rtlCol="0" anchor="t">
-            <a:normAutofit/>
-          </a:bodyPr>
-          <a:lstStyle/>
-          <a:p>
-            <a:pPr marL="0" indent="0" algn="l">
-              <a:lnSpc>
-                <a:spcPts val="2240"/>
-              </a:lnSpc>
-              <a:buNone/>
-            </a:pPr>
-            <a:r>
-              <a:rPr lang="en-US" sz="1600" b="1" dirty="0">
-                <a:solidFill>
-                  <a:srgbClr val="E8EDF4"/>
-                </a:solidFill>
-                <a:latin typeface="IBM Plex Sans" pitchFamily="34" charset="0"/>
-                <a:ea typeface="IBM Plex Sans" pitchFamily="34" charset="-122"/>
-                <a:cs typeface="IBM Plex Sans" pitchFamily="34" charset="-120"/>
-              </a:rPr>
-              <a:t>Créditos: 100 antes, 100 después</a:t>
-            </a:r>
-            <a:endParaRPr lang="en-US" sz="1600" dirty="0"/>
-          </a:p>
-        </p:txBody>
-      </p:sp>
-      <p:sp>
-        <p:nvSpPr>
-          <p:cNvPr id="9" name="Text 7"/>
-          <p:cNvSpPr/>
-          <p:nvPr/>
-        </p:nvSpPr>
-        <p:spPr>
-          <a:xfrm>
-            <a:off x="996950" y="3261122"/>
-            <a:ext cx="3283331" cy="238720"/>
-          </a:xfrm>
-          <a:prstGeom prst="rect">
-            <a:avLst/>
-          </a:prstGeom>
-          <a:noFill/>
-          <a:ln/>
-        </p:spPr>
-        <p:txBody>
-          <a:bodyPr wrap="square" lIns="0" tIns="0" rIns="0" bIns="0" rtlCol="0" anchor="t">
-            <a:normAutofit/>
-          </a:bodyPr>
-          <a:lstStyle/>
-          <a:p>
-            <a:pPr marL="0" indent="0" algn="l">
-              <a:lnSpc>
-                <a:spcPts val="1680"/>
-              </a:lnSpc>
-              <a:buNone/>
-            </a:pPr>
-            <a:r>
-              <a:rPr lang="en-US" sz="1200" dirty="0">
-                <a:solidFill>
-                  <a:srgbClr val="9FB0C6"/>
-                </a:solidFill>
-                <a:latin typeface="IBM Plex Sans" pitchFamily="34" charset="0"/>
-                <a:ea typeface="IBM Plex Sans" pitchFamily="34" charset="-122"/>
-                <a:cs typeface="IBM Plex Sans" pitchFamily="34" charset="-120"/>
-              </a:rPr>
-              <a:t>Verificado en la ejecución</a:t>
-            </a:r>
-            <a:endParaRPr lang="en-US" sz="1200" dirty="0"/>
-          </a:p>
-        </p:txBody>
-      </p:sp>
-      <p:sp>
-        <p:nvSpPr>
-          <p:cNvPr id="10" name="Shape 8"/>
-          <p:cNvSpPr/>
-          <p:nvPr/>
-        </p:nvSpPr>
-        <p:spPr>
-          <a:xfrm>
-            <a:off x="819150" y="3766542"/>
-            <a:ext cx="3543300" cy="1028601"/>
-          </a:xfrm>
-          <a:prstGeom prst="roundRect">
-            <a:avLst>
-              <a:gd name="adj" fmla="val 6791"/>
-            </a:avLst>
-          </a:prstGeom>
-          <a:solidFill>
-            <a:srgbClr val="16233A"/>
-          </a:solidFill>
-          <a:ln w="12700">
-            <a:solidFill>
-              <a:srgbClr val="4CC3B0"/>
-            </a:solidFill>
-            <a:prstDash val="solid"/>
-          </a:ln>
-        </p:spPr>
-        <p:txBody>
-          <a:bodyPr/>
-          <a:lstStyle/>
-          <a:p>
-            <a:endParaRPr lang="es-ES_tradnl"/>
-          </a:p>
-        </p:txBody>
-      </p:sp>
-      <p:sp>
-        <p:nvSpPr>
-          <p:cNvPr id="11" name="Text 9"/>
-          <p:cNvSpPr/>
-          <p:nvPr/>
-        </p:nvSpPr>
-        <p:spPr>
-          <a:xfrm>
-            <a:off x="1003300" y="3925292"/>
-            <a:ext cx="3270250" cy="309860"/>
-          </a:xfrm>
-          <a:prstGeom prst="rect">
-            <a:avLst/>
-          </a:prstGeom>
-          <a:noFill/>
-          <a:ln/>
-        </p:spPr>
-        <p:txBody>
-          <a:bodyPr wrap="square" lIns="0" tIns="0" rIns="0" bIns="0" rtlCol="0" anchor="t">
-            <a:normAutofit/>
-          </a:bodyPr>
-          <a:lstStyle/>
-          <a:p>
-            <a:pPr marL="0" indent="0" algn="l">
-              <a:lnSpc>
-                <a:spcPts val="2240"/>
-              </a:lnSpc>
-              <a:buNone/>
-            </a:pPr>
-            <a:r>
-              <a:rPr lang="en-US" sz="1600" b="1" dirty="0">
-                <a:solidFill>
-                  <a:srgbClr val="4CC3B0"/>
-                </a:solidFill>
-                <a:latin typeface="IBM Plex Sans" pitchFamily="34" charset="0"/>
-                <a:ea typeface="IBM Plex Sans" pitchFamily="34" charset="-122"/>
-                <a:cs typeface="IBM Plex Sans" pitchFamily="34" charset="-120"/>
-              </a:rPr>
-              <a:t>Opción --offline</a:t>
-            </a:r>
-            <a:endParaRPr lang="en-US" sz="1600" dirty="0"/>
-          </a:p>
-        </p:txBody>
-      </p:sp>
-      <p:sp>
-        <p:nvSpPr>
-          <p:cNvPr id="12" name="Text 10"/>
-          <p:cNvSpPr/>
-          <p:nvPr/>
-        </p:nvSpPr>
-        <p:spPr>
-          <a:xfrm>
-            <a:off x="1003300" y="4209752"/>
-            <a:ext cx="3270250" cy="452041"/>
-          </a:xfrm>
-          <a:prstGeom prst="rect">
-            <a:avLst/>
-          </a:prstGeom>
-          <a:noFill/>
-          <a:ln/>
-        </p:spPr>
-        <p:txBody>
-          <a:bodyPr wrap="square" lIns="0" tIns="0" rIns="0" bIns="0" rtlCol="0" anchor="t">
-            <a:normAutofit/>
-          </a:bodyPr>
-          <a:lstStyle/>
-          <a:p>
-            <a:pPr marL="0" indent="0" algn="l">
-              <a:lnSpc>
-                <a:spcPts val="1680"/>
-              </a:lnSpc>
-              <a:buNone/>
-            </a:pPr>
-            <a:r>
-              <a:rPr lang="en-US" sz="1200" dirty="0">
-                <a:solidFill>
-                  <a:srgbClr val="9FB0C6"/>
-                </a:solidFill>
-                <a:latin typeface="IBM Plex Sans" pitchFamily="34" charset="0"/>
-                <a:ea typeface="IBM Plex Sans" pitchFamily="34" charset="-122"/>
-                <a:cs typeface="IBM Plex Sans" pitchFamily="34" charset="-120"/>
-              </a:rPr>
-              <a:t>Regenera los gráficos sin red: nuestro respaldo</a:t>
-            </a:r>
-            <a:endParaRPr lang="en-US" sz="1200" dirty="0"/>
-          </a:p>
-        </p:txBody>
-      </p:sp>
-      <p:sp>
-        <p:nvSpPr>
-          <p:cNvPr id="13" name="Text 11"/>
-          <p:cNvSpPr/>
-          <p:nvPr/>
-        </p:nvSpPr>
-        <p:spPr>
-          <a:xfrm>
-            <a:off x="812800" y="4928493"/>
-            <a:ext cx="3662680" cy="452041"/>
-          </a:xfrm>
-          <a:prstGeom prst="rect">
-            <a:avLst/>
-          </a:prstGeom>
-          <a:noFill/>
-          <a:ln/>
-        </p:spPr>
-        <p:txBody>
-          <a:bodyPr wrap="square" lIns="0" tIns="0" rIns="0" bIns="0" rtlCol="0" anchor="t">
-            <a:normAutofit/>
-          </a:bodyPr>
-          <a:lstStyle/>
-          <a:p>
-            <a:pPr marL="0" indent="0" algn="l">
-              <a:lnSpc>
-                <a:spcPts val="1680"/>
-              </a:lnSpc>
-              <a:buNone/>
-            </a:pPr>
-            <a:r>
-              <a:rPr lang="en-US" sz="1200" dirty="0">
-                <a:solidFill>
-                  <a:srgbClr val="E8EDF4"/>
-                </a:solidFill>
-                <a:latin typeface="JetBrains Mono" pitchFamily="49" charset="0"/>
-                <a:ea typeface="JetBrains Mono" pitchFamily="49" charset="-122"/>
-                <a:cs typeface="JetBrains Mono" pitchFamily="49" charset="-120"/>
-              </a:rPr>
-              <a:t>python shodan_cr.py</a:t>
-            </a:r>
-            <a:endParaRPr lang="en-US" sz="1200" dirty="0"/>
-          </a:p>
-          <a:p>
-            <a:pPr marL="0" indent="0" algn="l">
-              <a:lnSpc>
-                <a:spcPts val="1680"/>
-              </a:lnSpc>
-              <a:buNone/>
-            </a:pPr>
-            <a:r>
-              <a:rPr lang="en-US" sz="1200" dirty="0">
-                <a:solidFill>
-                  <a:srgbClr val="E8EDF4"/>
-                </a:solidFill>
-                <a:latin typeface="JetBrains Mono" pitchFamily="49" charset="0"/>
-                <a:ea typeface="JetBrains Mono" pitchFamily="49" charset="-122"/>
-                <a:cs typeface="JetBrains Mono" pitchFamily="49" charset="-120"/>
-              </a:rPr>
-              <a:t>python shodan_cr.py --offline</a:t>
-            </a:r>
-            <a:endParaRPr lang="en-US" sz="1200" dirty="0"/>
-          </a:p>
-        </p:txBody>
-      </p:sp>
-      <p:sp>
-        <p:nvSpPr>
-          <p:cNvPr id="14" name="Shape 12"/>
-          <p:cNvSpPr/>
-          <p:nvPr/>
-        </p:nvSpPr>
-        <p:spPr>
-          <a:xfrm>
-            <a:off x="4622800" y="1875631"/>
-            <a:ext cx="6731000" cy="4324350"/>
-          </a:xfrm>
-          <a:prstGeom prst="roundRect">
-            <a:avLst>
-              <a:gd name="adj" fmla="val 1175"/>
-            </a:avLst>
-          </a:prstGeom>
-          <a:solidFill>
-            <a:srgbClr val="FFFFFF"/>
-          </a:solidFill>
-          <a:ln/>
-        </p:spPr>
-        <p:txBody>
-          <a:bodyPr/>
-          <a:lstStyle/>
-          <a:p>
-            <a:endParaRPr lang="es-ES_tradnl"/>
-          </a:p>
-        </p:txBody>
-      </p:sp>
-      <p:pic>
-        <p:nvPicPr>
-          <p:cNvPr id="15" name="Image 0" descr="Dashboard con puertos, productos, campo org y servicios comunes de Costa Rica"/>
-          <p:cNvPicPr>
-            <a:picLocks noChangeAspect="1"/>
-          </p:cNvPicPr>
-          <p:nvPr/>
-        </p:nvPicPr>
-        <p:blipFill>
-          <a:blip r:embed="rId3"/>
-          <a:srcRect l="-84" r="-84"/>
-          <a:stretch/>
-        </p:blipFill>
-        <p:spPr>
-          <a:xfrm>
-            <a:off x="4629150" y="1881981"/>
-            <a:ext cx="6718300" cy="4311650"/>
-          </a:xfrm>
-          <a:prstGeom prst="roundRect">
-            <a:avLst>
-              <a:gd name="adj" fmla="val 1031"/>
-            </a:avLst>
-          </a:prstGeom>
-        </p:spPr>
-      </p:pic>
-      <p:sp>
-        <p:nvSpPr>
-          <p:cNvPr id="16" name="Shape 13"/>
-          <p:cNvSpPr/>
-          <p:nvPr/>
-        </p:nvSpPr>
-        <p:spPr>
-          <a:xfrm>
-            <a:off x="4625975" y="1878806"/>
-            <a:ext cx="6724650" cy="4318000"/>
-          </a:xfrm>
-          <a:prstGeom prst="roundRect">
-            <a:avLst>
-              <a:gd name="adj" fmla="val 1103"/>
-            </a:avLst>
-          </a:prstGeom>
-          <a:noFill/>
-          <a:ln w="6350">
-            <a:solidFill>
-              <a:srgbClr val="26385A"/>
-            </a:solidFill>
-            <a:prstDash val="solid"/>
-          </a:ln>
-        </p:spPr>
-        <p:txBody>
-          <a:bodyPr/>
-          <a:lstStyle/>
-          <a:p>
-            <a:endParaRPr lang="es-ES_tradnl"/>
-          </a:p>
-        </p:txBody>
-      </p:sp>
-      <p:sp>
-        <p:nvSpPr>
-          <p:cNvPr id="17" name="Text 14"/>
-          <p:cNvSpPr/>
-          <p:nvPr/>
-        </p:nvSpPr>
-        <p:spPr>
-          <a:xfrm>
-            <a:off x="812800" y="6238280"/>
-            <a:ext cx="5705773" cy="238720"/>
-          </a:xfrm>
-          <a:prstGeom prst="rect">
-            <a:avLst/>
-          </a:prstGeom>
-          <a:noFill/>
-          <a:ln/>
-        </p:spPr>
-        <p:txBody>
-          <a:bodyPr wrap="square" lIns="0" tIns="0" rIns="0" bIns="0" rtlCol="0" anchor="t">
-            <a:normAutofit/>
-          </a:bodyPr>
-          <a:lstStyle/>
-          <a:p>
-            <a:pPr marL="0" indent="0" algn="l">
-              <a:lnSpc>
-                <a:spcPts val="1680"/>
-              </a:lnSpc>
-              <a:buNone/>
-            </a:pPr>
-            <a:r>
-              <a:rPr lang="en-US" sz="1200" dirty="0">
-                <a:solidFill>
-                  <a:srgbClr val="9FB0C6"/>
-                </a:solidFill>
-                <a:latin typeface="JetBrains Mono" pitchFamily="49" charset="0"/>
-                <a:ea typeface="JetBrains Mono" pitchFamily="49" charset="-122"/>
-                <a:cs typeface="JetBrains Mono" pitchFamily="49" charset="-120"/>
-              </a:rPr>
-              <a:t>Fuente: Shodan API, 27 oct 2026 · elaboración propia</a:t>
-            </a:r>
-            <a:endParaRPr lang="en-US" sz="1200" dirty="0"/>
-          </a:p>
-        </p:txBody>
-      </p:sp>
-    </p:spTree>
-  </p:cSld>
-  <p:clrMapOvr>
-    <a:masterClrMapping/>
-  </p:clrMapOvr>
-</p:sld>
-</file>
-
-<file path=ppt/slides/slide12.xml><?xml version="1.0" encoding="utf-8"?>
-<p:sld xmlns:a="http://schemas.openxmlformats.org/drawingml/2006/main" xmlns:r="http://schemas.openxmlformats.org/officeDocument/2006/relationships" xmlns:p="http://schemas.openxmlformats.org/presentationml/2006/main">
   <p:cSld name="Slide 12">
     <p:bg>
       <p:bgPr>
@@ -4473,7 +3007,7 @@
 </p:sld>
 </file>
 
-<file path=ppt/slides/slide13.xml><?xml version="1.0" encoding="utf-8"?>
+<file path=ppt/slides/slide11.xml><?xml version="1.0" encoding="utf-8"?>
 <p:sld xmlns:a="http://schemas.openxmlformats.org/drawingml/2006/main" xmlns:r="http://schemas.openxmlformats.org/officeDocument/2006/relationships" xmlns:p="http://schemas.openxmlformats.org/presentationml/2006/main">
   <p:cSld name="Slide 13">
     <p:bg>
@@ -6033,7 +4567,7 @@
 </p:sld>
 </file>
 
-<file path=ppt/slides/slide14.xml><?xml version="1.0" encoding="utf-8"?>
+<file path=ppt/slides/slide12.xml><?xml version="1.0" encoding="utf-8"?>
 <p:sld xmlns:a="http://schemas.openxmlformats.org/drawingml/2006/main" xmlns:r="http://schemas.openxmlformats.org/officeDocument/2006/relationships" xmlns:p="http://schemas.openxmlformats.org/presentationml/2006/main">
   <p:cSld name="Slide 14">
     <p:bg>
@@ -6570,586 +5104,7 @@
 </p:sld>
 </file>
 
-<file path=ppt/slides/slide15.xml><?xml version="1.0" encoding="utf-8"?>
-<p:sld xmlns:a="http://schemas.openxmlformats.org/drawingml/2006/main" xmlns:r="http://schemas.openxmlformats.org/officeDocument/2006/relationships" xmlns:p="http://schemas.openxmlformats.org/presentationml/2006/main">
-  <p:cSld name="Slide 15">
-    <p:bg>
-      <p:bgPr>
-        <a:solidFill>
-          <a:srgbClr val="0E1726"/>
-        </a:solidFill>
-        <a:effectLst/>
-      </p:bgPr>
-    </p:bg>
-    <p:spTree>
-      <p:nvGrpSpPr>
-        <p:cNvPr id="1" name=""/>
-        <p:cNvGrpSpPr/>
-        <p:nvPr/>
-      </p:nvGrpSpPr>
-      <p:grpSpPr>
-        <a:xfrm>
-          <a:off x="0" y="0"/>
-          <a:ext cx="0" cy="0"/>
-          <a:chOff x="0" y="0"/>
-          <a:chExt cx="0" cy="0"/>
-        </a:xfrm>
-      </p:grpSpPr>
-      <p:sp>
-        <p:nvSpPr>
-          <p:cNvPr id="2" name="Text 0"/>
-          <p:cNvSpPr/>
-          <p:nvPr/>
-        </p:nvSpPr>
-        <p:spPr>
-          <a:xfrm>
-            <a:off x="812800" y="812800"/>
-            <a:ext cx="10883392" cy="238720"/>
-          </a:xfrm>
-          <a:prstGeom prst="rect">
-            <a:avLst/>
-          </a:prstGeom>
-          <a:noFill/>
-          <a:ln/>
-        </p:spPr>
-        <p:txBody>
-          <a:bodyPr wrap="square" lIns="0" tIns="0" rIns="0" bIns="0" rtlCol="0" anchor="t">
-            <a:normAutofit/>
-          </a:bodyPr>
-          <a:lstStyle/>
-          <a:p>
-            <a:pPr marL="0" indent="0" algn="l">
-              <a:lnSpc>
-                <a:spcPts val="1680"/>
-              </a:lnSpc>
-              <a:buNone/>
-            </a:pPr>
-            <a:r>
-              <a:rPr lang="en-US" sz="1200" dirty="0">
-                <a:solidFill>
-                  <a:srgbClr val="F0654D"/>
-                </a:solidFill>
-                <a:latin typeface="JetBrains Mono" pitchFamily="49" charset="0"/>
-                <a:ea typeface="JetBrains Mono" pitchFamily="49" charset="-122"/>
-                <a:cs typeface="JetBrains Mono" pitchFamily="49" charset="-120"/>
-              </a:rPr>
-              <a:t>LÍMITES DEL TRABAJO</a:t>
-            </a:r>
-            <a:endParaRPr lang="en-US" sz="1200" dirty="0"/>
-          </a:p>
-        </p:txBody>
-      </p:sp>
-      <p:sp>
-        <p:nvSpPr>
-          <p:cNvPr id="3" name="Text 1"/>
-          <p:cNvSpPr>
-            <a:spLocks noGrp="1"/>
-          </p:cNvSpPr>
-          <p:nvPr>
-            <p:ph type="title"/>
-          </p:nvPr>
-        </p:nvSpPr>
-        <p:spPr>
-          <a:xfrm>
-            <a:off x="812800" y="1280120"/>
-            <a:ext cx="10883392" cy="528290"/>
-          </a:xfrm>
-          <a:prstGeom prst="rect">
-            <a:avLst/>
-          </a:prstGeom>
-          <a:noFill/>
-          <a:ln/>
-        </p:spPr>
-        <p:txBody>
-          <a:bodyPr wrap="square" lIns="0" tIns="0" rIns="0" bIns="0" rtlCol="0" anchor="t">
-            <a:normAutofit/>
-          </a:bodyPr>
-          <a:lstStyle/>
-          <a:p>
-            <a:pPr marL="0" indent="0" algn="l">
-              <a:lnSpc>
-                <a:spcPts val="3960"/>
-              </a:lnSpc>
-              <a:buNone/>
-            </a:pPr>
-            <a:r>
-              <a:rPr lang="en-US" sz="3600" b="1" i="0" dirty="0">
-                <a:solidFill>
-                  <a:srgbClr val="E8EDF4"/>
-                </a:solidFill>
-                <a:latin typeface="IBM Plex Sans" pitchFamily="34" charset="0"/>
-                <a:ea typeface="IBM Plex Sans" pitchFamily="34" charset="-122"/>
-                <a:cs typeface="IBM Plex Sans" pitchFamily="34" charset="-120"/>
-              </a:rPr>
-              <a:t>Cómo leer estos números</a:t>
-            </a:r>
-            <a:endParaRPr lang="en-US" sz="3600" dirty="0"/>
-          </a:p>
-        </p:txBody>
-      </p:sp>
-      <p:sp>
-        <p:nvSpPr>
-          <p:cNvPr id="4" name="Shape 2"/>
-          <p:cNvSpPr/>
-          <p:nvPr/>
-        </p:nvSpPr>
-        <p:spPr>
-          <a:xfrm>
-            <a:off x="815975" y="2040186"/>
-            <a:ext cx="3414167" cy="1546771"/>
-          </a:xfrm>
-          <a:prstGeom prst="roundRect">
-            <a:avLst>
-              <a:gd name="adj" fmla="val 6363"/>
-            </a:avLst>
-          </a:prstGeom>
-          <a:solidFill>
-            <a:srgbClr val="16233A"/>
-          </a:solidFill>
-          <a:ln w="6350">
-            <a:solidFill>
-              <a:srgbClr val="26385A"/>
-            </a:solidFill>
-            <a:prstDash val="solid"/>
-          </a:ln>
-        </p:spPr>
-        <p:txBody>
-          <a:bodyPr/>
-          <a:lstStyle/>
-          <a:p>
-            <a:endParaRPr lang="es-ES_tradnl"/>
-          </a:p>
-        </p:txBody>
-      </p:sp>
-      <p:sp>
-        <p:nvSpPr>
-          <p:cNvPr id="5" name="Text 3"/>
-          <p:cNvSpPr/>
-          <p:nvPr/>
-        </p:nvSpPr>
-        <p:spPr>
-          <a:xfrm>
-            <a:off x="1047750" y="2271961"/>
-            <a:ext cx="3039135" cy="299690"/>
-          </a:xfrm>
-          <a:prstGeom prst="rect">
-            <a:avLst/>
-          </a:prstGeom>
-          <a:noFill/>
-          <a:ln/>
-        </p:spPr>
-        <p:txBody>
-          <a:bodyPr wrap="square" lIns="0" tIns="0" rIns="0" bIns="0" rtlCol="0" anchor="t">
-            <a:normAutofit/>
-          </a:bodyPr>
-          <a:lstStyle/>
-          <a:p>
-            <a:pPr marL="0" indent="0" algn="l">
-              <a:lnSpc>
-                <a:spcPts val="2160"/>
-              </a:lnSpc>
-              <a:buNone/>
-            </a:pPr>
-            <a:r>
-              <a:rPr lang="en-US" sz="1800" b="1" dirty="0">
-                <a:solidFill>
-                  <a:srgbClr val="F0654D"/>
-                </a:solidFill>
-                <a:latin typeface="IBM Plex Sans" pitchFamily="34" charset="0"/>
-                <a:ea typeface="IBM Plex Sans" pitchFamily="34" charset="-122"/>
-                <a:cs typeface="IBM Plex Sans" pitchFamily="34" charset="-120"/>
-              </a:rPr>
-              <a:t>Una sola fecha</a:t>
-            </a:r>
-            <a:endParaRPr lang="en-US" sz="1800" dirty="0"/>
-          </a:p>
-        </p:txBody>
-      </p:sp>
-      <p:sp>
-        <p:nvSpPr>
-          <p:cNvPr id="6" name="Text 4"/>
-          <p:cNvSpPr/>
-          <p:nvPr/>
-        </p:nvSpPr>
-        <p:spPr>
-          <a:xfrm>
-            <a:off x="1047750" y="2635151"/>
-            <a:ext cx="3039135" cy="745430"/>
-          </a:xfrm>
-          <a:prstGeom prst="rect">
-            <a:avLst/>
-          </a:prstGeom>
-          <a:noFill/>
-          <a:ln/>
-        </p:spPr>
-        <p:txBody>
-          <a:bodyPr wrap="square" lIns="0" tIns="0" rIns="0" bIns="0" rtlCol="0" anchor="t">
-            <a:normAutofit/>
-          </a:bodyPr>
-          <a:lstStyle/>
-          <a:p>
-            <a:pPr marL="0" indent="0" algn="l">
-              <a:lnSpc>
-                <a:spcPts val="1890"/>
-              </a:lnSpc>
-              <a:buNone/>
-            </a:pPr>
-            <a:r>
-              <a:rPr lang="en-US" sz="1400" dirty="0">
-                <a:solidFill>
-                  <a:srgbClr val="C9D6E8"/>
-                </a:solidFill>
-                <a:latin typeface="IBM Plex Sans" pitchFamily="34" charset="0"/>
-                <a:ea typeface="IBM Plex Sans" pitchFamily="34" charset="-122"/>
-                <a:cs typeface="IBM Plex Sans" pitchFamily="34" charset="-120"/>
-              </a:rPr>
-              <a:t>Foto del 27 de octubre de 2026. El índice cambia: tres consultas, tres totales.</a:t>
-            </a:r>
-            <a:endParaRPr lang="en-US" sz="1400" dirty="0"/>
-          </a:p>
-        </p:txBody>
-      </p:sp>
-      <p:sp>
-        <p:nvSpPr>
-          <p:cNvPr id="7" name="Shape 5"/>
-          <p:cNvSpPr/>
-          <p:nvPr/>
-        </p:nvSpPr>
-        <p:spPr>
-          <a:xfrm>
-            <a:off x="4388892" y="2040186"/>
-            <a:ext cx="3414216" cy="1546771"/>
-          </a:xfrm>
-          <a:prstGeom prst="roundRect">
-            <a:avLst>
-              <a:gd name="adj" fmla="val 6363"/>
-            </a:avLst>
-          </a:prstGeom>
-          <a:solidFill>
-            <a:srgbClr val="16233A"/>
-          </a:solidFill>
-          <a:ln w="6350">
-            <a:solidFill>
-              <a:srgbClr val="26385A"/>
-            </a:solidFill>
-            <a:prstDash val="solid"/>
-          </a:ln>
-        </p:spPr>
-        <p:txBody>
-          <a:bodyPr/>
-          <a:lstStyle/>
-          <a:p>
-            <a:endParaRPr lang="es-ES_tradnl"/>
-          </a:p>
-        </p:txBody>
-      </p:sp>
-      <p:sp>
-        <p:nvSpPr>
-          <p:cNvPr id="8" name="Text 6"/>
-          <p:cNvSpPr/>
-          <p:nvPr/>
-        </p:nvSpPr>
-        <p:spPr>
-          <a:xfrm>
-            <a:off x="4620667" y="2271961"/>
-            <a:ext cx="3039186" cy="299690"/>
-          </a:xfrm>
-          <a:prstGeom prst="rect">
-            <a:avLst/>
-          </a:prstGeom>
-          <a:noFill/>
-          <a:ln/>
-        </p:spPr>
-        <p:txBody>
-          <a:bodyPr wrap="square" lIns="0" tIns="0" rIns="0" bIns="0" rtlCol="0" anchor="t">
-            <a:normAutofit/>
-          </a:bodyPr>
-          <a:lstStyle/>
-          <a:p>
-            <a:pPr marL="0" indent="0" algn="l">
-              <a:lnSpc>
-                <a:spcPts val="2160"/>
-              </a:lnSpc>
-              <a:buNone/>
-            </a:pPr>
-            <a:r>
-              <a:rPr lang="en-US" sz="1800" b="1" dirty="0">
-                <a:solidFill>
-                  <a:srgbClr val="F0654D"/>
-                </a:solidFill>
-                <a:latin typeface="IBM Plex Sans" pitchFamily="34" charset="0"/>
-                <a:ea typeface="IBM Plex Sans" pitchFamily="34" charset="-122"/>
-                <a:cs typeface="IBM Plex Sans" pitchFamily="34" charset="-120"/>
-              </a:rPr>
-              <a:t>No todo está indexado</a:t>
-            </a:r>
-            <a:endParaRPr lang="en-US" sz="1800" dirty="0"/>
-          </a:p>
-        </p:txBody>
-      </p:sp>
-      <p:sp>
-        <p:nvSpPr>
-          <p:cNvPr id="9" name="Text 7"/>
-          <p:cNvSpPr/>
-          <p:nvPr/>
-        </p:nvSpPr>
-        <p:spPr>
-          <a:xfrm>
-            <a:off x="4620667" y="2635151"/>
-            <a:ext cx="3039186" cy="505420"/>
-          </a:xfrm>
-          <a:prstGeom prst="rect">
-            <a:avLst/>
-          </a:prstGeom>
-          <a:noFill/>
-          <a:ln/>
-        </p:spPr>
-        <p:txBody>
-          <a:bodyPr wrap="square" lIns="0" tIns="0" rIns="0" bIns="0" rtlCol="0" anchor="t">
-            <a:normAutofit/>
-          </a:bodyPr>
-          <a:lstStyle/>
-          <a:p>
-            <a:pPr marL="0" indent="0" algn="l">
-              <a:lnSpc>
-                <a:spcPts val="1890"/>
-              </a:lnSpc>
-              <a:buNone/>
-            </a:pPr>
-            <a:r>
-              <a:rPr lang="en-US" sz="1400" dirty="0">
-                <a:solidFill>
-                  <a:srgbClr val="C9D6E8"/>
-                </a:solidFill>
-                <a:latin typeface="IBM Plex Sans" pitchFamily="34" charset="0"/>
-                <a:ea typeface="IBM Plex Sans" pitchFamily="34" charset="-122"/>
-                <a:cs typeface="IBM Plex Sans" pitchFamily="34" charset="-120"/>
-              </a:rPr>
-              <a:t>Una IP propia: Shodan respondió sin información.</a:t>
-            </a:r>
-            <a:endParaRPr lang="en-US" sz="1400" dirty="0"/>
-          </a:p>
-        </p:txBody>
-      </p:sp>
-      <p:sp>
-        <p:nvSpPr>
-          <p:cNvPr id="10" name="Shape 8"/>
-          <p:cNvSpPr/>
-          <p:nvPr/>
-        </p:nvSpPr>
-        <p:spPr>
-          <a:xfrm>
-            <a:off x="7961858" y="2040186"/>
-            <a:ext cx="3414167" cy="1546771"/>
-          </a:xfrm>
-          <a:prstGeom prst="roundRect">
-            <a:avLst>
-              <a:gd name="adj" fmla="val 6363"/>
-            </a:avLst>
-          </a:prstGeom>
-          <a:solidFill>
-            <a:srgbClr val="16233A"/>
-          </a:solidFill>
-          <a:ln w="6350">
-            <a:solidFill>
-              <a:srgbClr val="26385A"/>
-            </a:solidFill>
-            <a:prstDash val="solid"/>
-          </a:ln>
-        </p:spPr>
-        <p:txBody>
-          <a:bodyPr/>
-          <a:lstStyle/>
-          <a:p>
-            <a:endParaRPr lang="es-ES_tradnl"/>
-          </a:p>
-        </p:txBody>
-      </p:sp>
-      <p:sp>
-        <p:nvSpPr>
-          <p:cNvPr id="11" name="Text 9"/>
-          <p:cNvSpPr/>
-          <p:nvPr/>
-        </p:nvSpPr>
-        <p:spPr>
-          <a:xfrm>
-            <a:off x="8193633" y="2271961"/>
-            <a:ext cx="3039135" cy="299690"/>
-          </a:xfrm>
-          <a:prstGeom prst="rect">
-            <a:avLst/>
-          </a:prstGeom>
-          <a:noFill/>
-          <a:ln/>
-        </p:spPr>
-        <p:txBody>
-          <a:bodyPr wrap="square" lIns="0" tIns="0" rIns="0" bIns="0" rtlCol="0" anchor="t">
-            <a:normAutofit/>
-          </a:bodyPr>
-          <a:lstStyle/>
-          <a:p>
-            <a:pPr marL="0" indent="0" algn="l">
-              <a:lnSpc>
-                <a:spcPts val="2160"/>
-              </a:lnSpc>
-              <a:buNone/>
-            </a:pPr>
-            <a:r>
-              <a:rPr lang="en-US" sz="1800" b="1" dirty="0">
-                <a:solidFill>
-                  <a:srgbClr val="F0654D"/>
-                </a:solidFill>
-                <a:latin typeface="IBM Plex Sans" pitchFamily="34" charset="0"/>
-                <a:ea typeface="IBM Plex Sans" pitchFamily="34" charset="-122"/>
-                <a:cs typeface="IBM Plex Sans" pitchFamily="34" charset="-120"/>
-              </a:rPr>
-              <a:t>Hipótesis sin probar</a:t>
-            </a:r>
-            <a:endParaRPr lang="en-US" sz="1800" dirty="0"/>
-          </a:p>
-        </p:txBody>
-      </p:sp>
-      <p:sp>
-        <p:nvSpPr>
-          <p:cNvPr id="12" name="Text 10"/>
-          <p:cNvSpPr/>
-          <p:nvPr/>
-        </p:nvSpPr>
-        <p:spPr>
-          <a:xfrm>
-            <a:off x="8193633" y="2635151"/>
-            <a:ext cx="3039135" cy="745430"/>
-          </a:xfrm>
-          <a:prstGeom prst="rect">
-            <a:avLst/>
-          </a:prstGeom>
-          <a:noFill/>
-          <a:ln/>
-        </p:spPr>
-        <p:txBody>
-          <a:bodyPr wrap="square" lIns="0" tIns="0" rIns="0" bIns="0" rtlCol="0" anchor="t">
-            <a:normAutofit/>
-          </a:bodyPr>
-          <a:lstStyle/>
-          <a:p>
-            <a:pPr marL="0" indent="0" algn="l">
-              <a:lnSpc>
-                <a:spcPts val="1890"/>
-              </a:lnSpc>
-              <a:buNone/>
-            </a:pPr>
-            <a:r>
-              <a:rPr lang="en-US" sz="1400" dirty="0">
-                <a:solidFill>
-                  <a:srgbClr val="C9D6E8"/>
-                </a:solidFill>
-                <a:latin typeface="IBM Plex Sans" pitchFamily="34" charset="0"/>
-                <a:ea typeface="IBM Plex Sans" pitchFamily="34" charset="-122"/>
-                <a:cs typeface="IBM Plex Sans" pitchFamily="34" charset="-120"/>
-              </a:rPr>
-              <a:t>Lo del puerto 7547 y los proveedores es una lectura, no un hecho.</a:t>
-            </a:r>
-            <a:endParaRPr lang="en-US" sz="1400" dirty="0"/>
-          </a:p>
-        </p:txBody>
-      </p:sp>
-      <p:sp>
-        <p:nvSpPr>
-          <p:cNvPr id="13" name="Text 11"/>
-          <p:cNvSpPr/>
-          <p:nvPr/>
-        </p:nvSpPr>
-        <p:spPr>
-          <a:xfrm>
-            <a:off x="812800" y="3844131"/>
-            <a:ext cx="10883392" cy="299690"/>
-          </a:xfrm>
-          <a:prstGeom prst="rect">
-            <a:avLst/>
-          </a:prstGeom>
-          <a:noFill/>
-          <a:ln/>
-        </p:spPr>
-        <p:txBody>
-          <a:bodyPr wrap="square" lIns="0" tIns="0" rIns="0" bIns="0" rtlCol="0" anchor="t">
-            <a:normAutofit/>
-          </a:bodyPr>
-          <a:lstStyle/>
-          <a:p>
-            <a:pPr marL="0" indent="0" algn="l">
-              <a:lnSpc>
-                <a:spcPts val="2160"/>
-              </a:lnSpc>
-              <a:buNone/>
-            </a:pPr>
-            <a:r>
-              <a:rPr lang="en-US" sz="1600" dirty="0">
-                <a:solidFill>
-                  <a:srgbClr val="E8EDF4"/>
-                </a:solidFill>
-                <a:latin typeface="IBM Plex Sans" pitchFamily="34" charset="0"/>
-                <a:ea typeface="IBM Plex Sans" pitchFamily="34" charset="-122"/>
-                <a:cs typeface="IBM Plex Sans" pitchFamily="34" charset="-120"/>
-              </a:rPr>
-              <a:t>Cuentan servicios indexados, no equipos únicos ni equipos vulnerables, y no se contrastaron con otra fuente.</a:t>
-            </a:r>
-            <a:endParaRPr lang="en-US" sz="1600" dirty="0"/>
-          </a:p>
-        </p:txBody>
-      </p:sp>
-      <p:sp>
-        <p:nvSpPr>
-          <p:cNvPr id="14" name="Text 12"/>
-          <p:cNvSpPr/>
-          <p:nvPr/>
-        </p:nvSpPr>
-        <p:spPr>
-          <a:xfrm>
-            <a:off x="812800" y="6238280"/>
-            <a:ext cx="4279344" cy="238720"/>
-          </a:xfrm>
-          <a:prstGeom prst="rect">
-            <a:avLst/>
-          </a:prstGeom>
-          <a:noFill/>
-          <a:ln/>
-        </p:spPr>
-        <p:txBody>
-          <a:bodyPr wrap="square" lIns="0" tIns="0" rIns="0" bIns="0" rtlCol="0" anchor="t">
-            <a:normAutofit/>
-          </a:bodyPr>
-          <a:lstStyle/>
-          <a:p>
-            <a:pPr marL="0" indent="0" algn="l">
-              <a:lnSpc>
-                <a:spcPts val="1680"/>
-              </a:lnSpc>
-              <a:buNone/>
-            </a:pPr>
-            <a:r>
-              <a:rPr lang="en-US" sz="1200" dirty="0">
-                <a:solidFill>
-                  <a:srgbClr val="9FB0C6"/>
-                </a:solidFill>
-                <a:latin typeface="JetBrains Mono" pitchFamily="49" charset="0"/>
-                <a:ea typeface="JetBrains Mono" pitchFamily="49" charset="-122"/>
-                <a:cs typeface="JetBrains Mono" pitchFamily="49" charset="-120"/>
-              </a:rPr>
-              <a:t>Datos propios · Shodan API, 27 oct 2026</a:t>
-            </a:r>
-            <a:endParaRPr lang="en-US" sz="1200" dirty="0"/>
-          </a:p>
-        </p:txBody>
-      </p:sp>
-    </p:spTree>
-  </p:cSld>
-  <p:clrMapOvr>
-    <a:masterClrMapping/>
-  </p:clrMapOvr>
-</p:sld>
-</file>
-
-<file path=ppt/slides/slide16.xml><?xml version="1.0" encoding="utf-8"?>
+<file path=ppt/slides/slide13.xml><?xml version="1.0" encoding="utf-8"?>
 <p:sld xmlns:a="http://schemas.openxmlformats.org/drawingml/2006/main" xmlns:r="http://schemas.openxmlformats.org/officeDocument/2006/relationships" xmlns:p="http://schemas.openxmlformats.org/presentationml/2006/main">
   <p:cSld name="Slide 16">
     <p:bg>
@@ -7760,1454 +5715,6 @@
 
 <file path=ppt/slides/slide2.xml><?xml version="1.0" encoding="utf-8"?>
 <p:sld xmlns:a="http://schemas.openxmlformats.org/drawingml/2006/main" xmlns:r="http://schemas.openxmlformats.org/officeDocument/2006/relationships" xmlns:p="http://schemas.openxmlformats.org/presentationml/2006/main">
-  <p:cSld name="Slide 2">
-    <p:bg>
-      <p:bgPr>
-        <a:solidFill>
-          <a:srgbClr val="F4F1EA"/>
-        </a:solidFill>
-        <a:effectLst/>
-      </p:bgPr>
-    </p:bg>
-    <p:spTree>
-      <p:nvGrpSpPr>
-        <p:cNvPr id="1" name=""/>
-        <p:cNvGrpSpPr/>
-        <p:nvPr/>
-      </p:nvGrpSpPr>
-      <p:grpSpPr>
-        <a:xfrm>
-          <a:off x="0" y="0"/>
-          <a:ext cx="0" cy="0"/>
-          <a:chOff x="0" y="0"/>
-          <a:chExt cx="0" cy="0"/>
-        </a:xfrm>
-      </p:grpSpPr>
-      <p:sp>
-        <p:nvSpPr>
-          <p:cNvPr id="2" name="Text 0"/>
-          <p:cNvSpPr>
-            <a:spLocks noGrp="1"/>
-          </p:cNvSpPr>
-          <p:nvPr>
-            <p:ph type="title"/>
-          </p:nvPr>
-        </p:nvSpPr>
-        <p:spPr>
-          <a:xfrm>
-            <a:off x="812800" y="812800"/>
-            <a:ext cx="10883392" cy="528290"/>
-          </a:xfrm>
-          <a:prstGeom prst="rect">
-            <a:avLst/>
-          </a:prstGeom>
-          <a:noFill/>
-          <a:ln/>
-        </p:spPr>
-        <p:txBody>
-          <a:bodyPr wrap="square" lIns="0" tIns="0" rIns="0" bIns="0" rtlCol="0" anchor="t">
-            <a:normAutofit/>
-          </a:bodyPr>
-          <a:lstStyle/>
-          <a:p>
-            <a:pPr marL="0" indent="0" algn="l">
-              <a:lnSpc>
-                <a:spcPts val="3960"/>
-              </a:lnSpc>
-              <a:buNone/>
-            </a:pPr>
-            <a:r>
-              <a:rPr lang="en-US" sz="3600" b="1" i="0" dirty="0">
-                <a:solidFill>
-                  <a:srgbClr val="16202F"/>
-                </a:solidFill>
-                <a:latin typeface="IBM Plex Sans" pitchFamily="34" charset="0"/>
-                <a:ea typeface="IBM Plex Sans" pitchFamily="34" charset="-122"/>
-                <a:cs typeface="IBM Plex Sans" pitchFamily="34" charset="-120"/>
-              </a:rPr>
-              <a:t>Ruta de la exposición</a:t>
-            </a:r>
-            <a:endParaRPr lang="en-US" sz="3600" dirty="0"/>
-          </a:p>
-        </p:txBody>
-      </p:sp>
-      <p:sp>
-        <p:nvSpPr>
-          <p:cNvPr id="3" name="Shape 1"/>
-          <p:cNvSpPr/>
-          <p:nvPr/>
-        </p:nvSpPr>
-        <p:spPr>
-          <a:xfrm>
-            <a:off x="815975" y="1623665"/>
-            <a:ext cx="2520950" cy="1174651"/>
-          </a:xfrm>
-          <a:prstGeom prst="roundRect">
-            <a:avLst>
-              <a:gd name="adj" fmla="val 8379"/>
-            </a:avLst>
-          </a:prstGeom>
-          <a:solidFill>
-            <a:srgbClr val="FFFFFF"/>
-          </a:solidFill>
-          <a:ln w="6350">
-            <a:solidFill>
-              <a:srgbClr val="DDD8CC"/>
-            </a:solidFill>
-            <a:prstDash val="solid"/>
-          </a:ln>
-        </p:spPr>
-        <p:txBody>
-          <a:bodyPr/>
-          <a:lstStyle/>
-          <a:p>
-            <a:endParaRPr lang="es-ES_tradnl"/>
-          </a:p>
-        </p:txBody>
-      </p:sp>
-      <p:sp>
-        <p:nvSpPr>
-          <p:cNvPr id="4" name="Text 2"/>
-          <p:cNvSpPr/>
-          <p:nvPr/>
-        </p:nvSpPr>
-        <p:spPr>
-          <a:xfrm>
-            <a:off x="996950" y="1804640"/>
-            <a:ext cx="2223770" cy="238720"/>
-          </a:xfrm>
-          <a:prstGeom prst="rect">
-            <a:avLst/>
-          </a:prstGeom>
-          <a:noFill/>
-          <a:ln/>
-        </p:spPr>
-        <p:txBody>
-          <a:bodyPr wrap="square" lIns="0" tIns="0" rIns="0" bIns="0" rtlCol="0" anchor="t">
-            <a:normAutofit/>
-          </a:bodyPr>
-          <a:lstStyle/>
-          <a:p>
-            <a:pPr marL="0" indent="0" algn="l">
-              <a:lnSpc>
-                <a:spcPts val="1680"/>
-              </a:lnSpc>
-              <a:buNone/>
-            </a:pPr>
-            <a:r>
-              <a:rPr lang="en-US" sz="1200" dirty="0">
-                <a:solidFill>
-                  <a:srgbClr val="C8432E"/>
-                </a:solidFill>
-                <a:latin typeface="JetBrains Mono" pitchFamily="49" charset="0"/>
-                <a:ea typeface="JetBrains Mono" pitchFamily="49" charset="-122"/>
-                <a:cs typeface="JetBrains Mono" pitchFamily="49" charset="-120"/>
-              </a:rPr>
-              <a:t>01</a:t>
-            </a:r>
-            <a:endParaRPr lang="en-US" sz="1200" dirty="0"/>
-          </a:p>
-        </p:txBody>
-      </p:sp>
-      <p:sp>
-        <p:nvSpPr>
-          <p:cNvPr id="5" name="Text 3"/>
-          <p:cNvSpPr/>
-          <p:nvPr/>
-        </p:nvSpPr>
-        <p:spPr>
-          <a:xfrm>
-            <a:off x="996950" y="2081461"/>
-            <a:ext cx="2223770" cy="284460"/>
-          </a:xfrm>
-          <a:prstGeom prst="rect">
-            <a:avLst/>
-          </a:prstGeom>
-          <a:noFill/>
-          <a:ln/>
-        </p:spPr>
-        <p:txBody>
-          <a:bodyPr wrap="square" lIns="0" tIns="0" rIns="0" bIns="0" rtlCol="0" anchor="t">
-            <a:normAutofit/>
-          </a:bodyPr>
-          <a:lstStyle/>
-          <a:p>
-            <a:pPr marL="0" indent="0" algn="l">
-              <a:lnSpc>
-                <a:spcPts val="2040"/>
-              </a:lnSpc>
-              <a:buNone/>
-            </a:pPr>
-            <a:r>
-              <a:rPr lang="en-US" sz="1700" b="1" dirty="0">
-                <a:solidFill>
-                  <a:srgbClr val="16202F"/>
-                </a:solidFill>
-                <a:latin typeface="IBM Plex Sans" pitchFamily="34" charset="0"/>
-                <a:ea typeface="IBM Plex Sans" pitchFamily="34" charset="-122"/>
-                <a:cs typeface="IBM Plex Sans" pitchFamily="34" charset="-120"/>
-              </a:rPr>
-              <a:t>Definición</a:t>
-            </a:r>
-            <a:endParaRPr lang="en-US" sz="1700" dirty="0"/>
-          </a:p>
-        </p:txBody>
-      </p:sp>
-      <p:sp>
-        <p:nvSpPr>
-          <p:cNvPr id="6" name="Text 4"/>
-          <p:cNvSpPr/>
-          <p:nvPr/>
-        </p:nvSpPr>
-        <p:spPr>
-          <a:xfrm>
-            <a:off x="996950" y="2404021"/>
-            <a:ext cx="2223770" cy="238720"/>
-          </a:xfrm>
-          <a:prstGeom prst="rect">
-            <a:avLst/>
-          </a:prstGeom>
-          <a:noFill/>
-          <a:ln/>
-        </p:spPr>
-        <p:txBody>
-          <a:bodyPr wrap="square" lIns="0" tIns="0" rIns="0" bIns="0" rtlCol="0" anchor="t">
-            <a:normAutofit/>
-          </a:bodyPr>
-          <a:lstStyle/>
-          <a:p>
-            <a:pPr marL="0" indent="0" algn="l">
-              <a:lnSpc>
-                <a:spcPts val="1680"/>
-              </a:lnSpc>
-              <a:buNone/>
-            </a:pPr>
-            <a:r>
-              <a:rPr lang="en-US" sz="1200" dirty="0">
-                <a:solidFill>
-                  <a:srgbClr val="566274"/>
-                </a:solidFill>
-                <a:latin typeface="IBM Plex Sans" pitchFamily="34" charset="0"/>
-                <a:ea typeface="IBM Plex Sans" pitchFamily="34" charset="-122"/>
-                <a:cs typeface="IBM Plex Sans" pitchFamily="34" charset="-120"/>
-              </a:rPr>
-              <a:t>Qué es y qué no es</a:t>
-            </a:r>
-            <a:endParaRPr lang="en-US" sz="1200" dirty="0"/>
-          </a:p>
-        </p:txBody>
-      </p:sp>
-      <p:sp>
-        <p:nvSpPr>
-          <p:cNvPr id="7" name="Shape 5"/>
-          <p:cNvSpPr/>
-          <p:nvPr/>
-        </p:nvSpPr>
-        <p:spPr>
-          <a:xfrm>
-            <a:off x="3495675" y="1623665"/>
-            <a:ext cx="2520950" cy="1174651"/>
-          </a:xfrm>
-          <a:prstGeom prst="roundRect">
-            <a:avLst>
-              <a:gd name="adj" fmla="val 8379"/>
-            </a:avLst>
-          </a:prstGeom>
-          <a:solidFill>
-            <a:srgbClr val="FFFFFF"/>
-          </a:solidFill>
-          <a:ln w="6350">
-            <a:solidFill>
-              <a:srgbClr val="DDD8CC"/>
-            </a:solidFill>
-            <a:prstDash val="solid"/>
-          </a:ln>
-        </p:spPr>
-        <p:txBody>
-          <a:bodyPr/>
-          <a:lstStyle/>
-          <a:p>
-            <a:endParaRPr lang="es-ES_tradnl"/>
-          </a:p>
-        </p:txBody>
-      </p:sp>
-      <p:sp>
-        <p:nvSpPr>
-          <p:cNvPr id="8" name="Text 6"/>
-          <p:cNvSpPr/>
-          <p:nvPr/>
-        </p:nvSpPr>
-        <p:spPr>
-          <a:xfrm>
-            <a:off x="3676650" y="1804640"/>
-            <a:ext cx="2223770" cy="238720"/>
-          </a:xfrm>
-          <a:prstGeom prst="rect">
-            <a:avLst/>
-          </a:prstGeom>
-          <a:noFill/>
-          <a:ln/>
-        </p:spPr>
-        <p:txBody>
-          <a:bodyPr wrap="square" lIns="0" tIns="0" rIns="0" bIns="0" rtlCol="0" anchor="t">
-            <a:normAutofit/>
-          </a:bodyPr>
-          <a:lstStyle/>
-          <a:p>
-            <a:pPr marL="0" indent="0" algn="l">
-              <a:lnSpc>
-                <a:spcPts val="1680"/>
-              </a:lnSpc>
-              <a:buNone/>
-            </a:pPr>
-            <a:r>
-              <a:rPr lang="en-US" sz="1200" dirty="0">
-                <a:solidFill>
-                  <a:srgbClr val="C8432E"/>
-                </a:solidFill>
-                <a:latin typeface="JetBrains Mono" pitchFamily="49" charset="0"/>
-                <a:ea typeface="JetBrains Mono" pitchFamily="49" charset="-122"/>
-                <a:cs typeface="JetBrains Mono" pitchFamily="49" charset="-120"/>
-              </a:rPr>
-              <a:t>02</a:t>
-            </a:r>
-            <a:endParaRPr lang="en-US" sz="1200" dirty="0"/>
-          </a:p>
-        </p:txBody>
-      </p:sp>
-      <p:sp>
-        <p:nvSpPr>
-          <p:cNvPr id="9" name="Text 7"/>
-          <p:cNvSpPr/>
-          <p:nvPr/>
-        </p:nvSpPr>
-        <p:spPr>
-          <a:xfrm>
-            <a:off x="3676650" y="2081461"/>
-            <a:ext cx="2223770" cy="284460"/>
-          </a:xfrm>
-          <a:prstGeom prst="rect">
-            <a:avLst/>
-          </a:prstGeom>
-          <a:noFill/>
-          <a:ln/>
-        </p:spPr>
-        <p:txBody>
-          <a:bodyPr wrap="square" lIns="0" tIns="0" rIns="0" bIns="0" rtlCol="0" anchor="t">
-            <a:normAutofit/>
-          </a:bodyPr>
-          <a:lstStyle/>
-          <a:p>
-            <a:pPr marL="0" indent="0" algn="l">
-              <a:lnSpc>
-                <a:spcPts val="2040"/>
-              </a:lnSpc>
-              <a:buNone/>
-            </a:pPr>
-            <a:r>
-              <a:rPr lang="en-US" sz="1700" b="1" dirty="0">
-                <a:solidFill>
-                  <a:srgbClr val="16202F"/>
-                </a:solidFill>
-                <a:latin typeface="IBM Plex Sans" pitchFamily="34" charset="0"/>
-                <a:ea typeface="IBM Plex Sans" pitchFamily="34" charset="-122"/>
-                <a:cs typeface="IBM Plex Sans" pitchFamily="34" charset="-120"/>
-              </a:rPr>
-              <a:t>Importancia</a:t>
-            </a:r>
-            <a:endParaRPr lang="en-US" sz="1700" dirty="0"/>
-          </a:p>
-        </p:txBody>
-      </p:sp>
-      <p:sp>
-        <p:nvSpPr>
-          <p:cNvPr id="10" name="Text 8"/>
-          <p:cNvSpPr/>
-          <p:nvPr/>
-        </p:nvSpPr>
-        <p:spPr>
-          <a:xfrm>
-            <a:off x="3676650" y="2404021"/>
-            <a:ext cx="2223770" cy="238720"/>
-          </a:xfrm>
-          <a:prstGeom prst="rect">
-            <a:avLst/>
-          </a:prstGeom>
-          <a:noFill/>
-          <a:ln/>
-        </p:spPr>
-        <p:txBody>
-          <a:bodyPr wrap="square" lIns="0" tIns="0" rIns="0" bIns="0" rtlCol="0" anchor="t">
-            <a:normAutofit/>
-          </a:bodyPr>
-          <a:lstStyle/>
-          <a:p>
-            <a:pPr marL="0" indent="0" algn="l">
-              <a:lnSpc>
-                <a:spcPts val="1680"/>
-              </a:lnSpc>
-              <a:buNone/>
-            </a:pPr>
-            <a:r>
-              <a:rPr lang="en-US" sz="1200" dirty="0">
-                <a:solidFill>
-                  <a:srgbClr val="566274"/>
-                </a:solidFill>
-                <a:latin typeface="IBM Plex Sans" pitchFamily="34" charset="0"/>
-                <a:ea typeface="IBM Plex Sans" pitchFamily="34" charset="-122"/>
-                <a:cs typeface="IBM Plex Sans" pitchFamily="34" charset="-120"/>
-              </a:rPr>
-              <a:t>Para defender y para atacar</a:t>
-            </a:r>
-            <a:endParaRPr lang="en-US" sz="1200" dirty="0"/>
-          </a:p>
-        </p:txBody>
-      </p:sp>
-      <p:sp>
-        <p:nvSpPr>
-          <p:cNvPr id="11" name="Shape 9"/>
-          <p:cNvSpPr/>
-          <p:nvPr/>
-        </p:nvSpPr>
-        <p:spPr>
-          <a:xfrm>
-            <a:off x="6175375" y="1623665"/>
-            <a:ext cx="2520950" cy="1174651"/>
-          </a:xfrm>
-          <a:prstGeom prst="roundRect">
-            <a:avLst>
-              <a:gd name="adj" fmla="val 8379"/>
-            </a:avLst>
-          </a:prstGeom>
-          <a:solidFill>
-            <a:srgbClr val="FFFFFF"/>
-          </a:solidFill>
-          <a:ln w="6350">
-            <a:solidFill>
-              <a:srgbClr val="DDD8CC"/>
-            </a:solidFill>
-            <a:prstDash val="solid"/>
-          </a:ln>
-        </p:spPr>
-        <p:txBody>
-          <a:bodyPr/>
-          <a:lstStyle/>
-          <a:p>
-            <a:endParaRPr lang="es-ES_tradnl"/>
-          </a:p>
-        </p:txBody>
-      </p:sp>
-      <p:sp>
-        <p:nvSpPr>
-          <p:cNvPr id="12" name="Text 10"/>
-          <p:cNvSpPr/>
-          <p:nvPr/>
-        </p:nvSpPr>
-        <p:spPr>
-          <a:xfrm>
-            <a:off x="6356350" y="1804640"/>
-            <a:ext cx="2223770" cy="238720"/>
-          </a:xfrm>
-          <a:prstGeom prst="rect">
-            <a:avLst/>
-          </a:prstGeom>
-          <a:noFill/>
-          <a:ln/>
-        </p:spPr>
-        <p:txBody>
-          <a:bodyPr wrap="square" lIns="0" tIns="0" rIns="0" bIns="0" rtlCol="0" anchor="t">
-            <a:normAutofit/>
-          </a:bodyPr>
-          <a:lstStyle/>
-          <a:p>
-            <a:pPr marL="0" indent="0" algn="l">
-              <a:lnSpc>
-                <a:spcPts val="1680"/>
-              </a:lnSpc>
-              <a:buNone/>
-            </a:pPr>
-            <a:r>
-              <a:rPr lang="en-US" sz="1200" dirty="0">
-                <a:solidFill>
-                  <a:srgbClr val="C8432E"/>
-                </a:solidFill>
-                <a:latin typeface="JetBrains Mono" pitchFamily="49" charset="0"/>
-                <a:ea typeface="JetBrains Mono" pitchFamily="49" charset="-122"/>
-                <a:cs typeface="JetBrains Mono" pitchFamily="49" charset="-120"/>
-              </a:rPr>
-              <a:t>03</a:t>
-            </a:r>
-            <a:endParaRPr lang="en-US" sz="1200" dirty="0"/>
-          </a:p>
-        </p:txBody>
-      </p:sp>
-      <p:sp>
-        <p:nvSpPr>
-          <p:cNvPr id="13" name="Text 11"/>
-          <p:cNvSpPr/>
-          <p:nvPr/>
-        </p:nvSpPr>
-        <p:spPr>
-          <a:xfrm>
-            <a:off x="6356350" y="2081461"/>
-            <a:ext cx="2223770" cy="284460"/>
-          </a:xfrm>
-          <a:prstGeom prst="rect">
-            <a:avLst/>
-          </a:prstGeom>
-          <a:noFill/>
-          <a:ln/>
-        </p:spPr>
-        <p:txBody>
-          <a:bodyPr wrap="square" lIns="0" tIns="0" rIns="0" bIns="0" rtlCol="0" anchor="t">
-            <a:normAutofit/>
-          </a:bodyPr>
-          <a:lstStyle/>
-          <a:p>
-            <a:pPr marL="0" indent="0" algn="l">
-              <a:lnSpc>
-                <a:spcPts val="2040"/>
-              </a:lnSpc>
-              <a:buNone/>
-            </a:pPr>
-            <a:r>
-              <a:rPr lang="en-US" sz="1700" b="1" dirty="0">
-                <a:solidFill>
-                  <a:srgbClr val="16202F"/>
-                </a:solidFill>
-                <a:latin typeface="IBM Plex Sans" pitchFamily="34" charset="0"/>
-                <a:ea typeface="IBM Plex Sans" pitchFamily="34" charset="-122"/>
-                <a:cs typeface="IBM Plex Sans" pitchFamily="34" charset="-120"/>
-              </a:rPr>
-              <a:t>Características</a:t>
-            </a:r>
-            <a:endParaRPr lang="en-US" sz="1700" dirty="0"/>
-          </a:p>
-        </p:txBody>
-      </p:sp>
-      <p:sp>
-        <p:nvSpPr>
-          <p:cNvPr id="14" name="Text 12"/>
-          <p:cNvSpPr/>
-          <p:nvPr/>
-        </p:nvSpPr>
-        <p:spPr>
-          <a:xfrm>
-            <a:off x="6356350" y="2404021"/>
-            <a:ext cx="2223770" cy="238720"/>
-          </a:xfrm>
-          <a:prstGeom prst="rect">
-            <a:avLst/>
-          </a:prstGeom>
-          <a:noFill/>
-          <a:ln/>
-        </p:spPr>
-        <p:txBody>
-          <a:bodyPr wrap="square" lIns="0" tIns="0" rIns="0" bIns="0" rtlCol="0" anchor="t">
-            <a:normAutofit/>
-          </a:bodyPr>
-          <a:lstStyle/>
-          <a:p>
-            <a:pPr marL="0" indent="0" algn="l">
-              <a:lnSpc>
-                <a:spcPts val="1680"/>
-              </a:lnSpc>
-              <a:buNone/>
-            </a:pPr>
-            <a:r>
-              <a:rPr lang="en-US" sz="1200" dirty="0">
-                <a:solidFill>
-                  <a:srgbClr val="566274"/>
-                </a:solidFill>
-                <a:latin typeface="IBM Plex Sans" pitchFamily="34" charset="0"/>
-                <a:ea typeface="IBM Plex Sans" pitchFamily="34" charset="-122"/>
-                <a:cs typeface="IBM Plex Sans" pitchFamily="34" charset="-120"/>
-              </a:rPr>
-              <a:t>Filtros, facets, créditos</a:t>
-            </a:r>
-            <a:endParaRPr lang="en-US" sz="1200" dirty="0"/>
-          </a:p>
-        </p:txBody>
-      </p:sp>
-      <p:sp>
-        <p:nvSpPr>
-          <p:cNvPr id="15" name="Shape 13"/>
-          <p:cNvSpPr/>
-          <p:nvPr/>
-        </p:nvSpPr>
-        <p:spPr>
-          <a:xfrm>
-            <a:off x="8855075" y="1623665"/>
-            <a:ext cx="2520950" cy="1174651"/>
-          </a:xfrm>
-          <a:prstGeom prst="roundRect">
-            <a:avLst>
-              <a:gd name="adj" fmla="val 8379"/>
-            </a:avLst>
-          </a:prstGeom>
-          <a:solidFill>
-            <a:srgbClr val="FFFFFF"/>
-          </a:solidFill>
-          <a:ln w="6350">
-            <a:solidFill>
-              <a:srgbClr val="DDD8CC"/>
-            </a:solidFill>
-            <a:prstDash val="solid"/>
-          </a:ln>
-        </p:spPr>
-        <p:txBody>
-          <a:bodyPr/>
-          <a:lstStyle/>
-          <a:p>
-            <a:endParaRPr lang="es-ES_tradnl"/>
-          </a:p>
-        </p:txBody>
-      </p:sp>
-      <p:sp>
-        <p:nvSpPr>
-          <p:cNvPr id="16" name="Text 14"/>
-          <p:cNvSpPr/>
-          <p:nvPr/>
-        </p:nvSpPr>
-        <p:spPr>
-          <a:xfrm>
-            <a:off x="9036050" y="1804640"/>
-            <a:ext cx="2223770" cy="238720"/>
-          </a:xfrm>
-          <a:prstGeom prst="rect">
-            <a:avLst/>
-          </a:prstGeom>
-          <a:noFill/>
-          <a:ln/>
-        </p:spPr>
-        <p:txBody>
-          <a:bodyPr wrap="square" lIns="0" tIns="0" rIns="0" bIns="0" rtlCol="0" anchor="t">
-            <a:normAutofit/>
-          </a:bodyPr>
-          <a:lstStyle/>
-          <a:p>
-            <a:pPr marL="0" indent="0" algn="l">
-              <a:lnSpc>
-                <a:spcPts val="1680"/>
-              </a:lnSpc>
-              <a:buNone/>
-            </a:pPr>
-            <a:r>
-              <a:rPr lang="en-US" sz="1200" dirty="0">
-                <a:solidFill>
-                  <a:srgbClr val="C8432E"/>
-                </a:solidFill>
-                <a:latin typeface="JetBrains Mono" pitchFamily="49" charset="0"/>
-                <a:ea typeface="JetBrains Mono" pitchFamily="49" charset="-122"/>
-                <a:cs typeface="JetBrains Mono" pitchFamily="49" charset="-120"/>
-              </a:rPr>
-              <a:t>04</a:t>
-            </a:r>
-            <a:endParaRPr lang="en-US" sz="1200" dirty="0"/>
-          </a:p>
-        </p:txBody>
-      </p:sp>
-      <p:sp>
-        <p:nvSpPr>
-          <p:cNvPr id="17" name="Text 15"/>
-          <p:cNvSpPr/>
-          <p:nvPr/>
-        </p:nvSpPr>
-        <p:spPr>
-          <a:xfrm>
-            <a:off x="9036050" y="2081461"/>
-            <a:ext cx="2223770" cy="284460"/>
-          </a:xfrm>
-          <a:prstGeom prst="rect">
-            <a:avLst/>
-          </a:prstGeom>
-          <a:noFill/>
-          <a:ln/>
-        </p:spPr>
-        <p:txBody>
-          <a:bodyPr wrap="square" lIns="0" tIns="0" rIns="0" bIns="0" rtlCol="0" anchor="t">
-            <a:normAutofit/>
-          </a:bodyPr>
-          <a:lstStyle/>
-          <a:p>
-            <a:pPr marL="0" indent="0" algn="l">
-              <a:lnSpc>
-                <a:spcPts val="2040"/>
-              </a:lnSpc>
-              <a:buNone/>
-            </a:pPr>
-            <a:r>
-              <a:rPr lang="en-US" sz="1700" b="1" dirty="0">
-                <a:solidFill>
-                  <a:srgbClr val="16202F"/>
-                </a:solidFill>
-                <a:latin typeface="IBM Plex Sans" pitchFamily="34" charset="0"/>
-                <a:ea typeface="IBM Plex Sans" pitchFamily="34" charset="-122"/>
-                <a:cs typeface="IBM Plex Sans" pitchFamily="34" charset="-120"/>
-              </a:rPr>
-              <a:t>Funcionamiento</a:t>
-            </a:r>
-            <a:endParaRPr lang="en-US" sz="1700" dirty="0"/>
-          </a:p>
-        </p:txBody>
-      </p:sp>
-      <p:sp>
-        <p:nvSpPr>
-          <p:cNvPr id="18" name="Text 16"/>
-          <p:cNvSpPr/>
-          <p:nvPr/>
-        </p:nvSpPr>
-        <p:spPr>
-          <a:xfrm>
-            <a:off x="9036050" y="2404021"/>
-            <a:ext cx="2223770" cy="238720"/>
-          </a:xfrm>
-          <a:prstGeom prst="rect">
-            <a:avLst/>
-          </a:prstGeom>
-          <a:noFill/>
-          <a:ln/>
-        </p:spPr>
-        <p:txBody>
-          <a:bodyPr wrap="square" lIns="0" tIns="0" rIns="0" bIns="0" rtlCol="0" anchor="t">
-            <a:normAutofit/>
-          </a:bodyPr>
-          <a:lstStyle/>
-          <a:p>
-            <a:pPr marL="0" indent="0" algn="l">
-              <a:lnSpc>
-                <a:spcPts val="1680"/>
-              </a:lnSpc>
-              <a:buNone/>
-            </a:pPr>
-            <a:r>
-              <a:rPr lang="en-US" sz="1200" dirty="0">
-                <a:solidFill>
-                  <a:srgbClr val="566274"/>
-                </a:solidFill>
-                <a:latin typeface="IBM Plex Sans" pitchFamily="34" charset="0"/>
-                <a:ea typeface="IBM Plex Sans" pitchFamily="34" charset="-122"/>
-                <a:cs typeface="IBM Plex Sans" pitchFamily="34" charset="-120"/>
-              </a:rPr>
-              <a:t>Del banner al índice</a:t>
-            </a:r>
-            <a:endParaRPr lang="en-US" sz="1200" dirty="0"/>
-          </a:p>
-        </p:txBody>
-      </p:sp>
-      <p:sp>
-        <p:nvSpPr>
-          <p:cNvPr id="19" name="Shape 17"/>
-          <p:cNvSpPr/>
-          <p:nvPr/>
-        </p:nvSpPr>
-        <p:spPr>
-          <a:xfrm>
-            <a:off x="815975" y="2957066"/>
-            <a:ext cx="2520950" cy="1433711"/>
-          </a:xfrm>
-          <a:prstGeom prst="roundRect">
-            <a:avLst>
-              <a:gd name="adj" fmla="val 6865"/>
-            </a:avLst>
-          </a:prstGeom>
-          <a:solidFill>
-            <a:srgbClr val="FFFFFF"/>
-          </a:solidFill>
-          <a:ln w="6350">
-            <a:solidFill>
-              <a:srgbClr val="DDD8CC"/>
-            </a:solidFill>
-            <a:prstDash val="solid"/>
-          </a:ln>
-        </p:spPr>
-        <p:txBody>
-          <a:bodyPr/>
-          <a:lstStyle/>
-          <a:p>
-            <a:endParaRPr lang="es-ES_tradnl"/>
-          </a:p>
-        </p:txBody>
-      </p:sp>
-      <p:sp>
-        <p:nvSpPr>
-          <p:cNvPr id="20" name="Text 18"/>
-          <p:cNvSpPr/>
-          <p:nvPr/>
-        </p:nvSpPr>
-        <p:spPr>
-          <a:xfrm>
-            <a:off x="996950" y="3138041"/>
-            <a:ext cx="2223770" cy="238720"/>
-          </a:xfrm>
-          <a:prstGeom prst="rect">
-            <a:avLst/>
-          </a:prstGeom>
-          <a:noFill/>
-          <a:ln/>
-        </p:spPr>
-        <p:txBody>
-          <a:bodyPr wrap="square" lIns="0" tIns="0" rIns="0" bIns="0" rtlCol="0" anchor="t">
-            <a:normAutofit/>
-          </a:bodyPr>
-          <a:lstStyle/>
-          <a:p>
-            <a:pPr marL="0" indent="0" algn="l">
-              <a:lnSpc>
-                <a:spcPts val="1680"/>
-              </a:lnSpc>
-              <a:buNone/>
-            </a:pPr>
-            <a:r>
-              <a:rPr lang="en-US" sz="1200" dirty="0">
-                <a:solidFill>
-                  <a:srgbClr val="C8432E"/>
-                </a:solidFill>
-                <a:latin typeface="JetBrains Mono" pitchFamily="49" charset="0"/>
-                <a:ea typeface="JetBrains Mono" pitchFamily="49" charset="-122"/>
-                <a:cs typeface="JetBrains Mono" pitchFamily="49" charset="-120"/>
-              </a:rPr>
-              <a:t>05</a:t>
-            </a:r>
-            <a:endParaRPr lang="en-US" sz="1200" dirty="0"/>
-          </a:p>
-        </p:txBody>
-      </p:sp>
-      <p:sp>
-        <p:nvSpPr>
-          <p:cNvPr id="21" name="Text 19"/>
-          <p:cNvSpPr/>
-          <p:nvPr/>
-        </p:nvSpPr>
-        <p:spPr>
-          <a:xfrm>
-            <a:off x="996950" y="3414861"/>
-            <a:ext cx="2223770" cy="284460"/>
-          </a:xfrm>
-          <a:prstGeom prst="rect">
-            <a:avLst/>
-          </a:prstGeom>
-          <a:noFill/>
-          <a:ln/>
-        </p:spPr>
-        <p:txBody>
-          <a:bodyPr wrap="square" lIns="0" tIns="0" rIns="0" bIns="0" rtlCol="0" anchor="t">
-            <a:normAutofit/>
-          </a:bodyPr>
-          <a:lstStyle/>
-          <a:p>
-            <a:pPr marL="0" indent="0" algn="l">
-              <a:lnSpc>
-                <a:spcPts val="2040"/>
-              </a:lnSpc>
-              <a:buNone/>
-            </a:pPr>
-            <a:r>
-              <a:rPr lang="en-US" sz="1700" b="1" dirty="0">
-                <a:solidFill>
-                  <a:srgbClr val="16202F"/>
-                </a:solidFill>
-                <a:latin typeface="IBM Plex Sans" pitchFamily="34" charset="0"/>
-                <a:ea typeface="IBM Plex Sans" pitchFamily="34" charset="-122"/>
-                <a:cs typeface="IBM Plex Sans" pitchFamily="34" charset="-120"/>
-              </a:rPr>
-              <a:t>Ejemplos prácticos</a:t>
-            </a:r>
-            <a:endParaRPr lang="en-US" sz="1700" dirty="0"/>
-          </a:p>
-        </p:txBody>
-      </p:sp>
-      <p:sp>
-        <p:nvSpPr>
-          <p:cNvPr id="22" name="Text 20"/>
-          <p:cNvSpPr/>
-          <p:nvPr/>
-        </p:nvSpPr>
-        <p:spPr>
-          <a:xfrm>
-            <a:off x="996950" y="3737421"/>
-            <a:ext cx="2223770" cy="238720"/>
-          </a:xfrm>
-          <a:prstGeom prst="rect">
-            <a:avLst/>
-          </a:prstGeom>
-          <a:noFill/>
-          <a:ln/>
-        </p:spPr>
-        <p:txBody>
-          <a:bodyPr wrap="square" lIns="0" tIns="0" rIns="0" bIns="0" rtlCol="0" anchor="t">
-            <a:normAutofit/>
-          </a:bodyPr>
-          <a:lstStyle/>
-          <a:p>
-            <a:pPr marL="0" indent="0" algn="l">
-              <a:lnSpc>
-                <a:spcPts val="1680"/>
-              </a:lnSpc>
-              <a:buNone/>
-            </a:pPr>
-            <a:r>
-              <a:rPr lang="en-US" sz="1200" dirty="0">
-                <a:solidFill>
-                  <a:srgbClr val="566274"/>
-                </a:solidFill>
-                <a:latin typeface="IBM Plex Sans" pitchFamily="34" charset="0"/>
-                <a:ea typeface="IBM Plex Sans" pitchFamily="34" charset="-122"/>
-                <a:cs typeface="IBM Plex Sans" pitchFamily="34" charset="-120"/>
-              </a:rPr>
-              <a:t>Demo con web, CLI y API</a:t>
-            </a:r>
-            <a:endParaRPr lang="en-US" sz="1200" dirty="0"/>
-          </a:p>
-        </p:txBody>
-      </p:sp>
-      <p:sp>
-        <p:nvSpPr>
-          <p:cNvPr id="23" name="Shape 21"/>
-          <p:cNvSpPr/>
-          <p:nvPr/>
-        </p:nvSpPr>
-        <p:spPr>
-          <a:xfrm>
-            <a:off x="3495675" y="2957066"/>
-            <a:ext cx="2520950" cy="1433711"/>
-          </a:xfrm>
-          <a:prstGeom prst="roundRect">
-            <a:avLst>
-              <a:gd name="adj" fmla="val 6865"/>
-            </a:avLst>
-          </a:prstGeom>
-          <a:solidFill>
-            <a:srgbClr val="FFFFFF"/>
-          </a:solidFill>
-          <a:ln w="6350">
-            <a:solidFill>
-              <a:srgbClr val="DDD8CC"/>
-            </a:solidFill>
-            <a:prstDash val="solid"/>
-          </a:ln>
-        </p:spPr>
-        <p:txBody>
-          <a:bodyPr/>
-          <a:lstStyle/>
-          <a:p>
-            <a:endParaRPr lang="es-ES_tradnl"/>
-          </a:p>
-        </p:txBody>
-      </p:sp>
-      <p:sp>
-        <p:nvSpPr>
-          <p:cNvPr id="24" name="Text 22"/>
-          <p:cNvSpPr/>
-          <p:nvPr/>
-        </p:nvSpPr>
-        <p:spPr>
-          <a:xfrm>
-            <a:off x="3676650" y="3138041"/>
-            <a:ext cx="2223770" cy="238720"/>
-          </a:xfrm>
-          <a:prstGeom prst="rect">
-            <a:avLst/>
-          </a:prstGeom>
-          <a:noFill/>
-          <a:ln/>
-        </p:spPr>
-        <p:txBody>
-          <a:bodyPr wrap="square" lIns="0" tIns="0" rIns="0" bIns="0" rtlCol="0" anchor="t">
-            <a:normAutofit/>
-          </a:bodyPr>
-          <a:lstStyle/>
-          <a:p>
-            <a:pPr marL="0" indent="0" algn="l">
-              <a:lnSpc>
-                <a:spcPts val="1680"/>
-              </a:lnSpc>
-              <a:buNone/>
-            </a:pPr>
-            <a:r>
-              <a:rPr lang="en-US" sz="1200" dirty="0">
-                <a:solidFill>
-                  <a:srgbClr val="C8432E"/>
-                </a:solidFill>
-                <a:latin typeface="JetBrains Mono" pitchFamily="49" charset="0"/>
-                <a:ea typeface="JetBrains Mono" pitchFamily="49" charset="-122"/>
-                <a:cs typeface="JetBrains Mono" pitchFamily="49" charset="-120"/>
-              </a:rPr>
-              <a:t>06</a:t>
-            </a:r>
-            <a:endParaRPr lang="en-US" sz="1200" dirty="0"/>
-          </a:p>
-        </p:txBody>
-      </p:sp>
-      <p:sp>
-        <p:nvSpPr>
-          <p:cNvPr id="25" name="Text 23"/>
-          <p:cNvSpPr/>
-          <p:nvPr/>
-        </p:nvSpPr>
-        <p:spPr>
-          <a:xfrm>
-            <a:off x="3676650" y="3414861"/>
-            <a:ext cx="2223770" cy="284460"/>
-          </a:xfrm>
-          <a:prstGeom prst="rect">
-            <a:avLst/>
-          </a:prstGeom>
-          <a:noFill/>
-          <a:ln/>
-        </p:spPr>
-        <p:txBody>
-          <a:bodyPr wrap="square" lIns="0" tIns="0" rIns="0" bIns="0" rtlCol="0" anchor="t">
-            <a:normAutofit/>
-          </a:bodyPr>
-          <a:lstStyle/>
-          <a:p>
-            <a:pPr marL="0" indent="0" algn="l">
-              <a:lnSpc>
-                <a:spcPts val="2040"/>
-              </a:lnSpc>
-              <a:buNone/>
-            </a:pPr>
-            <a:r>
-              <a:rPr lang="en-US" sz="1700" b="1" dirty="0">
-                <a:solidFill>
-                  <a:srgbClr val="16202F"/>
-                </a:solidFill>
-                <a:latin typeface="IBM Plex Sans" pitchFamily="34" charset="0"/>
-                <a:ea typeface="IBM Plex Sans" pitchFamily="34" charset="-122"/>
-                <a:cs typeface="IBM Plex Sans" pitchFamily="34" charset="-120"/>
-              </a:rPr>
-              <a:t>Otros buscadores</a:t>
-            </a:r>
-            <a:endParaRPr lang="en-US" sz="1700" dirty="0"/>
-          </a:p>
-        </p:txBody>
-      </p:sp>
-      <p:sp>
-        <p:nvSpPr>
-          <p:cNvPr id="26" name="Text 24"/>
-          <p:cNvSpPr/>
-          <p:nvPr/>
-        </p:nvSpPr>
-        <p:spPr>
-          <a:xfrm>
-            <a:off x="3676650" y="3737421"/>
-            <a:ext cx="2223770" cy="452041"/>
-          </a:xfrm>
-          <a:prstGeom prst="rect">
-            <a:avLst/>
-          </a:prstGeom>
-          <a:noFill/>
-          <a:ln/>
-        </p:spPr>
-        <p:txBody>
-          <a:bodyPr wrap="square" lIns="0" tIns="0" rIns="0" bIns="0" rtlCol="0" anchor="t">
-            <a:normAutofit/>
-          </a:bodyPr>
-          <a:lstStyle/>
-          <a:p>
-            <a:pPr marL="0" indent="0" algn="l">
-              <a:lnSpc>
-                <a:spcPts val="1680"/>
-              </a:lnSpc>
-              <a:buNone/>
-            </a:pPr>
-            <a:r>
-              <a:rPr lang="en-US" sz="1200" dirty="0">
-                <a:solidFill>
-                  <a:srgbClr val="566274"/>
-                </a:solidFill>
-                <a:latin typeface="IBM Plex Sans" pitchFamily="34" charset="0"/>
-                <a:ea typeface="IBM Plex Sans" pitchFamily="34" charset="-122"/>
-                <a:cs typeface="IBM Plex Sans" pitchFamily="34" charset="-120"/>
-              </a:rPr>
-              <a:t>Censys, ZoomEye, FOFA, GreyNoise</a:t>
-            </a:r>
-            <a:endParaRPr lang="en-US" sz="1200" dirty="0"/>
-          </a:p>
-        </p:txBody>
-      </p:sp>
-      <p:sp>
-        <p:nvSpPr>
-          <p:cNvPr id="27" name="Shape 25"/>
-          <p:cNvSpPr/>
-          <p:nvPr/>
-        </p:nvSpPr>
-        <p:spPr>
-          <a:xfrm>
-            <a:off x="6175375" y="2957066"/>
-            <a:ext cx="2520950" cy="1433711"/>
-          </a:xfrm>
-          <a:prstGeom prst="roundRect">
-            <a:avLst>
-              <a:gd name="adj" fmla="val 6865"/>
-            </a:avLst>
-          </a:prstGeom>
-          <a:solidFill>
-            <a:srgbClr val="FFFFFF"/>
-          </a:solidFill>
-          <a:ln w="6350">
-            <a:solidFill>
-              <a:srgbClr val="DDD8CC"/>
-            </a:solidFill>
-            <a:prstDash val="solid"/>
-          </a:ln>
-        </p:spPr>
-        <p:txBody>
-          <a:bodyPr/>
-          <a:lstStyle/>
-          <a:p>
-            <a:endParaRPr lang="es-ES_tradnl"/>
-          </a:p>
-        </p:txBody>
-      </p:sp>
-      <p:sp>
-        <p:nvSpPr>
-          <p:cNvPr id="28" name="Text 26"/>
-          <p:cNvSpPr/>
-          <p:nvPr/>
-        </p:nvSpPr>
-        <p:spPr>
-          <a:xfrm>
-            <a:off x="6356350" y="3138041"/>
-            <a:ext cx="2223770" cy="238720"/>
-          </a:xfrm>
-          <a:prstGeom prst="rect">
-            <a:avLst/>
-          </a:prstGeom>
-          <a:noFill/>
-          <a:ln/>
-        </p:spPr>
-        <p:txBody>
-          <a:bodyPr wrap="square" lIns="0" tIns="0" rIns="0" bIns="0" rtlCol="0" anchor="t">
-            <a:normAutofit/>
-          </a:bodyPr>
-          <a:lstStyle/>
-          <a:p>
-            <a:pPr marL="0" indent="0" algn="l">
-              <a:lnSpc>
-                <a:spcPts val="1680"/>
-              </a:lnSpc>
-              <a:buNone/>
-            </a:pPr>
-            <a:r>
-              <a:rPr lang="en-US" sz="1200" dirty="0">
-                <a:solidFill>
-                  <a:srgbClr val="C8432E"/>
-                </a:solidFill>
-                <a:latin typeface="JetBrains Mono" pitchFamily="49" charset="0"/>
-                <a:ea typeface="JetBrains Mono" pitchFamily="49" charset="-122"/>
-                <a:cs typeface="JetBrains Mono" pitchFamily="49" charset="-120"/>
-              </a:rPr>
-              <a:t>07</a:t>
-            </a:r>
-            <a:endParaRPr lang="en-US" sz="1200" dirty="0"/>
-          </a:p>
-        </p:txBody>
-      </p:sp>
-      <p:sp>
-        <p:nvSpPr>
-          <p:cNvPr id="29" name="Text 27"/>
-          <p:cNvSpPr/>
-          <p:nvPr/>
-        </p:nvSpPr>
-        <p:spPr>
-          <a:xfrm>
-            <a:off x="6356350" y="3414861"/>
-            <a:ext cx="2223770" cy="543520"/>
-          </a:xfrm>
-          <a:prstGeom prst="rect">
-            <a:avLst/>
-          </a:prstGeom>
-          <a:noFill/>
-          <a:ln/>
-        </p:spPr>
-        <p:txBody>
-          <a:bodyPr wrap="square" lIns="0" tIns="0" rIns="0" bIns="0" rtlCol="0" anchor="t">
-            <a:normAutofit/>
-          </a:bodyPr>
-          <a:lstStyle/>
-          <a:p>
-            <a:pPr marL="0" indent="0" algn="l">
-              <a:lnSpc>
-                <a:spcPts val="2040"/>
-              </a:lnSpc>
-              <a:buNone/>
-            </a:pPr>
-            <a:r>
-              <a:rPr lang="en-US" sz="1700" b="1" dirty="0">
-                <a:solidFill>
-                  <a:srgbClr val="16202F"/>
-                </a:solidFill>
-                <a:latin typeface="IBM Plex Sans" pitchFamily="34" charset="0"/>
-                <a:ea typeface="IBM Plex Sans" pitchFamily="34" charset="-122"/>
-                <a:cs typeface="IBM Plex Sans" pitchFamily="34" charset="-120"/>
-              </a:rPr>
-              <a:t>Información adicional</a:t>
-            </a:r>
-            <a:endParaRPr lang="en-US" sz="1700" dirty="0"/>
-          </a:p>
-        </p:txBody>
-      </p:sp>
-      <p:sp>
-        <p:nvSpPr>
-          <p:cNvPr id="30" name="Text 28"/>
-          <p:cNvSpPr/>
-          <p:nvPr/>
-        </p:nvSpPr>
-        <p:spPr>
-          <a:xfrm>
-            <a:off x="6356350" y="3996482"/>
-            <a:ext cx="2223770" cy="238720"/>
-          </a:xfrm>
-          <a:prstGeom prst="rect">
-            <a:avLst/>
-          </a:prstGeom>
-          <a:noFill/>
-          <a:ln/>
-        </p:spPr>
-        <p:txBody>
-          <a:bodyPr wrap="square" lIns="0" tIns="0" rIns="0" bIns="0" rtlCol="0" anchor="t">
-            <a:normAutofit/>
-          </a:bodyPr>
-          <a:lstStyle/>
-          <a:p>
-            <a:pPr marL="0" indent="0" algn="l">
-              <a:lnSpc>
-                <a:spcPts val="1680"/>
-              </a:lnSpc>
-              <a:buNone/>
-            </a:pPr>
-            <a:r>
-              <a:rPr lang="en-US" sz="1200" dirty="0">
-                <a:solidFill>
-                  <a:srgbClr val="566274"/>
-                </a:solidFill>
-                <a:latin typeface="IBM Plex Sans" pitchFamily="34" charset="0"/>
-                <a:ea typeface="IBM Plex Sans" pitchFamily="34" charset="-122"/>
-                <a:cs typeface="IBM Plex Sans" pitchFamily="34" charset="-120"/>
-              </a:rPr>
-              <a:t>Ética, ley y límites</a:t>
-            </a:r>
-            <a:endParaRPr lang="en-US" sz="1200" dirty="0"/>
-          </a:p>
-        </p:txBody>
-      </p:sp>
-      <p:sp>
-        <p:nvSpPr>
-          <p:cNvPr id="31" name="Shape 29"/>
-          <p:cNvSpPr/>
-          <p:nvPr/>
-        </p:nvSpPr>
-        <p:spPr>
-          <a:xfrm>
-            <a:off x="8851900" y="2953891"/>
-            <a:ext cx="2527300" cy="1440061"/>
-          </a:xfrm>
-          <a:prstGeom prst="roundRect">
-            <a:avLst>
-              <a:gd name="adj" fmla="val 7055"/>
-            </a:avLst>
-          </a:prstGeom>
-          <a:solidFill>
-            <a:srgbClr val="16202F"/>
-          </a:solidFill>
-          <a:ln/>
-        </p:spPr>
-        <p:txBody>
-          <a:bodyPr/>
-          <a:lstStyle/>
-          <a:p>
-            <a:endParaRPr lang="es-ES_tradnl"/>
-          </a:p>
-        </p:txBody>
-      </p:sp>
-      <p:sp>
-        <p:nvSpPr>
-          <p:cNvPr id="32" name="Text 30"/>
-          <p:cNvSpPr/>
-          <p:nvPr/>
-        </p:nvSpPr>
-        <p:spPr>
-          <a:xfrm>
-            <a:off x="9029700" y="3131691"/>
-            <a:ext cx="2236851" cy="238720"/>
-          </a:xfrm>
-          <a:prstGeom prst="rect">
-            <a:avLst/>
-          </a:prstGeom>
-          <a:noFill/>
-          <a:ln/>
-        </p:spPr>
-        <p:txBody>
-          <a:bodyPr wrap="square" lIns="0" tIns="0" rIns="0" bIns="0" rtlCol="0" anchor="t">
-            <a:normAutofit/>
-          </a:bodyPr>
-          <a:lstStyle/>
-          <a:p>
-            <a:pPr marL="0" indent="0" algn="l">
-              <a:lnSpc>
-                <a:spcPts val="1680"/>
-              </a:lnSpc>
-              <a:buNone/>
-            </a:pPr>
-            <a:r>
-              <a:rPr lang="en-US" sz="1200" dirty="0">
-                <a:solidFill>
-                  <a:srgbClr val="F0654D"/>
-                </a:solidFill>
-                <a:latin typeface="JetBrains Mono" pitchFamily="49" charset="0"/>
-                <a:ea typeface="JetBrains Mono" pitchFamily="49" charset="-122"/>
-                <a:cs typeface="JetBrains Mono" pitchFamily="49" charset="-120"/>
-              </a:rPr>
-              <a:t>REGLA</a:t>
-            </a:r>
-            <a:endParaRPr lang="en-US" sz="1200" dirty="0"/>
-          </a:p>
-        </p:txBody>
-      </p:sp>
-      <p:sp>
-        <p:nvSpPr>
-          <p:cNvPr id="33" name="Text 31"/>
-          <p:cNvSpPr/>
-          <p:nvPr/>
-        </p:nvSpPr>
-        <p:spPr>
-          <a:xfrm>
-            <a:off x="9029700" y="3408511"/>
-            <a:ext cx="2236851" cy="284460"/>
-          </a:xfrm>
-          <a:prstGeom prst="rect">
-            <a:avLst/>
-          </a:prstGeom>
-          <a:noFill/>
-          <a:ln/>
-        </p:spPr>
-        <p:txBody>
-          <a:bodyPr wrap="square" lIns="0" tIns="0" rIns="0" bIns="0" rtlCol="0" anchor="t">
-            <a:normAutofit/>
-          </a:bodyPr>
-          <a:lstStyle/>
-          <a:p>
-            <a:pPr marL="0" indent="0" algn="l">
-              <a:lnSpc>
-                <a:spcPts val="2040"/>
-              </a:lnSpc>
-              <a:buNone/>
-            </a:pPr>
-            <a:r>
-              <a:rPr lang="en-US" sz="1700" b="1" dirty="0">
-                <a:solidFill>
-                  <a:srgbClr val="F4F1EA"/>
-                </a:solidFill>
-                <a:latin typeface="IBM Plex Sans" pitchFamily="34" charset="0"/>
-                <a:ea typeface="IBM Plex Sans" pitchFamily="34" charset="-122"/>
-                <a:cs typeface="IBM Plex Sans" pitchFamily="34" charset="-120"/>
-              </a:rPr>
-              <a:t>Solo consulta pasiva</a:t>
-            </a:r>
-            <a:endParaRPr lang="en-US" sz="1700" dirty="0"/>
-          </a:p>
-        </p:txBody>
-      </p:sp>
-      <p:sp>
-        <p:nvSpPr>
-          <p:cNvPr id="34" name="Text 32"/>
-          <p:cNvSpPr/>
-          <p:nvPr/>
-        </p:nvSpPr>
-        <p:spPr>
-          <a:xfrm>
-            <a:off x="9029700" y="3731071"/>
-            <a:ext cx="2236851" cy="238720"/>
-          </a:xfrm>
-          <a:prstGeom prst="rect">
-            <a:avLst/>
-          </a:prstGeom>
-          <a:noFill/>
-          <a:ln/>
-        </p:spPr>
-        <p:txBody>
-          <a:bodyPr wrap="square" lIns="0" tIns="0" rIns="0" bIns="0" rtlCol="0" anchor="t">
-            <a:normAutofit/>
-          </a:bodyPr>
-          <a:lstStyle/>
-          <a:p>
-            <a:pPr marL="0" indent="0" algn="l">
-              <a:lnSpc>
-                <a:spcPts val="1680"/>
-              </a:lnSpc>
-              <a:buNone/>
-            </a:pPr>
-            <a:r>
-              <a:rPr lang="en-US" sz="1200" dirty="0">
-                <a:solidFill>
-                  <a:srgbClr val="C9D6E8"/>
-                </a:solidFill>
-                <a:latin typeface="IBM Plex Sans" pitchFamily="34" charset="0"/>
-                <a:ea typeface="IBM Plex Sans" pitchFamily="34" charset="-122"/>
-                <a:cs typeface="IBM Plex Sans" pitchFamily="34" charset="-120"/>
-              </a:rPr>
-              <a:t>Cero conexiones a dispositivos</a:t>
-            </a:r>
-            <a:endParaRPr lang="en-US" sz="1200" dirty="0"/>
-          </a:p>
-        </p:txBody>
-      </p:sp>
-      <p:sp>
-        <p:nvSpPr>
-          <p:cNvPr id="35" name="Text 33"/>
-          <p:cNvSpPr/>
-          <p:nvPr/>
-        </p:nvSpPr>
-        <p:spPr>
-          <a:xfrm>
-            <a:off x="812800" y="6238280"/>
-            <a:ext cx="1755636" cy="238720"/>
-          </a:xfrm>
-          <a:prstGeom prst="rect">
-            <a:avLst/>
-          </a:prstGeom>
-          <a:noFill/>
-          <a:ln/>
-        </p:spPr>
-        <p:txBody>
-          <a:bodyPr wrap="square" lIns="0" tIns="0" rIns="0" bIns="0" rtlCol="0" anchor="t">
-            <a:normAutofit/>
-          </a:bodyPr>
-          <a:lstStyle/>
-          <a:p>
-            <a:pPr marL="0" indent="0" algn="l">
-              <a:lnSpc>
-                <a:spcPts val="1680"/>
-              </a:lnSpc>
-              <a:buNone/>
-            </a:pPr>
-            <a:r>
-              <a:rPr lang="en-US" sz="1200" dirty="0">
-                <a:solidFill>
-                  <a:srgbClr val="566274"/>
-                </a:solidFill>
-                <a:latin typeface="JetBrains Mono" pitchFamily="49" charset="0"/>
-                <a:ea typeface="JetBrains Mono" pitchFamily="49" charset="-122"/>
-                <a:cs typeface="JetBrains Mono" pitchFamily="49" charset="-120"/>
-              </a:rPr>
-              <a:t>IF-6000 · SHODAN</a:t>
-            </a:r>
-            <a:endParaRPr lang="en-US" sz="1200" dirty="0"/>
-          </a:p>
-        </p:txBody>
-      </p:sp>
-    </p:spTree>
-  </p:cSld>
-  <p:clrMapOvr>
-    <a:masterClrMapping/>
-  </p:clrMapOvr>
-</p:sld>
-</file>
-
-<file path=ppt/slides/slide3.xml><?xml version="1.0" encoding="utf-8"?>
-<p:sld xmlns:a="http://schemas.openxmlformats.org/drawingml/2006/main" xmlns:r="http://schemas.openxmlformats.org/officeDocument/2006/relationships" xmlns:p="http://schemas.openxmlformats.org/presentationml/2006/main">
   <p:cSld name="Slide 3">
     <p:bg>
       <p:bgPr>
@@ -9781,7 +6288,7 @@
 </p:sld>
 </file>
 
-<file path=ppt/slides/slide4.xml><?xml version="1.0" encoding="utf-8"?>
+<file path=ppt/slides/slide3.xml><?xml version="1.0" encoding="utf-8"?>
 <p:sld xmlns:a="http://schemas.openxmlformats.org/drawingml/2006/main" xmlns:r="http://schemas.openxmlformats.org/officeDocument/2006/relationships" xmlns:p="http://schemas.openxmlformats.org/presentationml/2006/main">
   <p:cSld name="Slide 4">
     <p:bg>
@@ -10355,7 +6862,7 @@
 </p:sld>
 </file>
 
-<file path=ppt/slides/slide5.xml><?xml version="1.0" encoding="utf-8"?>
+<file path=ppt/slides/slide4.xml><?xml version="1.0" encoding="utf-8"?>
 <p:sld xmlns:a="http://schemas.openxmlformats.org/drawingml/2006/main" xmlns:r="http://schemas.openxmlformats.org/officeDocument/2006/relationships" xmlns:p="http://schemas.openxmlformats.org/presentationml/2006/main">
   <p:cSld name="Slide 5">
     <p:bg>
@@ -11188,7 +7695,7 @@
 </p:sld>
 </file>
 
-<file path=ppt/slides/slide6.xml><?xml version="1.0" encoding="utf-8"?>
+<file path=ppt/slides/slide5.xml><?xml version="1.0" encoding="utf-8"?>
 <p:sld xmlns:a="http://schemas.openxmlformats.org/drawingml/2006/main" xmlns:r="http://schemas.openxmlformats.org/officeDocument/2006/relationships" xmlns:p="http://schemas.openxmlformats.org/presentationml/2006/main">
   <p:cSld name="Slide 6">
     <p:bg>
@@ -11704,530 +8211,7 @@
 </p:sld>
 </file>
 
-<file path=ppt/slides/slide7.xml><?xml version="1.0" encoding="utf-8"?>
-<p:sld xmlns:a="http://schemas.openxmlformats.org/drawingml/2006/main" xmlns:r="http://schemas.openxmlformats.org/officeDocument/2006/relationships" xmlns:p="http://schemas.openxmlformats.org/presentationml/2006/main">
-  <p:cSld name="Slide 7">
-    <p:bg>
-      <p:bgPr>
-        <a:solidFill>
-          <a:srgbClr val="C8432E"/>
-        </a:solidFill>
-        <a:effectLst/>
-      </p:bgPr>
-    </p:bg>
-    <p:spTree>
-      <p:nvGrpSpPr>
-        <p:cNvPr id="1" name=""/>
-        <p:cNvGrpSpPr/>
-        <p:nvPr/>
-      </p:nvGrpSpPr>
-      <p:grpSpPr>
-        <a:xfrm>
-          <a:off x="0" y="0"/>
-          <a:ext cx="0" cy="0"/>
-          <a:chOff x="0" y="0"/>
-          <a:chExt cx="0" cy="0"/>
-        </a:xfrm>
-      </p:grpSpPr>
-      <p:sp>
-        <p:nvSpPr>
-          <p:cNvPr id="2" name="Text 0"/>
-          <p:cNvSpPr/>
-          <p:nvPr/>
-        </p:nvSpPr>
-        <p:spPr>
-          <a:xfrm>
-            <a:off x="812800" y="812800"/>
-            <a:ext cx="10883392" cy="238720"/>
-          </a:xfrm>
-          <a:prstGeom prst="rect">
-            <a:avLst/>
-          </a:prstGeom>
-          <a:noFill/>
-          <a:ln/>
-        </p:spPr>
-        <p:txBody>
-          <a:bodyPr wrap="square" lIns="0" tIns="0" rIns="0" bIns="0" rtlCol="0" anchor="t">
-            <a:normAutofit/>
-          </a:bodyPr>
-          <a:lstStyle/>
-          <a:p>
-            <a:pPr marL="0" indent="0" algn="l">
-              <a:lnSpc>
-                <a:spcPts val="1680"/>
-              </a:lnSpc>
-              <a:buNone/>
-            </a:pPr>
-            <a:r>
-              <a:rPr lang="en-US" sz="1200" dirty="0">
-                <a:solidFill>
-                  <a:srgbClr val="FBF3EE"/>
-                </a:solidFill>
-                <a:latin typeface="JetBrains Mono" pitchFamily="49" charset="0"/>
-                <a:ea typeface="JetBrains Mono" pitchFamily="49" charset="-122"/>
-                <a:cs typeface="JetBrains Mono" pitchFamily="49" charset="-120"/>
-              </a:rPr>
-              <a:t>05 · EJEMPLOS PRÁCTICOS</a:t>
-            </a:r>
-            <a:endParaRPr lang="en-US" sz="1200" dirty="0"/>
-          </a:p>
-        </p:txBody>
-      </p:sp>
-      <p:sp>
-        <p:nvSpPr>
-          <p:cNvPr id="3" name="Text 1"/>
-          <p:cNvSpPr>
-            <a:spLocks noGrp="1"/>
-          </p:cNvSpPr>
-          <p:nvPr>
-            <p:ph type="title"/>
-          </p:nvPr>
-        </p:nvSpPr>
-        <p:spPr>
-          <a:xfrm>
-            <a:off x="812800" y="1330920"/>
-            <a:ext cx="10883392" cy="1305520"/>
-          </a:xfrm>
-          <a:prstGeom prst="rect">
-            <a:avLst/>
-          </a:prstGeom>
-          <a:noFill/>
-          <a:ln/>
-        </p:spPr>
-        <p:txBody>
-          <a:bodyPr wrap="square" lIns="0" tIns="0" rIns="0" bIns="0" rtlCol="0" anchor="t">
-            <a:normAutofit/>
-          </a:bodyPr>
-          <a:lstStyle/>
-          <a:p>
-            <a:pPr marL="0" indent="0" algn="l">
-              <a:lnSpc>
-                <a:spcPts val="5040"/>
-              </a:lnSpc>
-              <a:buNone/>
-            </a:pPr>
-            <a:r>
-              <a:rPr lang="en-US" sz="4800" b="1" i="0" dirty="0">
-                <a:solidFill>
-                  <a:srgbClr val="FBF3EE"/>
-                </a:solidFill>
-                <a:latin typeface="IBM Plex Sans" pitchFamily="34" charset="0"/>
-                <a:ea typeface="IBM Plex Sans" pitchFamily="34" charset="-122"/>
-                <a:cs typeface="IBM Plex Sans" pitchFamily="34" charset="-120"/>
-              </a:rPr>
-              <a:t>Lo que hicimos, y lo que solo investigamos</a:t>
-            </a:r>
-            <a:endParaRPr lang="en-US" sz="4800" dirty="0"/>
-          </a:p>
-        </p:txBody>
-      </p:sp>
-      <p:sp>
-        <p:nvSpPr>
-          <p:cNvPr id="4" name="Shape 2"/>
-          <p:cNvSpPr/>
-          <p:nvPr/>
-        </p:nvSpPr>
-        <p:spPr>
-          <a:xfrm>
-            <a:off x="812800" y="2915841"/>
-            <a:ext cx="5181600" cy="2187575"/>
-          </a:xfrm>
-          <a:prstGeom prst="roundRect">
-            <a:avLst>
-              <a:gd name="adj" fmla="val 4644"/>
-            </a:avLst>
-          </a:prstGeom>
-          <a:solidFill>
-            <a:srgbClr val="FBF3EE"/>
-          </a:solidFill>
-          <a:ln/>
-        </p:spPr>
-        <p:txBody>
-          <a:bodyPr/>
-          <a:lstStyle/>
-          <a:p>
-            <a:endParaRPr lang="es-ES_tradnl"/>
-          </a:p>
-        </p:txBody>
-      </p:sp>
-      <p:sp>
-        <p:nvSpPr>
-          <p:cNvPr id="5" name="Text 3"/>
-          <p:cNvSpPr/>
-          <p:nvPr/>
-        </p:nvSpPr>
-        <p:spPr>
-          <a:xfrm>
-            <a:off x="1066800" y="3169841"/>
-            <a:ext cx="4813808" cy="330200"/>
-          </a:xfrm>
-          <a:prstGeom prst="rect">
-            <a:avLst/>
-          </a:prstGeom>
-          <a:noFill/>
-          <a:ln/>
-        </p:spPr>
-        <p:txBody>
-          <a:bodyPr wrap="square" lIns="0" tIns="0" rIns="0" bIns="0" rtlCol="0" anchor="t">
-            <a:normAutofit/>
-          </a:bodyPr>
-          <a:lstStyle/>
-          <a:p>
-            <a:pPr marL="0" indent="0" algn="l">
-              <a:lnSpc>
-                <a:spcPts val="2400"/>
-              </a:lnSpc>
-              <a:buNone/>
-            </a:pPr>
-            <a:r>
-              <a:rPr lang="en-US" sz="2000" b="1" dirty="0">
-                <a:solidFill>
-                  <a:srgbClr val="9E2F1D"/>
-                </a:solidFill>
-                <a:latin typeface="IBM Plex Sans" pitchFamily="34" charset="0"/>
-                <a:ea typeface="IBM Plex Sans" pitchFamily="34" charset="-122"/>
-                <a:cs typeface="IBM Plex Sans" pitchFamily="34" charset="-120"/>
-              </a:rPr>
-              <a:t>Practicado</a:t>
-            </a:r>
-            <a:endParaRPr lang="en-US" sz="2000" dirty="0"/>
-          </a:p>
-        </p:txBody>
-      </p:sp>
-      <p:sp>
-        <p:nvSpPr>
-          <p:cNvPr id="6" name="Text 4"/>
-          <p:cNvSpPr/>
-          <p:nvPr/>
-        </p:nvSpPr>
-        <p:spPr>
-          <a:xfrm>
-            <a:off x="1066800" y="3563541"/>
-            <a:ext cx="4813808" cy="1311275"/>
-          </a:xfrm>
-          <a:prstGeom prst="rect">
-            <a:avLst/>
-          </a:prstGeom>
-          <a:noFill/>
-          <a:ln/>
-        </p:spPr>
-        <p:txBody>
-          <a:bodyPr wrap="square" lIns="0" tIns="0" rIns="0" bIns="0" rtlCol="0" anchor="t">
-            <a:normAutofit/>
-          </a:bodyPr>
-          <a:lstStyle/>
-          <a:p>
-            <a:pPr marL="0" indent="0" algn="l">
-              <a:lnSpc>
-                <a:spcPts val="2025"/>
-              </a:lnSpc>
-              <a:buNone/>
-            </a:pPr>
-            <a:r>
-              <a:rPr lang="en-US" sz="1500" dirty="0">
-                <a:solidFill>
-                  <a:srgbClr val="16202F"/>
-                </a:solidFill>
-                <a:latin typeface="IBM Plex Sans" pitchFamily="34" charset="0"/>
-                <a:ea typeface="IBM Plex Sans" pitchFamily="34" charset="-122"/>
-                <a:cs typeface="IBM Plex Sans" pitchFamily="34" charset="-120"/>
-              </a:rPr>
-              <a:t>Cuenta académica y créditos</a:t>
-            </a:r>
-            <a:endParaRPr lang="en-US" sz="1500" dirty="0"/>
-          </a:p>
-          <a:p>
-            <a:pPr marL="0" indent="0" algn="l">
-              <a:lnSpc>
-                <a:spcPts val="2025"/>
-              </a:lnSpc>
-              <a:buNone/>
-            </a:pPr>
-            <a:r>
-              <a:rPr lang="en-US" sz="1500" dirty="0">
-                <a:solidFill>
-                  <a:srgbClr val="16202F"/>
-                </a:solidFill>
-                <a:latin typeface="IBM Plex Sans" pitchFamily="34" charset="0"/>
-                <a:ea typeface="IBM Plex Sans" pitchFamily="34" charset="-122"/>
-                <a:cs typeface="IBM Plex Sans" pitchFamily="34" charset="-120"/>
-              </a:rPr>
-              <a:t>Interfaz web con filtros</a:t>
-            </a:r>
-            <a:endParaRPr lang="en-US" sz="1500" dirty="0"/>
-          </a:p>
-          <a:p>
-            <a:pPr marL="0" indent="0" algn="l">
-              <a:lnSpc>
-                <a:spcPts val="2025"/>
-              </a:lnSpc>
-              <a:buNone/>
-            </a:pPr>
-            <a:r>
-              <a:rPr lang="en-US" sz="1500" dirty="0">
-                <a:solidFill>
-                  <a:srgbClr val="16202F"/>
-                </a:solidFill>
-                <a:latin typeface="IBM Plex Sans" pitchFamily="34" charset="0"/>
-                <a:ea typeface="IBM Plex Sans" pitchFamily="34" charset="-122"/>
-                <a:cs typeface="IBM Plex Sans" pitchFamily="34" charset="-120"/>
-              </a:rPr>
-              <a:t>CLI: info, count, stats</a:t>
-            </a:r>
-            <a:endParaRPr lang="en-US" sz="1500" dirty="0"/>
-          </a:p>
-          <a:p>
-            <a:pPr marL="0" indent="0" algn="l">
-              <a:lnSpc>
-                <a:spcPts val="2025"/>
-              </a:lnSpc>
-              <a:buNone/>
-            </a:pPr>
-            <a:r>
-              <a:rPr lang="en-US" sz="1500" dirty="0">
-                <a:solidFill>
-                  <a:srgbClr val="16202F"/>
-                </a:solidFill>
-                <a:latin typeface="IBM Plex Sans" pitchFamily="34" charset="0"/>
-                <a:ea typeface="IBM Plex Sans" pitchFamily="34" charset="-122"/>
-                <a:cs typeface="IBM Plex Sans" pitchFamily="34" charset="-120"/>
-              </a:rPr>
-              <a:t>Script en Python con la API</a:t>
-            </a:r>
-            <a:endParaRPr lang="en-US" sz="1500" dirty="0"/>
-          </a:p>
-          <a:p>
-            <a:pPr marL="0" indent="0" algn="l">
-              <a:lnSpc>
-                <a:spcPts val="2025"/>
-              </a:lnSpc>
-              <a:buNone/>
-            </a:pPr>
-            <a:r>
-              <a:rPr lang="en-US" sz="1500" dirty="0">
-                <a:solidFill>
-                  <a:srgbClr val="16202F"/>
-                </a:solidFill>
-                <a:latin typeface="IBM Plex Sans" pitchFamily="34" charset="0"/>
-                <a:ea typeface="IBM Plex Sans" pitchFamily="34" charset="-122"/>
-                <a:cs typeface="IBM Plex Sans" pitchFamily="34" charset="-120"/>
-              </a:rPr>
-              <a:t>GreyNoise Visualizer</a:t>
-            </a:r>
-            <a:endParaRPr lang="en-US" sz="1500" dirty="0"/>
-          </a:p>
-        </p:txBody>
-      </p:sp>
-      <p:sp>
-        <p:nvSpPr>
-          <p:cNvPr id="7" name="Shape 5"/>
-          <p:cNvSpPr/>
-          <p:nvPr/>
-        </p:nvSpPr>
-        <p:spPr>
-          <a:xfrm>
-            <a:off x="6197600" y="2915841"/>
-            <a:ext cx="5181600" cy="2187575"/>
-          </a:xfrm>
-          <a:prstGeom prst="roundRect">
-            <a:avLst>
-              <a:gd name="adj" fmla="val 4644"/>
-            </a:avLst>
-          </a:prstGeom>
-          <a:solidFill>
-            <a:srgbClr val="7E2416"/>
-          </a:solidFill>
-          <a:ln/>
-        </p:spPr>
-        <p:txBody>
-          <a:bodyPr/>
-          <a:lstStyle/>
-          <a:p>
-            <a:endParaRPr lang="es-ES_tradnl"/>
-          </a:p>
-        </p:txBody>
-      </p:sp>
-      <p:sp>
-        <p:nvSpPr>
-          <p:cNvPr id="8" name="Text 6"/>
-          <p:cNvSpPr/>
-          <p:nvPr/>
-        </p:nvSpPr>
-        <p:spPr>
-          <a:xfrm>
-            <a:off x="6451600" y="3169841"/>
-            <a:ext cx="4813808" cy="330200"/>
-          </a:xfrm>
-          <a:prstGeom prst="rect">
-            <a:avLst/>
-          </a:prstGeom>
-          <a:noFill/>
-          <a:ln/>
-        </p:spPr>
-        <p:txBody>
-          <a:bodyPr wrap="square" lIns="0" tIns="0" rIns="0" bIns="0" rtlCol="0" anchor="t">
-            <a:normAutofit/>
-          </a:bodyPr>
-          <a:lstStyle/>
-          <a:p>
-            <a:pPr marL="0" indent="0" algn="l">
-              <a:lnSpc>
-                <a:spcPts val="2400"/>
-              </a:lnSpc>
-              <a:buNone/>
-            </a:pPr>
-            <a:r>
-              <a:rPr lang="en-US" sz="2000" b="1" dirty="0">
-                <a:solidFill>
-                  <a:srgbClr val="FBF3EE"/>
-                </a:solidFill>
-                <a:latin typeface="IBM Plex Sans" pitchFamily="34" charset="0"/>
-                <a:ea typeface="IBM Plex Sans" pitchFamily="34" charset="-122"/>
-                <a:cs typeface="IBM Plex Sans" pitchFamily="34" charset="-120"/>
-              </a:rPr>
-              <a:t>Solo investigado</a:t>
-            </a:r>
-            <a:endParaRPr lang="en-US" sz="2000" dirty="0"/>
-          </a:p>
-        </p:txBody>
-      </p:sp>
-      <p:sp>
-        <p:nvSpPr>
-          <p:cNvPr id="9" name="Text 7"/>
-          <p:cNvSpPr/>
-          <p:nvPr/>
-        </p:nvSpPr>
-        <p:spPr>
-          <a:xfrm>
-            <a:off x="6451600" y="3563541"/>
-            <a:ext cx="4813808" cy="796925"/>
-          </a:xfrm>
-          <a:prstGeom prst="rect">
-            <a:avLst/>
-          </a:prstGeom>
-          <a:noFill/>
-          <a:ln/>
-        </p:spPr>
-        <p:txBody>
-          <a:bodyPr wrap="square" lIns="0" tIns="0" rIns="0" bIns="0" rtlCol="0" anchor="t">
-            <a:normAutofit/>
-          </a:bodyPr>
-          <a:lstStyle/>
-          <a:p>
-            <a:pPr marL="0" indent="0" algn="l">
-              <a:lnSpc>
-                <a:spcPts val="2025"/>
-              </a:lnSpc>
-              <a:buNone/>
-            </a:pPr>
-            <a:r>
-              <a:rPr lang="en-US" sz="1500" dirty="0">
-                <a:solidFill>
-                  <a:srgbClr val="FBF3EE"/>
-                </a:solidFill>
-                <a:latin typeface="IBM Plex Sans" pitchFamily="34" charset="0"/>
-                <a:ea typeface="IBM Plex Sans" pitchFamily="34" charset="-122"/>
-                <a:cs typeface="IBM Plex Sans" pitchFamily="34" charset="-120"/>
-              </a:rPr>
-              <a:t>Censys, ZoomEye y FOFA</a:t>
-            </a:r>
-            <a:endParaRPr lang="en-US" sz="1500" dirty="0"/>
-          </a:p>
-          <a:p>
-            <a:pPr marL="0" indent="0" algn="l">
-              <a:lnSpc>
-                <a:spcPts val="2025"/>
-              </a:lnSpc>
-              <a:buNone/>
-            </a:pPr>
-            <a:r>
-              <a:rPr lang="en-US" sz="1500" dirty="0">
-                <a:solidFill>
-                  <a:srgbClr val="FBF3EE"/>
-                </a:solidFill>
-                <a:latin typeface="IBM Plex Sans" pitchFamily="34" charset="0"/>
-                <a:ea typeface="IBM Plex Sans" pitchFamily="34" charset="-122"/>
-                <a:cs typeface="IBM Plex Sans" pitchFamily="34" charset="-120"/>
-              </a:rPr>
-              <a:t>Escaneos bajo demanda</a:t>
-            </a:r>
-            <a:endParaRPr lang="en-US" sz="1500" dirty="0"/>
-          </a:p>
-          <a:p>
-            <a:pPr marL="0" indent="0" algn="l">
-              <a:lnSpc>
-                <a:spcPts val="2025"/>
-              </a:lnSpc>
-              <a:buNone/>
-            </a:pPr>
-            <a:r>
-              <a:rPr lang="en-US" sz="1500" dirty="0">
-                <a:solidFill>
-                  <a:srgbClr val="FBF3EE"/>
-                </a:solidFill>
-                <a:latin typeface="IBM Plex Sans" pitchFamily="34" charset="0"/>
-                <a:ea typeface="IBM Plex Sans" pitchFamily="34" charset="-122"/>
-                <a:cs typeface="IBM Plex Sans" pitchFamily="34" charset="-120"/>
-              </a:rPr>
-              <a:t>Shodan Monitor</a:t>
-            </a:r>
-            <a:endParaRPr lang="en-US" sz="1500" dirty="0"/>
-          </a:p>
-        </p:txBody>
-      </p:sp>
-      <p:sp>
-        <p:nvSpPr>
-          <p:cNvPr id="10" name="Text 8"/>
-          <p:cNvSpPr/>
-          <p:nvPr/>
-        </p:nvSpPr>
-        <p:spPr>
-          <a:xfrm>
-            <a:off x="812800" y="6238280"/>
-            <a:ext cx="5157192" cy="238720"/>
-          </a:xfrm>
-          <a:prstGeom prst="rect">
-            <a:avLst/>
-          </a:prstGeom>
-          <a:noFill/>
-          <a:ln/>
-        </p:spPr>
-        <p:txBody>
-          <a:bodyPr wrap="square" lIns="0" tIns="0" rIns="0" bIns="0" rtlCol="0" anchor="t">
-            <a:normAutofit/>
-          </a:bodyPr>
-          <a:lstStyle/>
-          <a:p>
-            <a:pPr marL="0" indent="0" algn="l">
-              <a:lnSpc>
-                <a:spcPts val="1680"/>
-              </a:lnSpc>
-              <a:buNone/>
-            </a:pPr>
-            <a:r>
-              <a:rPr lang="en-US" sz="1200" dirty="0">
-                <a:solidFill>
-                  <a:srgbClr val="FBF3EE"/>
-                </a:solidFill>
-                <a:latin typeface="JetBrains Mono" pitchFamily="49" charset="0"/>
-                <a:ea typeface="JetBrains Mono" pitchFamily="49" charset="-122"/>
-                <a:cs typeface="JetBrains Mono" pitchFamily="49" charset="-120"/>
-              </a:rPr>
-              <a:t>Todo el 27 de octubre de 2026 · consulta pasiva</a:t>
-            </a:r>
-            <a:endParaRPr lang="en-US" sz="1200" dirty="0"/>
-          </a:p>
-        </p:txBody>
-      </p:sp>
-    </p:spTree>
-  </p:cSld>
-  <p:clrMapOvr>
-    <a:masterClrMapping/>
-  </p:clrMapOvr>
-</p:sld>
-</file>
-
-<file path=ppt/slides/slide8.xml><?xml version="1.0" encoding="utf-8"?>
+<file path=ppt/slides/slide6.xml><?xml version="1.0" encoding="utf-8"?>
 <p:sld xmlns:a="http://schemas.openxmlformats.org/drawingml/2006/main" xmlns:r="http://schemas.openxmlformats.org/officeDocument/2006/relationships" xmlns:p="http://schemas.openxmlformats.org/presentationml/2006/main">
   <p:cSld name="Slide 8">
     <p:bg>
@@ -12848,7 +8832,7 @@
 </p:sld>
 </file>
 
-<file path=ppt/slides/slide9.xml><?xml version="1.0" encoding="utf-8"?>
+<file path=ppt/slides/slide7.xml><?xml version="1.0" encoding="utf-8"?>
 <p:sld xmlns:a="http://schemas.openxmlformats.org/drawingml/2006/main" xmlns:r="http://schemas.openxmlformats.org/officeDocument/2006/relationships" xmlns:p="http://schemas.openxmlformats.org/presentationml/2006/main">
   <p:cSld name="Slide 9">
     <p:bg>
@@ -13377,6 +9361,1208 @@
                 <a:cs typeface="JetBrains Mono" pitchFamily="49" charset="-120"/>
               </a:rPr>
               <a:t>Capturas propias, 27 oct 2026 · en Windows: python -m shodan</a:t>
+            </a:r>
+            <a:endParaRPr lang="en-US" sz="1200" dirty="0"/>
+          </a:p>
+        </p:txBody>
+      </p:sp>
+    </p:spTree>
+  </p:cSld>
+  <p:clrMapOvr>
+    <a:masterClrMapping/>
+  </p:clrMapOvr>
+</p:sld>
+</file>
+
+<file path=ppt/slides/slide8.xml><?xml version="1.0" encoding="utf-8"?>
+<p:sld xmlns:a="http://schemas.openxmlformats.org/drawingml/2006/main" xmlns:r="http://schemas.openxmlformats.org/officeDocument/2006/relationships" xmlns:p="http://schemas.openxmlformats.org/presentationml/2006/main">
+  <p:cSld name="Slide 10">
+    <p:bg>
+      <p:bgPr>
+        <a:solidFill>
+          <a:srgbClr val="F4F1EA"/>
+        </a:solidFill>
+        <a:effectLst/>
+      </p:bgPr>
+    </p:bg>
+    <p:spTree>
+      <p:nvGrpSpPr>
+        <p:cNvPr id="1" name=""/>
+        <p:cNvGrpSpPr/>
+        <p:nvPr/>
+      </p:nvGrpSpPr>
+      <p:grpSpPr>
+        <a:xfrm>
+          <a:off x="0" y="0"/>
+          <a:ext cx="0" cy="0"/>
+          <a:chOff x="0" y="0"/>
+          <a:chExt cx="0" cy="0"/>
+        </a:xfrm>
+      </p:grpSpPr>
+      <p:sp>
+        <p:nvSpPr>
+          <p:cNvPr id="2" name="Text 0"/>
+          <p:cNvSpPr/>
+          <p:nvPr/>
+        </p:nvSpPr>
+        <p:spPr>
+          <a:xfrm>
+            <a:off x="812800" y="812800"/>
+            <a:ext cx="10883392" cy="238720"/>
+          </a:xfrm>
+          <a:prstGeom prst="rect">
+            <a:avLst/>
+          </a:prstGeom>
+          <a:noFill/>
+          <a:ln/>
+        </p:spPr>
+        <p:txBody>
+          <a:bodyPr wrap="square" lIns="0" tIns="0" rIns="0" bIns="0" rtlCol="0" anchor="t">
+            <a:normAutofit/>
+          </a:bodyPr>
+          <a:lstStyle/>
+          <a:p>
+            <a:pPr marL="0" indent="0" algn="l">
+              <a:lnSpc>
+                <a:spcPts val="1680"/>
+              </a:lnSpc>
+              <a:buNone/>
+            </a:pPr>
+            <a:r>
+              <a:rPr lang="en-US" sz="1200" dirty="0">
+                <a:solidFill>
+                  <a:srgbClr val="C8432E"/>
+                </a:solidFill>
+                <a:latin typeface="JetBrains Mono" pitchFamily="49" charset="0"/>
+                <a:ea typeface="JetBrains Mono" pitchFamily="49" charset="-122"/>
+                <a:cs typeface="JetBrains Mono" pitchFamily="49" charset="-120"/>
+              </a:rPr>
+              <a:t>PRÁCTICA 3 · INTERFAZ WEB Y FILTROS</a:t>
+            </a:r>
+            <a:endParaRPr lang="en-US" sz="1200" dirty="0"/>
+          </a:p>
+        </p:txBody>
+      </p:sp>
+      <p:sp>
+        <p:nvSpPr>
+          <p:cNvPr id="3" name="Text 1"/>
+          <p:cNvSpPr>
+            <a:spLocks noGrp="1"/>
+          </p:cNvSpPr>
+          <p:nvPr>
+            <p:ph type="title"/>
+          </p:nvPr>
+        </p:nvSpPr>
+        <p:spPr>
+          <a:xfrm>
+            <a:off x="812800" y="1254720"/>
+            <a:ext cx="10883392" cy="472430"/>
+          </a:xfrm>
+          <a:prstGeom prst="rect">
+            <a:avLst/>
+          </a:prstGeom>
+          <a:noFill/>
+          <a:ln/>
+        </p:spPr>
+        <p:txBody>
+          <a:bodyPr wrap="square" lIns="0" tIns="0" rIns="0" bIns="0" rtlCol="0" anchor="t">
+            <a:normAutofit/>
+          </a:bodyPr>
+          <a:lstStyle/>
+          <a:p>
+            <a:pPr marL="0" indent="0" algn="l">
+              <a:lnSpc>
+                <a:spcPts val="3520"/>
+              </a:lnSpc>
+              <a:buNone/>
+            </a:pPr>
+            <a:r>
+              <a:rPr lang="en-US" sz="3200" b="1" i="0" dirty="0">
+                <a:solidFill>
+                  <a:srgbClr val="16202F"/>
+                </a:solidFill>
+                <a:latin typeface="IBM Plex Sans" pitchFamily="34" charset="0"/>
+                <a:ea typeface="IBM Plex Sans" pitchFamily="34" charset="-122"/>
+                <a:cs typeface="IBM Plex Sans" pitchFamily="34" charset="-120"/>
+              </a:rPr>
+              <a:t>Combinar filtros convierte una duda en un conteo</a:t>
+            </a:r>
+            <a:endParaRPr lang="en-US" sz="3200" dirty="0"/>
+          </a:p>
+        </p:txBody>
+      </p:sp>
+      <p:sp>
+        <p:nvSpPr>
+          <p:cNvPr id="4" name="Shape 2"/>
+          <p:cNvSpPr/>
+          <p:nvPr/>
+        </p:nvSpPr>
+        <p:spPr>
+          <a:xfrm>
+            <a:off x="812800" y="1930350"/>
+            <a:ext cx="5181600" cy="2457450"/>
+          </a:xfrm>
+          <a:prstGeom prst="roundRect">
+            <a:avLst>
+              <a:gd name="adj" fmla="val 2067"/>
+            </a:avLst>
+          </a:prstGeom>
+          <a:solidFill>
+            <a:srgbClr val="FFFFFF"/>
+          </a:solidFill>
+          <a:ln/>
+        </p:spPr>
+        <p:txBody>
+          <a:bodyPr/>
+          <a:lstStyle/>
+          <a:p>
+            <a:endParaRPr lang="es-ES_tradnl"/>
+          </a:p>
+        </p:txBody>
+      </p:sp>
+      <p:pic>
+        <p:nvPicPr>
+          <p:cNvPr id="5" name="Image 0" descr="Búsqueda country:CR en la interfaz web de Shodan, con datos de terceros difuminados"/>
+          <p:cNvPicPr>
+            <a:picLocks noChangeAspect="1"/>
+          </p:cNvPicPr>
+          <p:nvPr/>
+        </p:nvPicPr>
+        <p:blipFill>
+          <a:blip r:embed="rId3"/>
+          <a:srcRect l="-75" r="-75"/>
+          <a:stretch/>
+        </p:blipFill>
+        <p:spPr>
+          <a:xfrm>
+            <a:off x="819150" y="1936700"/>
+            <a:ext cx="5168900" cy="2444750"/>
+          </a:xfrm>
+          <a:prstGeom prst="roundRect">
+            <a:avLst>
+              <a:gd name="adj" fmla="val 1818"/>
+            </a:avLst>
+          </a:prstGeom>
+        </p:spPr>
+      </p:pic>
+      <p:sp>
+        <p:nvSpPr>
+          <p:cNvPr id="6" name="Shape 3"/>
+          <p:cNvSpPr/>
+          <p:nvPr/>
+        </p:nvSpPr>
+        <p:spPr>
+          <a:xfrm>
+            <a:off x="815975" y="1933525"/>
+            <a:ext cx="5175250" cy="2451100"/>
+          </a:xfrm>
+          <a:prstGeom prst="roundRect">
+            <a:avLst>
+              <a:gd name="adj" fmla="val 1943"/>
+            </a:avLst>
+          </a:prstGeom>
+          <a:noFill/>
+          <a:ln w="6350">
+            <a:solidFill>
+              <a:srgbClr val="DDD8CC"/>
+            </a:solidFill>
+            <a:prstDash val="solid"/>
+          </a:ln>
+        </p:spPr>
+        <p:txBody>
+          <a:bodyPr/>
+          <a:lstStyle/>
+          <a:p>
+            <a:endParaRPr lang="es-ES_tradnl"/>
+          </a:p>
+        </p:txBody>
+      </p:sp>
+      <p:sp>
+        <p:nvSpPr>
+          <p:cNvPr id="7" name="Text 4"/>
+          <p:cNvSpPr/>
+          <p:nvPr/>
+        </p:nvSpPr>
+        <p:spPr>
+          <a:xfrm>
+            <a:off x="812800" y="4489400"/>
+            <a:ext cx="5337048" cy="274290"/>
+          </a:xfrm>
+          <a:prstGeom prst="rect">
+            <a:avLst/>
+          </a:prstGeom>
+          <a:noFill/>
+          <a:ln/>
+        </p:spPr>
+        <p:txBody>
+          <a:bodyPr wrap="square" lIns="0" tIns="0" rIns="0" bIns="0" rtlCol="0" anchor="t">
+            <a:normAutofit/>
+          </a:bodyPr>
+          <a:lstStyle/>
+          <a:p>
+            <a:pPr marL="0" indent="0" algn="l">
+              <a:lnSpc>
+                <a:spcPts val="1960"/>
+              </a:lnSpc>
+              <a:buNone/>
+            </a:pPr>
+            <a:r>
+              <a:rPr lang="en-US" sz="1400" b="1" dirty="0">
+                <a:solidFill>
+                  <a:srgbClr val="16202F"/>
+                </a:solidFill>
+                <a:latin typeface="JetBrains Mono" pitchFamily="49" charset="0"/>
+                <a:ea typeface="JetBrains Mono" pitchFamily="49" charset="-122"/>
+                <a:cs typeface="JetBrains Mono" pitchFamily="49" charset="-120"/>
+              </a:rPr>
+              <a:t>country:CR</a:t>
+            </a:r>
+            <a:endParaRPr lang="en-US" sz="1400" dirty="0"/>
+          </a:p>
+        </p:txBody>
+      </p:sp>
+      <p:sp>
+        <p:nvSpPr>
+          <p:cNvPr id="8" name="Text 5"/>
+          <p:cNvSpPr/>
+          <p:nvPr/>
+        </p:nvSpPr>
+        <p:spPr>
+          <a:xfrm>
+            <a:off x="812800" y="4839891"/>
+            <a:ext cx="5337048" cy="309860"/>
+          </a:xfrm>
+          <a:prstGeom prst="rect">
+            <a:avLst/>
+          </a:prstGeom>
+          <a:noFill/>
+          <a:ln/>
+        </p:spPr>
+        <p:txBody>
+          <a:bodyPr wrap="square" lIns="0" tIns="0" rIns="0" bIns="0" rtlCol="0" anchor="t">
+            <a:normAutofit/>
+          </a:bodyPr>
+          <a:lstStyle/>
+          <a:p>
+            <a:pPr marL="0" indent="0" algn="l">
+              <a:lnSpc>
+                <a:spcPts val="2240"/>
+              </a:lnSpc>
+              <a:buNone/>
+            </a:pPr>
+            <a:r>
+              <a:rPr lang="en-US" sz="1600" dirty="0">
+                <a:solidFill>
+                  <a:srgbClr val="16202F"/>
+                </a:solidFill>
+                <a:latin typeface="IBM Plex Sans" pitchFamily="34" charset="0"/>
+                <a:ea typeface="IBM Plex Sans" pitchFamily="34" charset="-122"/>
+                <a:cs typeface="IBM Plex Sans" pitchFamily="34" charset="-120"/>
+              </a:rPr>
+              <a:t>293,085 resultados</a:t>
+            </a:r>
+            <a:endParaRPr lang="en-US" sz="1600" dirty="0"/>
+          </a:p>
+        </p:txBody>
+      </p:sp>
+      <p:sp>
+        <p:nvSpPr>
+          <p:cNvPr id="9" name="Shape 6"/>
+          <p:cNvSpPr/>
+          <p:nvPr/>
+        </p:nvSpPr>
+        <p:spPr>
+          <a:xfrm>
+            <a:off x="6197600" y="1930350"/>
+            <a:ext cx="5181600" cy="2419350"/>
+          </a:xfrm>
+          <a:prstGeom prst="roundRect">
+            <a:avLst>
+              <a:gd name="adj" fmla="val 2100"/>
+            </a:avLst>
+          </a:prstGeom>
+          <a:solidFill>
+            <a:srgbClr val="FFFFFF"/>
+          </a:solidFill>
+          <a:ln/>
+        </p:spPr>
+        <p:txBody>
+          <a:bodyPr/>
+          <a:lstStyle/>
+          <a:p>
+            <a:endParaRPr lang="es-ES_tradnl"/>
+          </a:p>
+        </p:txBody>
+      </p:sp>
+      <p:pic>
+        <p:nvPicPr>
+          <p:cNvPr id="10" name="Image 1" descr="Búsqueda de certificados vencidos en Costa Rica, con datos de terceros difuminados"/>
+          <p:cNvPicPr>
+            <a:picLocks noChangeAspect="1"/>
+          </p:cNvPicPr>
+          <p:nvPr/>
+        </p:nvPicPr>
+        <p:blipFill>
+          <a:blip r:embed="rId4"/>
+          <a:srcRect l="-175" r="-175"/>
+          <a:stretch/>
+        </p:blipFill>
+        <p:spPr>
+          <a:xfrm>
+            <a:off x="6203950" y="1936700"/>
+            <a:ext cx="5168900" cy="2406650"/>
+          </a:xfrm>
+          <a:prstGeom prst="roundRect">
+            <a:avLst>
+              <a:gd name="adj" fmla="val 1847"/>
+            </a:avLst>
+          </a:prstGeom>
+        </p:spPr>
+      </p:pic>
+      <p:sp>
+        <p:nvSpPr>
+          <p:cNvPr id="11" name="Shape 7"/>
+          <p:cNvSpPr/>
+          <p:nvPr/>
+        </p:nvSpPr>
+        <p:spPr>
+          <a:xfrm>
+            <a:off x="6200775" y="1933525"/>
+            <a:ext cx="5175250" cy="2413000"/>
+          </a:xfrm>
+          <a:prstGeom prst="roundRect">
+            <a:avLst>
+              <a:gd name="adj" fmla="val 1974"/>
+            </a:avLst>
+          </a:prstGeom>
+          <a:noFill/>
+          <a:ln w="6350">
+            <a:solidFill>
+              <a:srgbClr val="DDD8CC"/>
+            </a:solidFill>
+            <a:prstDash val="solid"/>
+          </a:ln>
+        </p:spPr>
+        <p:txBody>
+          <a:bodyPr/>
+          <a:lstStyle/>
+          <a:p>
+            <a:endParaRPr lang="es-ES_tradnl"/>
+          </a:p>
+        </p:txBody>
+      </p:sp>
+      <p:sp>
+        <p:nvSpPr>
+          <p:cNvPr id="12" name="Text 8"/>
+          <p:cNvSpPr/>
+          <p:nvPr/>
+        </p:nvSpPr>
+        <p:spPr>
+          <a:xfrm>
+            <a:off x="6197600" y="4451300"/>
+            <a:ext cx="5337048" cy="274290"/>
+          </a:xfrm>
+          <a:prstGeom prst="rect">
+            <a:avLst/>
+          </a:prstGeom>
+          <a:noFill/>
+          <a:ln/>
+        </p:spPr>
+        <p:txBody>
+          <a:bodyPr wrap="square" lIns="0" tIns="0" rIns="0" bIns="0" rtlCol="0" anchor="t">
+            <a:normAutofit/>
+          </a:bodyPr>
+          <a:lstStyle/>
+          <a:p>
+            <a:pPr marL="0" indent="0" algn="l">
+              <a:lnSpc>
+                <a:spcPts val="1960"/>
+              </a:lnSpc>
+              <a:buNone/>
+            </a:pPr>
+            <a:r>
+              <a:rPr lang="en-US" sz="1400" b="1" dirty="0">
+                <a:solidFill>
+                  <a:srgbClr val="16202F"/>
+                </a:solidFill>
+                <a:latin typeface="JetBrains Mono" pitchFamily="49" charset="0"/>
+                <a:ea typeface="JetBrains Mono" pitchFamily="49" charset="-122"/>
+                <a:cs typeface="JetBrains Mono" pitchFamily="49" charset="-120"/>
+              </a:rPr>
+              <a:t>country:CR ssl.cert.expired:true</a:t>
+            </a:r>
+            <a:endParaRPr lang="en-US" sz="1400" dirty="0"/>
+          </a:p>
+        </p:txBody>
+      </p:sp>
+      <p:sp>
+        <p:nvSpPr>
+          <p:cNvPr id="13" name="Text 9"/>
+          <p:cNvSpPr/>
+          <p:nvPr/>
+        </p:nvSpPr>
+        <p:spPr>
+          <a:xfrm>
+            <a:off x="6197600" y="4801791"/>
+            <a:ext cx="5337048" cy="309860"/>
+          </a:xfrm>
+          <a:prstGeom prst="rect">
+            <a:avLst/>
+          </a:prstGeom>
+          <a:noFill/>
+          <a:ln/>
+        </p:spPr>
+        <p:txBody>
+          <a:bodyPr wrap="square" lIns="0" tIns="0" rIns="0" bIns="0" rtlCol="0" anchor="t">
+            <a:normAutofit/>
+          </a:bodyPr>
+          <a:lstStyle/>
+          <a:p>
+            <a:pPr marL="0" indent="0" algn="l">
+              <a:lnSpc>
+                <a:spcPts val="2240"/>
+              </a:lnSpc>
+              <a:buNone/>
+            </a:pPr>
+            <a:r>
+              <a:rPr lang="en-US" sz="1600" dirty="0">
+                <a:solidFill>
+                  <a:srgbClr val="16202F"/>
+                </a:solidFill>
+                <a:latin typeface="IBM Plex Sans" pitchFamily="34" charset="0"/>
+                <a:ea typeface="IBM Plex Sans" pitchFamily="34" charset="-122"/>
+                <a:cs typeface="IBM Plex Sans" pitchFamily="34" charset="-120"/>
+              </a:rPr>
+              <a:t>2,399 servicios con certificado vencido</a:t>
+            </a:r>
+            <a:endParaRPr lang="en-US" sz="1600" dirty="0"/>
+          </a:p>
+        </p:txBody>
+      </p:sp>
+      <p:sp>
+        <p:nvSpPr>
+          <p:cNvPr id="14" name="Text 10"/>
+          <p:cNvSpPr/>
+          <p:nvPr/>
+        </p:nvSpPr>
+        <p:spPr>
+          <a:xfrm>
+            <a:off x="812800" y="6238280"/>
+            <a:ext cx="7680900" cy="238720"/>
+          </a:xfrm>
+          <a:prstGeom prst="rect">
+            <a:avLst/>
+          </a:prstGeom>
+          <a:noFill/>
+          <a:ln/>
+        </p:spPr>
+        <p:txBody>
+          <a:bodyPr wrap="square" lIns="0" tIns="0" rIns="0" bIns="0" rtlCol="0" anchor="t">
+            <a:normAutofit/>
+          </a:bodyPr>
+          <a:lstStyle/>
+          <a:p>
+            <a:pPr marL="0" indent="0" algn="l">
+              <a:lnSpc>
+                <a:spcPts val="1680"/>
+              </a:lnSpc>
+              <a:buNone/>
+            </a:pPr>
+            <a:r>
+              <a:rPr lang="en-US" sz="1200" dirty="0">
+                <a:solidFill>
+                  <a:srgbClr val="566274"/>
+                </a:solidFill>
+                <a:latin typeface="JetBrains Mono" pitchFamily="49" charset="0"/>
+                <a:ea typeface="JetBrains Mono" pitchFamily="49" charset="-122"/>
+                <a:cs typeface="JetBrains Mono" pitchFamily="49" charset="-120"/>
+              </a:rPr>
+              <a:t>Capturas propias, 27 oct 2026 · IPs y dominios de terceros difuminados</a:t>
+            </a:r>
+            <a:endParaRPr lang="en-US" sz="1200" dirty="0"/>
+          </a:p>
+        </p:txBody>
+      </p:sp>
+    </p:spTree>
+  </p:cSld>
+  <p:clrMapOvr>
+    <a:masterClrMapping/>
+  </p:clrMapOvr>
+</p:sld>
+</file>
+
+<file path=ppt/slides/slide9.xml><?xml version="1.0" encoding="utf-8"?>
+<p:sld xmlns:a="http://schemas.openxmlformats.org/drawingml/2006/main" xmlns:r="http://schemas.openxmlformats.org/officeDocument/2006/relationships" xmlns:p="http://schemas.openxmlformats.org/presentationml/2006/main">
+  <p:cSld name="Slide 11">
+    <p:bg>
+      <p:bgPr>
+        <a:solidFill>
+          <a:srgbClr val="0E1726"/>
+        </a:solidFill>
+        <a:effectLst/>
+      </p:bgPr>
+    </p:bg>
+    <p:spTree>
+      <p:nvGrpSpPr>
+        <p:cNvPr id="1" name=""/>
+        <p:cNvGrpSpPr/>
+        <p:nvPr/>
+      </p:nvGrpSpPr>
+      <p:grpSpPr>
+        <a:xfrm>
+          <a:off x="0" y="0"/>
+          <a:ext cx="0" cy="0"/>
+          <a:chOff x="0" y="0"/>
+          <a:chExt cx="0" cy="0"/>
+        </a:xfrm>
+      </p:grpSpPr>
+      <p:sp>
+        <p:nvSpPr>
+          <p:cNvPr id="2" name="Text 0"/>
+          <p:cNvSpPr/>
+          <p:nvPr/>
+        </p:nvSpPr>
+        <p:spPr>
+          <a:xfrm>
+            <a:off x="812800" y="812800"/>
+            <a:ext cx="10883392" cy="221059"/>
+          </a:xfrm>
+          <a:prstGeom prst="rect">
+            <a:avLst/>
+          </a:prstGeom>
+          <a:noFill/>
+          <a:ln/>
+        </p:spPr>
+        <p:txBody>
+          <a:bodyPr wrap="square" lIns="0" tIns="0" rIns="0" bIns="0" rtlCol="0" anchor="t">
+            <a:normAutofit/>
+          </a:bodyPr>
+          <a:lstStyle/>
+          <a:p>
+            <a:pPr marL="0" indent="0" algn="l">
+              <a:lnSpc>
+                <a:spcPts val="1570"/>
+              </a:lnSpc>
+              <a:buNone/>
+            </a:pPr>
+            <a:r>
+              <a:rPr lang="en-US" sz="1121" dirty="0">
+                <a:solidFill>
+                  <a:srgbClr val="F0654D"/>
+                </a:solidFill>
+                <a:latin typeface="JetBrains Mono" pitchFamily="49" charset="0"/>
+                <a:ea typeface="JetBrains Mono" pitchFamily="49" charset="-122"/>
+                <a:cs typeface="JetBrains Mono" pitchFamily="49" charset="-120"/>
+              </a:rPr>
+              <a:t>PRÁCTICA 4 · SCRIPT EN PYTHON CON LA API</a:t>
+            </a:r>
+            <a:endParaRPr lang="en-US" sz="1121" dirty="0"/>
+          </a:p>
+        </p:txBody>
+      </p:sp>
+      <p:sp>
+        <p:nvSpPr>
+          <p:cNvPr id="3" name="Text 1"/>
+          <p:cNvSpPr>
+            <a:spLocks noGrp="1"/>
+          </p:cNvSpPr>
+          <p:nvPr>
+            <p:ph type="title"/>
+          </p:nvPr>
+        </p:nvSpPr>
+        <p:spPr>
+          <a:xfrm>
+            <a:off x="812800" y="1237059"/>
+            <a:ext cx="10883392" cy="435372"/>
+          </a:xfrm>
+          <a:prstGeom prst="rect">
+            <a:avLst/>
+          </a:prstGeom>
+          <a:noFill/>
+          <a:ln/>
+        </p:spPr>
+        <p:txBody>
+          <a:bodyPr wrap="square" lIns="0" tIns="0" rIns="0" bIns="0" rtlCol="0" anchor="t">
+            <a:normAutofit/>
+          </a:bodyPr>
+          <a:lstStyle/>
+          <a:p>
+            <a:pPr marL="0" indent="0" algn="l">
+              <a:lnSpc>
+                <a:spcPts val="3267"/>
+              </a:lnSpc>
+              <a:buNone/>
+            </a:pPr>
+            <a:r>
+              <a:rPr lang="en-US" sz="2970" b="1" i="0" dirty="0">
+                <a:solidFill>
+                  <a:srgbClr val="E8EDF4"/>
+                </a:solidFill>
+                <a:latin typeface="IBM Plex Sans" pitchFamily="34" charset="0"/>
+                <a:ea typeface="IBM Plex Sans" pitchFamily="34" charset="-122"/>
+                <a:cs typeface="IBM Plex Sans" pitchFamily="34" charset="-120"/>
+              </a:rPr>
+              <a:t>Panorama de Costa Rica sin gastar un crédito</a:t>
+            </a:r>
+            <a:endParaRPr lang="en-US" sz="2970" dirty="0"/>
+          </a:p>
+        </p:txBody>
+      </p:sp>
+      <p:sp>
+        <p:nvSpPr>
+          <p:cNvPr id="4" name="Shape 2"/>
+          <p:cNvSpPr/>
+          <p:nvPr/>
+        </p:nvSpPr>
+        <p:spPr>
+          <a:xfrm>
+            <a:off x="815975" y="1878806"/>
+            <a:ext cx="3549650" cy="808930"/>
+          </a:xfrm>
+          <a:prstGeom prst="roundRect">
+            <a:avLst>
+              <a:gd name="adj" fmla="val 9027"/>
+            </a:avLst>
+          </a:prstGeom>
+          <a:solidFill>
+            <a:srgbClr val="16233A"/>
+          </a:solidFill>
+          <a:ln w="6350">
+            <a:solidFill>
+              <a:srgbClr val="26385A"/>
+            </a:solidFill>
+            <a:prstDash val="solid"/>
+          </a:ln>
+        </p:spPr>
+        <p:txBody>
+          <a:bodyPr/>
+          <a:lstStyle/>
+          <a:p>
+            <a:endParaRPr lang="es-ES_tradnl"/>
+          </a:p>
+        </p:txBody>
+      </p:sp>
+      <p:sp>
+        <p:nvSpPr>
+          <p:cNvPr id="5" name="Text 3"/>
+          <p:cNvSpPr/>
+          <p:nvPr/>
+        </p:nvSpPr>
+        <p:spPr>
+          <a:xfrm>
+            <a:off x="996950" y="2034381"/>
+            <a:ext cx="3283331" cy="309860"/>
+          </a:xfrm>
+          <a:prstGeom prst="rect">
+            <a:avLst/>
+          </a:prstGeom>
+          <a:noFill/>
+          <a:ln/>
+        </p:spPr>
+        <p:txBody>
+          <a:bodyPr wrap="square" lIns="0" tIns="0" rIns="0" bIns="0" rtlCol="0" anchor="t">
+            <a:normAutofit/>
+          </a:bodyPr>
+          <a:lstStyle/>
+          <a:p>
+            <a:pPr marL="0" indent="0" algn="l">
+              <a:lnSpc>
+                <a:spcPts val="2240"/>
+              </a:lnSpc>
+              <a:buNone/>
+            </a:pPr>
+            <a:r>
+              <a:rPr lang="en-US" sz="1600" b="1" dirty="0">
+                <a:solidFill>
+                  <a:srgbClr val="E8EDF4"/>
+                </a:solidFill>
+                <a:latin typeface="IBM Plex Sans" pitchFamily="34" charset="0"/>
+                <a:ea typeface="IBM Plex Sans" pitchFamily="34" charset="-122"/>
+                <a:cs typeface="IBM Plex Sans" pitchFamily="34" charset="-120"/>
+              </a:rPr>
+              <a:t>Solo api.count()</a:t>
+            </a:r>
+            <a:endParaRPr lang="en-US" sz="1600" dirty="0"/>
+          </a:p>
+        </p:txBody>
+      </p:sp>
+      <p:sp>
+        <p:nvSpPr>
+          <p:cNvPr id="6" name="Text 4"/>
+          <p:cNvSpPr/>
+          <p:nvPr/>
+        </p:nvSpPr>
+        <p:spPr>
+          <a:xfrm>
+            <a:off x="996950" y="2318841"/>
+            <a:ext cx="3283331" cy="238720"/>
+          </a:xfrm>
+          <a:prstGeom prst="rect">
+            <a:avLst/>
+          </a:prstGeom>
+          <a:noFill/>
+          <a:ln/>
+        </p:spPr>
+        <p:txBody>
+          <a:bodyPr wrap="square" lIns="0" tIns="0" rIns="0" bIns="0" rtlCol="0" anchor="t">
+            <a:normAutofit/>
+          </a:bodyPr>
+          <a:lstStyle/>
+          <a:p>
+            <a:pPr marL="0" indent="0" algn="l">
+              <a:lnSpc>
+                <a:spcPts val="1680"/>
+              </a:lnSpc>
+              <a:buNone/>
+            </a:pPr>
+            <a:r>
+              <a:rPr lang="en-US" sz="1200" dirty="0">
+                <a:solidFill>
+                  <a:srgbClr val="9FB0C6"/>
+                </a:solidFill>
+                <a:latin typeface="IBM Plex Sans" pitchFamily="34" charset="0"/>
+                <a:ea typeface="IBM Plex Sans" pitchFamily="34" charset="-122"/>
+                <a:cs typeface="IBM Plex Sans" pitchFamily="34" charset="-120"/>
+              </a:rPr>
+              <a:t>Totales y facets, nunca IPs ni banners</a:t>
+            </a:r>
+            <a:endParaRPr lang="en-US" sz="1200" dirty="0"/>
+          </a:p>
+        </p:txBody>
+      </p:sp>
+      <p:sp>
+        <p:nvSpPr>
+          <p:cNvPr id="7" name="Shape 5"/>
+          <p:cNvSpPr/>
+          <p:nvPr/>
+        </p:nvSpPr>
+        <p:spPr>
+          <a:xfrm>
+            <a:off x="815975" y="2821087"/>
+            <a:ext cx="3549650" cy="808930"/>
+          </a:xfrm>
+          <a:prstGeom prst="roundRect">
+            <a:avLst>
+              <a:gd name="adj" fmla="val 9027"/>
+            </a:avLst>
+          </a:prstGeom>
+          <a:solidFill>
+            <a:srgbClr val="16233A"/>
+          </a:solidFill>
+          <a:ln w="6350">
+            <a:solidFill>
+              <a:srgbClr val="26385A"/>
+            </a:solidFill>
+            <a:prstDash val="solid"/>
+          </a:ln>
+        </p:spPr>
+        <p:txBody>
+          <a:bodyPr/>
+          <a:lstStyle/>
+          <a:p>
+            <a:endParaRPr lang="es-ES_tradnl"/>
+          </a:p>
+        </p:txBody>
+      </p:sp>
+      <p:sp>
+        <p:nvSpPr>
+          <p:cNvPr id="8" name="Text 6"/>
+          <p:cNvSpPr/>
+          <p:nvPr/>
+        </p:nvSpPr>
+        <p:spPr>
+          <a:xfrm>
+            <a:off x="996950" y="2976662"/>
+            <a:ext cx="3365500" cy="309860"/>
+          </a:xfrm>
+          <a:prstGeom prst="rect">
+            <a:avLst/>
+          </a:prstGeom>
+          <a:noFill/>
+          <a:ln/>
+        </p:spPr>
+        <p:txBody>
+          <a:bodyPr wrap="square" lIns="0" tIns="0" rIns="0" bIns="0" rtlCol="0" anchor="t">
+            <a:normAutofit/>
+          </a:bodyPr>
+          <a:lstStyle/>
+          <a:p>
+            <a:pPr marL="0" indent="0" algn="l">
+              <a:lnSpc>
+                <a:spcPts val="2240"/>
+              </a:lnSpc>
+              <a:buNone/>
+            </a:pPr>
+            <a:r>
+              <a:rPr lang="en-US" sz="1600" b="1" dirty="0">
+                <a:solidFill>
+                  <a:srgbClr val="E8EDF4"/>
+                </a:solidFill>
+                <a:latin typeface="IBM Plex Sans" pitchFamily="34" charset="0"/>
+                <a:ea typeface="IBM Plex Sans" pitchFamily="34" charset="-122"/>
+                <a:cs typeface="IBM Plex Sans" pitchFamily="34" charset="-120"/>
+              </a:rPr>
+              <a:t>Créditos: 100 antes, 100 después</a:t>
+            </a:r>
+            <a:endParaRPr lang="en-US" sz="1600" dirty="0"/>
+          </a:p>
+        </p:txBody>
+      </p:sp>
+      <p:sp>
+        <p:nvSpPr>
+          <p:cNvPr id="9" name="Text 7"/>
+          <p:cNvSpPr/>
+          <p:nvPr/>
+        </p:nvSpPr>
+        <p:spPr>
+          <a:xfrm>
+            <a:off x="996950" y="3261122"/>
+            <a:ext cx="3283331" cy="238720"/>
+          </a:xfrm>
+          <a:prstGeom prst="rect">
+            <a:avLst/>
+          </a:prstGeom>
+          <a:noFill/>
+          <a:ln/>
+        </p:spPr>
+        <p:txBody>
+          <a:bodyPr wrap="square" lIns="0" tIns="0" rIns="0" bIns="0" rtlCol="0" anchor="t">
+            <a:normAutofit/>
+          </a:bodyPr>
+          <a:lstStyle/>
+          <a:p>
+            <a:pPr marL="0" indent="0" algn="l">
+              <a:lnSpc>
+                <a:spcPts val="1680"/>
+              </a:lnSpc>
+              <a:buNone/>
+            </a:pPr>
+            <a:r>
+              <a:rPr lang="en-US" sz="1200" dirty="0">
+                <a:solidFill>
+                  <a:srgbClr val="9FB0C6"/>
+                </a:solidFill>
+                <a:latin typeface="IBM Plex Sans" pitchFamily="34" charset="0"/>
+                <a:ea typeface="IBM Plex Sans" pitchFamily="34" charset="-122"/>
+                <a:cs typeface="IBM Plex Sans" pitchFamily="34" charset="-120"/>
+              </a:rPr>
+              <a:t>Verificado en la ejecución</a:t>
+            </a:r>
+            <a:endParaRPr lang="en-US" sz="1200" dirty="0"/>
+          </a:p>
+        </p:txBody>
+      </p:sp>
+      <p:sp>
+        <p:nvSpPr>
+          <p:cNvPr id="10" name="Shape 8"/>
+          <p:cNvSpPr/>
+          <p:nvPr/>
+        </p:nvSpPr>
+        <p:spPr>
+          <a:xfrm>
+            <a:off x="819150" y="3766542"/>
+            <a:ext cx="3543300" cy="1028601"/>
+          </a:xfrm>
+          <a:prstGeom prst="roundRect">
+            <a:avLst>
+              <a:gd name="adj" fmla="val 6791"/>
+            </a:avLst>
+          </a:prstGeom>
+          <a:solidFill>
+            <a:srgbClr val="16233A"/>
+          </a:solidFill>
+          <a:ln w="12700">
+            <a:solidFill>
+              <a:srgbClr val="4CC3B0"/>
+            </a:solidFill>
+            <a:prstDash val="solid"/>
+          </a:ln>
+        </p:spPr>
+        <p:txBody>
+          <a:bodyPr/>
+          <a:lstStyle/>
+          <a:p>
+            <a:endParaRPr lang="es-ES_tradnl"/>
+          </a:p>
+        </p:txBody>
+      </p:sp>
+      <p:sp>
+        <p:nvSpPr>
+          <p:cNvPr id="11" name="Text 9"/>
+          <p:cNvSpPr/>
+          <p:nvPr/>
+        </p:nvSpPr>
+        <p:spPr>
+          <a:xfrm>
+            <a:off x="1003300" y="3925292"/>
+            <a:ext cx="3270250" cy="309860"/>
+          </a:xfrm>
+          <a:prstGeom prst="rect">
+            <a:avLst/>
+          </a:prstGeom>
+          <a:noFill/>
+          <a:ln/>
+        </p:spPr>
+        <p:txBody>
+          <a:bodyPr wrap="square" lIns="0" tIns="0" rIns="0" bIns="0" rtlCol="0" anchor="t">
+            <a:normAutofit/>
+          </a:bodyPr>
+          <a:lstStyle/>
+          <a:p>
+            <a:pPr marL="0" indent="0" algn="l">
+              <a:lnSpc>
+                <a:spcPts val="2240"/>
+              </a:lnSpc>
+              <a:buNone/>
+            </a:pPr>
+            <a:r>
+              <a:rPr lang="en-US" sz="1600" b="1" dirty="0">
+                <a:solidFill>
+                  <a:srgbClr val="4CC3B0"/>
+                </a:solidFill>
+                <a:latin typeface="IBM Plex Sans" pitchFamily="34" charset="0"/>
+                <a:ea typeface="IBM Plex Sans" pitchFamily="34" charset="-122"/>
+                <a:cs typeface="IBM Plex Sans" pitchFamily="34" charset="-120"/>
+              </a:rPr>
+              <a:t>Opción --offline</a:t>
+            </a:r>
+            <a:endParaRPr lang="en-US" sz="1600" dirty="0"/>
+          </a:p>
+        </p:txBody>
+      </p:sp>
+      <p:sp>
+        <p:nvSpPr>
+          <p:cNvPr id="12" name="Text 10"/>
+          <p:cNvSpPr/>
+          <p:nvPr/>
+        </p:nvSpPr>
+        <p:spPr>
+          <a:xfrm>
+            <a:off x="1003300" y="4209752"/>
+            <a:ext cx="3270250" cy="452041"/>
+          </a:xfrm>
+          <a:prstGeom prst="rect">
+            <a:avLst/>
+          </a:prstGeom>
+          <a:noFill/>
+          <a:ln/>
+        </p:spPr>
+        <p:txBody>
+          <a:bodyPr wrap="square" lIns="0" tIns="0" rIns="0" bIns="0" rtlCol="0" anchor="t">
+            <a:normAutofit/>
+          </a:bodyPr>
+          <a:lstStyle/>
+          <a:p>
+            <a:pPr marL="0" indent="0" algn="l">
+              <a:lnSpc>
+                <a:spcPts val="1680"/>
+              </a:lnSpc>
+              <a:buNone/>
+            </a:pPr>
+            <a:r>
+              <a:rPr lang="en-US" sz="1200" dirty="0">
+                <a:solidFill>
+                  <a:srgbClr val="9FB0C6"/>
+                </a:solidFill>
+                <a:latin typeface="IBM Plex Sans" pitchFamily="34" charset="0"/>
+                <a:ea typeface="IBM Plex Sans" pitchFamily="34" charset="-122"/>
+                <a:cs typeface="IBM Plex Sans" pitchFamily="34" charset="-120"/>
+              </a:rPr>
+              <a:t>Regenera los gráficos sin red: nuestro respaldo</a:t>
+            </a:r>
+            <a:endParaRPr lang="en-US" sz="1200" dirty="0"/>
+          </a:p>
+        </p:txBody>
+      </p:sp>
+      <p:sp>
+        <p:nvSpPr>
+          <p:cNvPr id="13" name="Text 11"/>
+          <p:cNvSpPr/>
+          <p:nvPr/>
+        </p:nvSpPr>
+        <p:spPr>
+          <a:xfrm>
+            <a:off x="812800" y="4928493"/>
+            <a:ext cx="3662680" cy="452041"/>
+          </a:xfrm>
+          <a:prstGeom prst="rect">
+            <a:avLst/>
+          </a:prstGeom>
+          <a:noFill/>
+          <a:ln/>
+        </p:spPr>
+        <p:txBody>
+          <a:bodyPr wrap="square" lIns="0" tIns="0" rIns="0" bIns="0" rtlCol="0" anchor="t">
+            <a:normAutofit/>
+          </a:bodyPr>
+          <a:lstStyle/>
+          <a:p>
+            <a:pPr marL="0" indent="0" algn="l">
+              <a:lnSpc>
+                <a:spcPts val="1680"/>
+              </a:lnSpc>
+              <a:buNone/>
+            </a:pPr>
+            <a:r>
+              <a:rPr lang="en-US" sz="1200" dirty="0">
+                <a:solidFill>
+                  <a:srgbClr val="E8EDF4"/>
+                </a:solidFill>
+                <a:latin typeface="JetBrains Mono" pitchFamily="49" charset="0"/>
+                <a:ea typeface="JetBrains Mono" pitchFamily="49" charset="-122"/>
+                <a:cs typeface="JetBrains Mono" pitchFamily="49" charset="-120"/>
+              </a:rPr>
+              <a:t>python shodan_cr.py</a:t>
+            </a:r>
+            <a:endParaRPr lang="en-US" sz="1200" dirty="0"/>
+          </a:p>
+          <a:p>
+            <a:pPr marL="0" indent="0" algn="l">
+              <a:lnSpc>
+                <a:spcPts val="1680"/>
+              </a:lnSpc>
+              <a:buNone/>
+            </a:pPr>
+            <a:r>
+              <a:rPr lang="en-US" sz="1200" dirty="0">
+                <a:solidFill>
+                  <a:srgbClr val="E8EDF4"/>
+                </a:solidFill>
+                <a:latin typeface="JetBrains Mono" pitchFamily="49" charset="0"/>
+                <a:ea typeface="JetBrains Mono" pitchFamily="49" charset="-122"/>
+                <a:cs typeface="JetBrains Mono" pitchFamily="49" charset="-120"/>
+              </a:rPr>
+              <a:t>python shodan_cr.py --offline</a:t>
+            </a:r>
+            <a:endParaRPr lang="en-US" sz="1200" dirty="0"/>
+          </a:p>
+        </p:txBody>
+      </p:sp>
+      <p:sp>
+        <p:nvSpPr>
+          <p:cNvPr id="14" name="Shape 12"/>
+          <p:cNvSpPr/>
+          <p:nvPr/>
+        </p:nvSpPr>
+        <p:spPr>
+          <a:xfrm>
+            <a:off x="4622800" y="1875631"/>
+            <a:ext cx="6731000" cy="4324350"/>
+          </a:xfrm>
+          <a:prstGeom prst="roundRect">
+            <a:avLst>
+              <a:gd name="adj" fmla="val 1175"/>
+            </a:avLst>
+          </a:prstGeom>
+          <a:solidFill>
+            <a:srgbClr val="FFFFFF"/>
+          </a:solidFill>
+          <a:ln/>
+        </p:spPr>
+        <p:txBody>
+          <a:bodyPr/>
+          <a:lstStyle/>
+          <a:p>
+            <a:endParaRPr lang="es-ES_tradnl"/>
+          </a:p>
+        </p:txBody>
+      </p:sp>
+      <p:pic>
+        <p:nvPicPr>
+          <p:cNvPr id="15" name="Image 0" descr="Dashboard con puertos, productos, campo org y servicios comunes de Costa Rica"/>
+          <p:cNvPicPr>
+            <a:picLocks noChangeAspect="1"/>
+          </p:cNvPicPr>
+          <p:nvPr/>
+        </p:nvPicPr>
+        <p:blipFill>
+          <a:blip r:embed="rId3"/>
+          <a:srcRect l="-84" r="-84"/>
+          <a:stretch/>
+        </p:blipFill>
+        <p:spPr>
+          <a:xfrm>
+            <a:off x="4629150" y="1881981"/>
+            <a:ext cx="6718300" cy="4311650"/>
+          </a:xfrm>
+          <a:prstGeom prst="roundRect">
+            <a:avLst>
+              <a:gd name="adj" fmla="val 1031"/>
+            </a:avLst>
+          </a:prstGeom>
+        </p:spPr>
+      </p:pic>
+      <p:sp>
+        <p:nvSpPr>
+          <p:cNvPr id="16" name="Shape 13"/>
+          <p:cNvSpPr/>
+          <p:nvPr/>
+        </p:nvSpPr>
+        <p:spPr>
+          <a:xfrm>
+            <a:off x="4625975" y="1878806"/>
+            <a:ext cx="6724650" cy="4318000"/>
+          </a:xfrm>
+          <a:prstGeom prst="roundRect">
+            <a:avLst>
+              <a:gd name="adj" fmla="val 1103"/>
+            </a:avLst>
+          </a:prstGeom>
+          <a:noFill/>
+          <a:ln w="6350">
+            <a:solidFill>
+              <a:srgbClr val="26385A"/>
+            </a:solidFill>
+            <a:prstDash val="solid"/>
+          </a:ln>
+        </p:spPr>
+        <p:txBody>
+          <a:bodyPr/>
+          <a:lstStyle/>
+          <a:p>
+            <a:endParaRPr lang="es-ES_tradnl"/>
+          </a:p>
+        </p:txBody>
+      </p:sp>
+      <p:sp>
+        <p:nvSpPr>
+          <p:cNvPr id="17" name="Text 14"/>
+          <p:cNvSpPr/>
+          <p:nvPr/>
+        </p:nvSpPr>
+        <p:spPr>
+          <a:xfrm>
+            <a:off x="812800" y="6238280"/>
+            <a:ext cx="5705773" cy="238720"/>
+          </a:xfrm>
+          <a:prstGeom prst="rect">
+            <a:avLst/>
+          </a:prstGeom>
+          <a:noFill/>
+          <a:ln/>
+        </p:spPr>
+        <p:txBody>
+          <a:bodyPr wrap="square" lIns="0" tIns="0" rIns="0" bIns="0" rtlCol="0" anchor="t">
+            <a:normAutofit/>
+          </a:bodyPr>
+          <a:lstStyle/>
+          <a:p>
+            <a:pPr marL="0" indent="0" algn="l">
+              <a:lnSpc>
+                <a:spcPts val="1680"/>
+              </a:lnSpc>
+              <a:buNone/>
+            </a:pPr>
+            <a:r>
+              <a:rPr lang="en-US" sz="1200" dirty="0">
+                <a:solidFill>
+                  <a:srgbClr val="9FB0C6"/>
+                </a:solidFill>
+                <a:latin typeface="JetBrains Mono" pitchFamily="49" charset="0"/>
+                <a:ea typeface="JetBrains Mono" pitchFamily="49" charset="-122"/>
+                <a:cs typeface="JetBrains Mono" pitchFamily="49" charset="-120"/>
+              </a:rPr>
+              <a:t>Fuente: Shodan API, 27 oct 2026 · elaboración propia</a:t>
             </a:r>
             <a:endParaRPr lang="en-US" sz="1200" dirty="0"/>
           </a:p>
